--- a/exports/pptx/lessons/middle-module-06-moon-phases-tithi/day-05-lunar-months.pptx
+++ b/exports/pptx/lessons/middle-module-06-moon-phases-tithi/day-05-lunar-months.pptx
@@ -17,9 +17,19 @@
     <p:sldId id="265" r:id="rId11"/>
     <p:sldId id="266" r:id="rId12"/>
     <p:sldId id="267" r:id="rId13"/>
+    <p:sldId id="268" r:id="rId14"/>
+    <p:sldId id="269" r:id="rId15"/>
+    <p:sldId id="270" r:id="rId16"/>
+    <p:sldId id="271" r:id="rId17"/>
+    <p:sldId id="272" r:id="rId18"/>
+    <p:sldId id="273" r:id="rId19"/>
+    <p:sldId id="274" r:id="rId20"/>
+    <p:sldId id="275" r:id="rId21"/>
+    <p:sldId id="276" r:id="rId22"/>
+    <p:sldId id="277" r:id="rId23"/>
   </p:sldIdLst>
   <p:notesMasterIdLst>
-    <p:notesMasterId r:id="rId14"/>
+    <p:notesMasterId r:id="rId24"/>
   </p:notesMasterIdLst>
   <p:sldSz cx="9144000" cy="5143500"/>
   <p:notesSz cx="5143500" cy="9144000"/>
@@ -819,6 +829,622 @@
 </p:notes>
 </file>
 
+<file path=ppt/notesSlides/notesSlide13.xml><?xml version="1.0" encoding="utf-8"?>
+<p:notes xmlns:a="http://schemas.openxmlformats.org/drawingml/2006/main" xmlns:r="http://schemas.openxmlformats.org/officeDocument/2006/relationships" xmlns:p="http://schemas.openxmlformats.org/presentationml/2006/main">
+  <p:cSld>
+    <p:spTree>
+      <p:nvGrpSpPr>
+        <p:cNvPr id="1" name=""/>
+        <p:cNvGrpSpPr/>
+        <p:nvPr/>
+      </p:nvGrpSpPr>
+      <p:grpSpPr>
+        <a:xfrm>
+          <a:off x="0" y="0"/>
+          <a:ext cx="0" cy="0"/>
+          <a:chOff x="0" y="0"/>
+          <a:chExt cx="0" cy="0"/>
+        </a:xfrm>
+      </p:grpSpPr>
+      <p:sp>
+        <p:nvSpPr>
+          <p:cNvPr id="2" name="Slide Image Placeholder 1"/>
+          <p:cNvSpPr>
+            <a:spLocks noGrp="1" noRot="1" noChangeAspect="1"/>
+          </p:cNvSpPr>
+          <p:nvPr>
+            <p:ph type="sldImg"/>
+          </p:nvPr>
+        </p:nvSpPr>
+        <p:spPr/>
+      </p:sp>
+      <p:sp>
+        <p:nvSpPr>
+          <p:cNvPr id="3" name="Notes Placeholder 2"/>
+          <p:cNvSpPr>
+            <a:spLocks noGrp="1"/>
+          </p:cNvSpPr>
+          <p:nvPr>
+            <p:ph type="body" idx="1"/>
+          </p:nvPr>
+        </p:nvSpPr>
+        <p:spPr/>
+        <p:txBody>
+          <a:bodyPr/>
+          <a:lstStyle/>
+          <a:p>
+            <a:r>
+              <a:rPr lang="en-US" dirty="0"/>
+              <a:t/>
+            </a:r>
+            <a:endParaRPr lang="en-US" dirty="0"/>
+          </a:p>
+        </p:txBody>
+      </p:sp>
+      <p:sp>
+        <p:nvSpPr>
+          <p:cNvPr id="4" name="Slide Number Placeholder 3"/>
+          <p:cNvSpPr>
+            <a:spLocks noGrp="1"/>
+          </p:cNvSpPr>
+          <p:nvPr>
+            <p:ph type="sldNum" sz="quarter" idx="10"/>
+          </p:nvPr>
+        </p:nvSpPr>
+        <p:spPr/>
+        <p:txBody>
+          <a:bodyPr/>
+          <a:lstStyle/>
+          <a:p>
+            <a:fld id="{F7021451-1387-4CA6-816F-3879F97B5CBC}" type="slidenum">
+              <a:rPr lang="en-US"/>
+              <a:t>13</a:t>
+            </a:fld>
+            <a:endParaRPr lang="en-US"/>
+          </a:p>
+        </p:txBody>
+      </p:sp>
+    </p:spTree>
+    <p:extLst>
+      <p:ext uri="{BB962C8B-B14F-4D97-AF65-F5344CB8AC3E}">
+        <p14:creationId xmlns:p14="http://schemas.microsoft.com/office/powerpoint/2010/main" val="1024086991"/>
+      </p:ext>
+    </p:extLst>
+  </p:cSld>
+  <p:clrMapOvr>
+    <a:masterClrMapping/>
+  </p:clrMapOvr>
+</p:notes>
+</file>
+
+<file path=ppt/notesSlides/notesSlide14.xml><?xml version="1.0" encoding="utf-8"?>
+<p:notes xmlns:a="http://schemas.openxmlformats.org/drawingml/2006/main" xmlns:r="http://schemas.openxmlformats.org/officeDocument/2006/relationships" xmlns:p="http://schemas.openxmlformats.org/presentationml/2006/main">
+  <p:cSld>
+    <p:spTree>
+      <p:nvGrpSpPr>
+        <p:cNvPr id="1" name=""/>
+        <p:cNvGrpSpPr/>
+        <p:nvPr/>
+      </p:nvGrpSpPr>
+      <p:grpSpPr>
+        <a:xfrm>
+          <a:off x="0" y="0"/>
+          <a:ext cx="0" cy="0"/>
+          <a:chOff x="0" y="0"/>
+          <a:chExt cx="0" cy="0"/>
+        </a:xfrm>
+      </p:grpSpPr>
+      <p:sp>
+        <p:nvSpPr>
+          <p:cNvPr id="2" name="Slide Image Placeholder 1"/>
+          <p:cNvSpPr>
+            <a:spLocks noGrp="1" noRot="1" noChangeAspect="1"/>
+          </p:cNvSpPr>
+          <p:nvPr>
+            <p:ph type="sldImg"/>
+          </p:nvPr>
+        </p:nvSpPr>
+        <p:spPr/>
+      </p:sp>
+      <p:sp>
+        <p:nvSpPr>
+          <p:cNvPr id="3" name="Notes Placeholder 2"/>
+          <p:cNvSpPr>
+            <a:spLocks noGrp="1"/>
+          </p:cNvSpPr>
+          <p:nvPr>
+            <p:ph type="body" idx="1"/>
+          </p:nvPr>
+        </p:nvSpPr>
+        <p:spPr/>
+        <p:txBody>
+          <a:bodyPr/>
+          <a:lstStyle/>
+          <a:p>
+            <a:r>
+              <a:rPr lang="en-US" dirty="0"/>
+              <a:t/>
+            </a:r>
+            <a:endParaRPr lang="en-US" dirty="0"/>
+          </a:p>
+        </p:txBody>
+      </p:sp>
+      <p:sp>
+        <p:nvSpPr>
+          <p:cNvPr id="4" name="Slide Number Placeholder 3"/>
+          <p:cNvSpPr>
+            <a:spLocks noGrp="1"/>
+          </p:cNvSpPr>
+          <p:nvPr>
+            <p:ph type="sldNum" sz="quarter" idx="10"/>
+          </p:nvPr>
+        </p:nvSpPr>
+        <p:spPr/>
+        <p:txBody>
+          <a:bodyPr/>
+          <a:lstStyle/>
+          <a:p>
+            <a:fld id="{F7021451-1387-4CA6-816F-3879F97B5CBC}" type="slidenum">
+              <a:rPr lang="en-US"/>
+              <a:t>14</a:t>
+            </a:fld>
+            <a:endParaRPr lang="en-US"/>
+          </a:p>
+        </p:txBody>
+      </p:sp>
+    </p:spTree>
+    <p:extLst>
+      <p:ext uri="{BB962C8B-B14F-4D97-AF65-F5344CB8AC3E}">
+        <p14:creationId xmlns:p14="http://schemas.microsoft.com/office/powerpoint/2010/main" val="1024086991"/>
+      </p:ext>
+    </p:extLst>
+  </p:cSld>
+  <p:clrMapOvr>
+    <a:masterClrMapping/>
+  </p:clrMapOvr>
+</p:notes>
+</file>
+
+<file path=ppt/notesSlides/notesSlide15.xml><?xml version="1.0" encoding="utf-8"?>
+<p:notes xmlns:a="http://schemas.openxmlformats.org/drawingml/2006/main" xmlns:r="http://schemas.openxmlformats.org/officeDocument/2006/relationships" xmlns:p="http://schemas.openxmlformats.org/presentationml/2006/main">
+  <p:cSld>
+    <p:spTree>
+      <p:nvGrpSpPr>
+        <p:cNvPr id="1" name=""/>
+        <p:cNvGrpSpPr/>
+        <p:nvPr/>
+      </p:nvGrpSpPr>
+      <p:grpSpPr>
+        <a:xfrm>
+          <a:off x="0" y="0"/>
+          <a:ext cx="0" cy="0"/>
+          <a:chOff x="0" y="0"/>
+          <a:chExt cx="0" cy="0"/>
+        </a:xfrm>
+      </p:grpSpPr>
+      <p:sp>
+        <p:nvSpPr>
+          <p:cNvPr id="2" name="Slide Image Placeholder 1"/>
+          <p:cNvSpPr>
+            <a:spLocks noGrp="1" noRot="1" noChangeAspect="1"/>
+          </p:cNvSpPr>
+          <p:nvPr>
+            <p:ph type="sldImg"/>
+          </p:nvPr>
+        </p:nvSpPr>
+        <p:spPr/>
+      </p:sp>
+      <p:sp>
+        <p:nvSpPr>
+          <p:cNvPr id="3" name="Notes Placeholder 2"/>
+          <p:cNvSpPr>
+            <a:spLocks noGrp="1"/>
+          </p:cNvSpPr>
+          <p:nvPr>
+            <p:ph type="body" idx="1"/>
+          </p:nvPr>
+        </p:nvSpPr>
+        <p:spPr/>
+        <p:txBody>
+          <a:bodyPr/>
+          <a:lstStyle/>
+          <a:p>
+            <a:r>
+              <a:rPr lang="en-US" dirty="0"/>
+              <a:t/>
+            </a:r>
+            <a:endParaRPr lang="en-US" dirty="0"/>
+          </a:p>
+        </p:txBody>
+      </p:sp>
+      <p:sp>
+        <p:nvSpPr>
+          <p:cNvPr id="4" name="Slide Number Placeholder 3"/>
+          <p:cNvSpPr>
+            <a:spLocks noGrp="1"/>
+          </p:cNvSpPr>
+          <p:nvPr>
+            <p:ph type="sldNum" sz="quarter" idx="10"/>
+          </p:nvPr>
+        </p:nvSpPr>
+        <p:spPr/>
+        <p:txBody>
+          <a:bodyPr/>
+          <a:lstStyle/>
+          <a:p>
+            <a:fld id="{F7021451-1387-4CA6-816F-3879F97B5CBC}" type="slidenum">
+              <a:rPr lang="en-US"/>
+              <a:t>15</a:t>
+            </a:fld>
+            <a:endParaRPr lang="en-US"/>
+          </a:p>
+        </p:txBody>
+      </p:sp>
+    </p:spTree>
+    <p:extLst>
+      <p:ext uri="{BB962C8B-B14F-4D97-AF65-F5344CB8AC3E}">
+        <p14:creationId xmlns:p14="http://schemas.microsoft.com/office/powerpoint/2010/main" val="1024086991"/>
+      </p:ext>
+    </p:extLst>
+  </p:cSld>
+  <p:clrMapOvr>
+    <a:masterClrMapping/>
+  </p:clrMapOvr>
+</p:notes>
+</file>
+
+<file path=ppt/notesSlides/notesSlide16.xml><?xml version="1.0" encoding="utf-8"?>
+<p:notes xmlns:a="http://schemas.openxmlformats.org/drawingml/2006/main" xmlns:r="http://schemas.openxmlformats.org/officeDocument/2006/relationships" xmlns:p="http://schemas.openxmlformats.org/presentationml/2006/main">
+  <p:cSld>
+    <p:spTree>
+      <p:nvGrpSpPr>
+        <p:cNvPr id="1" name=""/>
+        <p:cNvGrpSpPr/>
+        <p:nvPr/>
+      </p:nvGrpSpPr>
+      <p:grpSpPr>
+        <a:xfrm>
+          <a:off x="0" y="0"/>
+          <a:ext cx="0" cy="0"/>
+          <a:chOff x="0" y="0"/>
+          <a:chExt cx="0" cy="0"/>
+        </a:xfrm>
+      </p:grpSpPr>
+      <p:sp>
+        <p:nvSpPr>
+          <p:cNvPr id="2" name="Slide Image Placeholder 1"/>
+          <p:cNvSpPr>
+            <a:spLocks noGrp="1" noRot="1" noChangeAspect="1"/>
+          </p:cNvSpPr>
+          <p:nvPr>
+            <p:ph type="sldImg"/>
+          </p:nvPr>
+        </p:nvSpPr>
+        <p:spPr/>
+      </p:sp>
+      <p:sp>
+        <p:nvSpPr>
+          <p:cNvPr id="3" name="Notes Placeholder 2"/>
+          <p:cNvSpPr>
+            <a:spLocks noGrp="1"/>
+          </p:cNvSpPr>
+          <p:nvPr>
+            <p:ph type="body" idx="1"/>
+          </p:nvPr>
+        </p:nvSpPr>
+        <p:spPr/>
+        <p:txBody>
+          <a:bodyPr/>
+          <a:lstStyle/>
+          <a:p>
+            <a:r>
+              <a:rPr lang="en-US" dirty="0"/>
+              <a:t/>
+            </a:r>
+            <a:endParaRPr lang="en-US" dirty="0"/>
+          </a:p>
+        </p:txBody>
+      </p:sp>
+      <p:sp>
+        <p:nvSpPr>
+          <p:cNvPr id="4" name="Slide Number Placeholder 3"/>
+          <p:cNvSpPr>
+            <a:spLocks noGrp="1"/>
+          </p:cNvSpPr>
+          <p:nvPr>
+            <p:ph type="sldNum" sz="quarter" idx="10"/>
+          </p:nvPr>
+        </p:nvSpPr>
+        <p:spPr/>
+        <p:txBody>
+          <a:bodyPr/>
+          <a:lstStyle/>
+          <a:p>
+            <a:fld id="{F7021451-1387-4CA6-816F-3879F97B5CBC}" type="slidenum">
+              <a:rPr lang="en-US"/>
+              <a:t>16</a:t>
+            </a:fld>
+            <a:endParaRPr lang="en-US"/>
+          </a:p>
+        </p:txBody>
+      </p:sp>
+    </p:spTree>
+    <p:extLst>
+      <p:ext uri="{BB962C8B-B14F-4D97-AF65-F5344CB8AC3E}">
+        <p14:creationId xmlns:p14="http://schemas.microsoft.com/office/powerpoint/2010/main" val="1024086991"/>
+      </p:ext>
+    </p:extLst>
+  </p:cSld>
+  <p:clrMapOvr>
+    <a:masterClrMapping/>
+  </p:clrMapOvr>
+</p:notes>
+</file>
+
+<file path=ppt/notesSlides/notesSlide17.xml><?xml version="1.0" encoding="utf-8"?>
+<p:notes xmlns:a="http://schemas.openxmlformats.org/drawingml/2006/main" xmlns:r="http://schemas.openxmlformats.org/officeDocument/2006/relationships" xmlns:p="http://schemas.openxmlformats.org/presentationml/2006/main">
+  <p:cSld>
+    <p:spTree>
+      <p:nvGrpSpPr>
+        <p:cNvPr id="1" name=""/>
+        <p:cNvGrpSpPr/>
+        <p:nvPr/>
+      </p:nvGrpSpPr>
+      <p:grpSpPr>
+        <a:xfrm>
+          <a:off x="0" y="0"/>
+          <a:ext cx="0" cy="0"/>
+          <a:chOff x="0" y="0"/>
+          <a:chExt cx="0" cy="0"/>
+        </a:xfrm>
+      </p:grpSpPr>
+      <p:sp>
+        <p:nvSpPr>
+          <p:cNvPr id="2" name="Slide Image Placeholder 1"/>
+          <p:cNvSpPr>
+            <a:spLocks noGrp="1" noRot="1" noChangeAspect="1"/>
+          </p:cNvSpPr>
+          <p:nvPr>
+            <p:ph type="sldImg"/>
+          </p:nvPr>
+        </p:nvSpPr>
+        <p:spPr/>
+      </p:sp>
+      <p:sp>
+        <p:nvSpPr>
+          <p:cNvPr id="3" name="Notes Placeholder 2"/>
+          <p:cNvSpPr>
+            <a:spLocks noGrp="1"/>
+          </p:cNvSpPr>
+          <p:nvPr>
+            <p:ph type="body" idx="1"/>
+          </p:nvPr>
+        </p:nvSpPr>
+        <p:spPr/>
+        <p:txBody>
+          <a:bodyPr/>
+          <a:lstStyle/>
+          <a:p>
+            <a:r>
+              <a:rPr lang="en-US" dirty="0"/>
+              <a:t/>
+            </a:r>
+            <a:endParaRPr lang="en-US" dirty="0"/>
+          </a:p>
+        </p:txBody>
+      </p:sp>
+      <p:sp>
+        <p:nvSpPr>
+          <p:cNvPr id="4" name="Slide Number Placeholder 3"/>
+          <p:cNvSpPr>
+            <a:spLocks noGrp="1"/>
+          </p:cNvSpPr>
+          <p:nvPr>
+            <p:ph type="sldNum" sz="quarter" idx="10"/>
+          </p:nvPr>
+        </p:nvSpPr>
+        <p:spPr/>
+        <p:txBody>
+          <a:bodyPr/>
+          <a:lstStyle/>
+          <a:p>
+            <a:fld id="{F7021451-1387-4CA6-816F-3879F97B5CBC}" type="slidenum">
+              <a:rPr lang="en-US"/>
+              <a:t>17</a:t>
+            </a:fld>
+            <a:endParaRPr lang="en-US"/>
+          </a:p>
+        </p:txBody>
+      </p:sp>
+    </p:spTree>
+    <p:extLst>
+      <p:ext uri="{BB962C8B-B14F-4D97-AF65-F5344CB8AC3E}">
+        <p14:creationId xmlns:p14="http://schemas.microsoft.com/office/powerpoint/2010/main" val="1024086991"/>
+      </p:ext>
+    </p:extLst>
+  </p:cSld>
+  <p:clrMapOvr>
+    <a:masterClrMapping/>
+  </p:clrMapOvr>
+</p:notes>
+</file>
+
+<file path=ppt/notesSlides/notesSlide18.xml><?xml version="1.0" encoding="utf-8"?>
+<p:notes xmlns:a="http://schemas.openxmlformats.org/drawingml/2006/main" xmlns:r="http://schemas.openxmlformats.org/officeDocument/2006/relationships" xmlns:p="http://schemas.openxmlformats.org/presentationml/2006/main">
+  <p:cSld>
+    <p:spTree>
+      <p:nvGrpSpPr>
+        <p:cNvPr id="1" name=""/>
+        <p:cNvGrpSpPr/>
+        <p:nvPr/>
+      </p:nvGrpSpPr>
+      <p:grpSpPr>
+        <a:xfrm>
+          <a:off x="0" y="0"/>
+          <a:ext cx="0" cy="0"/>
+          <a:chOff x="0" y="0"/>
+          <a:chExt cx="0" cy="0"/>
+        </a:xfrm>
+      </p:grpSpPr>
+      <p:sp>
+        <p:nvSpPr>
+          <p:cNvPr id="2" name="Slide Image Placeholder 1"/>
+          <p:cNvSpPr>
+            <a:spLocks noGrp="1" noRot="1" noChangeAspect="1"/>
+          </p:cNvSpPr>
+          <p:nvPr>
+            <p:ph type="sldImg"/>
+          </p:nvPr>
+        </p:nvSpPr>
+        <p:spPr/>
+      </p:sp>
+      <p:sp>
+        <p:nvSpPr>
+          <p:cNvPr id="3" name="Notes Placeholder 2"/>
+          <p:cNvSpPr>
+            <a:spLocks noGrp="1"/>
+          </p:cNvSpPr>
+          <p:nvPr>
+            <p:ph type="body" idx="1"/>
+          </p:nvPr>
+        </p:nvSpPr>
+        <p:spPr/>
+        <p:txBody>
+          <a:bodyPr/>
+          <a:lstStyle/>
+          <a:p>
+            <a:r>
+              <a:rPr lang="en-US" dirty="0"/>
+              <a:t/>
+            </a:r>
+            <a:endParaRPr lang="en-US" dirty="0"/>
+          </a:p>
+        </p:txBody>
+      </p:sp>
+      <p:sp>
+        <p:nvSpPr>
+          <p:cNvPr id="4" name="Slide Number Placeholder 3"/>
+          <p:cNvSpPr>
+            <a:spLocks noGrp="1"/>
+          </p:cNvSpPr>
+          <p:nvPr>
+            <p:ph type="sldNum" sz="quarter" idx="10"/>
+          </p:nvPr>
+        </p:nvSpPr>
+        <p:spPr/>
+        <p:txBody>
+          <a:bodyPr/>
+          <a:lstStyle/>
+          <a:p>
+            <a:fld id="{F7021451-1387-4CA6-816F-3879F97B5CBC}" type="slidenum">
+              <a:rPr lang="en-US"/>
+              <a:t>18</a:t>
+            </a:fld>
+            <a:endParaRPr lang="en-US"/>
+          </a:p>
+        </p:txBody>
+      </p:sp>
+    </p:spTree>
+    <p:extLst>
+      <p:ext uri="{BB962C8B-B14F-4D97-AF65-F5344CB8AC3E}">
+        <p14:creationId xmlns:p14="http://schemas.microsoft.com/office/powerpoint/2010/main" val="1024086991"/>
+      </p:ext>
+    </p:extLst>
+  </p:cSld>
+  <p:clrMapOvr>
+    <a:masterClrMapping/>
+  </p:clrMapOvr>
+</p:notes>
+</file>
+
+<file path=ppt/notesSlides/notesSlide19.xml><?xml version="1.0" encoding="utf-8"?>
+<p:notes xmlns:a="http://schemas.openxmlformats.org/drawingml/2006/main" xmlns:r="http://schemas.openxmlformats.org/officeDocument/2006/relationships" xmlns:p="http://schemas.openxmlformats.org/presentationml/2006/main">
+  <p:cSld>
+    <p:spTree>
+      <p:nvGrpSpPr>
+        <p:cNvPr id="1" name=""/>
+        <p:cNvGrpSpPr/>
+        <p:nvPr/>
+      </p:nvGrpSpPr>
+      <p:grpSpPr>
+        <a:xfrm>
+          <a:off x="0" y="0"/>
+          <a:ext cx="0" cy="0"/>
+          <a:chOff x="0" y="0"/>
+          <a:chExt cx="0" cy="0"/>
+        </a:xfrm>
+      </p:grpSpPr>
+      <p:sp>
+        <p:nvSpPr>
+          <p:cNvPr id="2" name="Slide Image Placeholder 1"/>
+          <p:cNvSpPr>
+            <a:spLocks noGrp="1" noRot="1" noChangeAspect="1"/>
+          </p:cNvSpPr>
+          <p:nvPr>
+            <p:ph type="sldImg"/>
+          </p:nvPr>
+        </p:nvSpPr>
+        <p:spPr/>
+      </p:sp>
+      <p:sp>
+        <p:nvSpPr>
+          <p:cNvPr id="3" name="Notes Placeholder 2"/>
+          <p:cNvSpPr>
+            <a:spLocks noGrp="1"/>
+          </p:cNvSpPr>
+          <p:nvPr>
+            <p:ph type="body" idx="1"/>
+          </p:nvPr>
+        </p:nvSpPr>
+        <p:spPr/>
+        <p:txBody>
+          <a:bodyPr/>
+          <a:lstStyle/>
+          <a:p>
+            <a:r>
+              <a:rPr lang="en-US" dirty="0"/>
+              <a:t/>
+            </a:r>
+            <a:endParaRPr lang="en-US" dirty="0"/>
+          </a:p>
+        </p:txBody>
+      </p:sp>
+      <p:sp>
+        <p:nvSpPr>
+          <p:cNvPr id="4" name="Slide Number Placeholder 3"/>
+          <p:cNvSpPr>
+            <a:spLocks noGrp="1"/>
+          </p:cNvSpPr>
+          <p:nvPr>
+            <p:ph type="sldNum" sz="quarter" idx="10"/>
+          </p:nvPr>
+        </p:nvSpPr>
+        <p:spPr/>
+        <p:txBody>
+          <a:bodyPr/>
+          <a:lstStyle/>
+          <a:p>
+            <a:fld id="{F7021451-1387-4CA6-816F-3879F97B5CBC}" type="slidenum">
+              <a:rPr lang="en-US"/>
+              <a:t>19</a:t>
+            </a:fld>
+            <a:endParaRPr lang="en-US"/>
+          </a:p>
+        </p:txBody>
+      </p:sp>
+    </p:spTree>
+    <p:extLst>
+      <p:ext uri="{BB962C8B-B14F-4D97-AF65-F5344CB8AC3E}">
+        <p14:creationId xmlns:p14="http://schemas.microsoft.com/office/powerpoint/2010/main" val="1024086991"/>
+      </p:ext>
+    </p:extLst>
+  </p:cSld>
+  <p:clrMapOvr>
+    <a:masterClrMapping/>
+  </p:clrMapOvr>
+</p:notes>
+</file>
+
 <file path=ppt/notesSlides/notesSlide2.xml><?xml version="1.0" encoding="utf-8"?>
 <p:notes xmlns:a="http://schemas.openxmlformats.org/drawingml/2006/main" xmlns:r="http://schemas.openxmlformats.org/officeDocument/2006/relationships" xmlns:p="http://schemas.openxmlformats.org/presentationml/2006/main">
   <p:cSld>
@@ -889,6 +1515,270 @@
             <a:fld id="{F7021451-1387-4CA6-816F-3879F97B5CBC}" type="slidenum">
               <a:rPr lang="en-US"/>
               <a:t>2</a:t>
+            </a:fld>
+            <a:endParaRPr lang="en-US"/>
+          </a:p>
+        </p:txBody>
+      </p:sp>
+    </p:spTree>
+    <p:extLst>
+      <p:ext uri="{BB962C8B-B14F-4D97-AF65-F5344CB8AC3E}">
+        <p14:creationId xmlns:p14="http://schemas.microsoft.com/office/powerpoint/2010/main" val="1024086991"/>
+      </p:ext>
+    </p:extLst>
+  </p:cSld>
+  <p:clrMapOvr>
+    <a:masterClrMapping/>
+  </p:clrMapOvr>
+</p:notes>
+</file>
+
+<file path=ppt/notesSlides/notesSlide20.xml><?xml version="1.0" encoding="utf-8"?>
+<p:notes xmlns:a="http://schemas.openxmlformats.org/drawingml/2006/main" xmlns:r="http://schemas.openxmlformats.org/officeDocument/2006/relationships" xmlns:p="http://schemas.openxmlformats.org/presentationml/2006/main">
+  <p:cSld>
+    <p:spTree>
+      <p:nvGrpSpPr>
+        <p:cNvPr id="1" name=""/>
+        <p:cNvGrpSpPr/>
+        <p:nvPr/>
+      </p:nvGrpSpPr>
+      <p:grpSpPr>
+        <a:xfrm>
+          <a:off x="0" y="0"/>
+          <a:ext cx="0" cy="0"/>
+          <a:chOff x="0" y="0"/>
+          <a:chExt cx="0" cy="0"/>
+        </a:xfrm>
+      </p:grpSpPr>
+      <p:sp>
+        <p:nvSpPr>
+          <p:cNvPr id="2" name="Slide Image Placeholder 1"/>
+          <p:cNvSpPr>
+            <a:spLocks noGrp="1" noRot="1" noChangeAspect="1"/>
+          </p:cNvSpPr>
+          <p:nvPr>
+            <p:ph type="sldImg"/>
+          </p:nvPr>
+        </p:nvSpPr>
+        <p:spPr/>
+      </p:sp>
+      <p:sp>
+        <p:nvSpPr>
+          <p:cNvPr id="3" name="Notes Placeholder 2"/>
+          <p:cNvSpPr>
+            <a:spLocks noGrp="1"/>
+          </p:cNvSpPr>
+          <p:nvPr>
+            <p:ph type="body" idx="1"/>
+          </p:nvPr>
+        </p:nvSpPr>
+        <p:spPr/>
+        <p:txBody>
+          <a:bodyPr/>
+          <a:lstStyle/>
+          <a:p>
+            <a:r>
+              <a:rPr lang="en-US" dirty="0"/>
+              <a:t/>
+            </a:r>
+            <a:endParaRPr lang="en-US" dirty="0"/>
+          </a:p>
+        </p:txBody>
+      </p:sp>
+      <p:sp>
+        <p:nvSpPr>
+          <p:cNvPr id="4" name="Slide Number Placeholder 3"/>
+          <p:cNvSpPr>
+            <a:spLocks noGrp="1"/>
+          </p:cNvSpPr>
+          <p:nvPr>
+            <p:ph type="sldNum" sz="quarter" idx="10"/>
+          </p:nvPr>
+        </p:nvSpPr>
+        <p:spPr/>
+        <p:txBody>
+          <a:bodyPr/>
+          <a:lstStyle/>
+          <a:p>
+            <a:fld id="{F7021451-1387-4CA6-816F-3879F97B5CBC}" type="slidenum">
+              <a:rPr lang="en-US"/>
+              <a:t>20</a:t>
+            </a:fld>
+            <a:endParaRPr lang="en-US"/>
+          </a:p>
+        </p:txBody>
+      </p:sp>
+    </p:spTree>
+    <p:extLst>
+      <p:ext uri="{BB962C8B-B14F-4D97-AF65-F5344CB8AC3E}">
+        <p14:creationId xmlns:p14="http://schemas.microsoft.com/office/powerpoint/2010/main" val="1024086991"/>
+      </p:ext>
+    </p:extLst>
+  </p:cSld>
+  <p:clrMapOvr>
+    <a:masterClrMapping/>
+  </p:clrMapOvr>
+</p:notes>
+</file>
+
+<file path=ppt/notesSlides/notesSlide21.xml><?xml version="1.0" encoding="utf-8"?>
+<p:notes xmlns:a="http://schemas.openxmlformats.org/drawingml/2006/main" xmlns:r="http://schemas.openxmlformats.org/officeDocument/2006/relationships" xmlns:p="http://schemas.openxmlformats.org/presentationml/2006/main">
+  <p:cSld>
+    <p:spTree>
+      <p:nvGrpSpPr>
+        <p:cNvPr id="1" name=""/>
+        <p:cNvGrpSpPr/>
+        <p:nvPr/>
+      </p:nvGrpSpPr>
+      <p:grpSpPr>
+        <a:xfrm>
+          <a:off x="0" y="0"/>
+          <a:ext cx="0" cy="0"/>
+          <a:chOff x="0" y="0"/>
+          <a:chExt cx="0" cy="0"/>
+        </a:xfrm>
+      </p:grpSpPr>
+      <p:sp>
+        <p:nvSpPr>
+          <p:cNvPr id="2" name="Slide Image Placeholder 1"/>
+          <p:cNvSpPr>
+            <a:spLocks noGrp="1" noRot="1" noChangeAspect="1"/>
+          </p:cNvSpPr>
+          <p:nvPr>
+            <p:ph type="sldImg"/>
+          </p:nvPr>
+        </p:nvSpPr>
+        <p:spPr/>
+      </p:sp>
+      <p:sp>
+        <p:nvSpPr>
+          <p:cNvPr id="3" name="Notes Placeholder 2"/>
+          <p:cNvSpPr>
+            <a:spLocks noGrp="1"/>
+          </p:cNvSpPr>
+          <p:nvPr>
+            <p:ph type="body" idx="1"/>
+          </p:nvPr>
+        </p:nvSpPr>
+        <p:spPr/>
+        <p:txBody>
+          <a:bodyPr/>
+          <a:lstStyle/>
+          <a:p>
+            <a:r>
+              <a:rPr lang="en-US" dirty="0"/>
+              <a:t/>
+            </a:r>
+            <a:endParaRPr lang="en-US" dirty="0"/>
+          </a:p>
+        </p:txBody>
+      </p:sp>
+      <p:sp>
+        <p:nvSpPr>
+          <p:cNvPr id="4" name="Slide Number Placeholder 3"/>
+          <p:cNvSpPr>
+            <a:spLocks noGrp="1"/>
+          </p:cNvSpPr>
+          <p:nvPr>
+            <p:ph type="sldNum" sz="quarter" idx="10"/>
+          </p:nvPr>
+        </p:nvSpPr>
+        <p:spPr/>
+        <p:txBody>
+          <a:bodyPr/>
+          <a:lstStyle/>
+          <a:p>
+            <a:fld id="{F7021451-1387-4CA6-816F-3879F97B5CBC}" type="slidenum">
+              <a:rPr lang="en-US"/>
+              <a:t>21</a:t>
+            </a:fld>
+            <a:endParaRPr lang="en-US"/>
+          </a:p>
+        </p:txBody>
+      </p:sp>
+    </p:spTree>
+    <p:extLst>
+      <p:ext uri="{BB962C8B-B14F-4D97-AF65-F5344CB8AC3E}">
+        <p14:creationId xmlns:p14="http://schemas.microsoft.com/office/powerpoint/2010/main" val="1024086991"/>
+      </p:ext>
+    </p:extLst>
+  </p:cSld>
+  <p:clrMapOvr>
+    <a:masterClrMapping/>
+  </p:clrMapOvr>
+</p:notes>
+</file>
+
+<file path=ppt/notesSlides/notesSlide22.xml><?xml version="1.0" encoding="utf-8"?>
+<p:notes xmlns:a="http://schemas.openxmlformats.org/drawingml/2006/main" xmlns:r="http://schemas.openxmlformats.org/officeDocument/2006/relationships" xmlns:p="http://schemas.openxmlformats.org/presentationml/2006/main">
+  <p:cSld>
+    <p:spTree>
+      <p:nvGrpSpPr>
+        <p:cNvPr id="1" name=""/>
+        <p:cNvGrpSpPr/>
+        <p:nvPr/>
+      </p:nvGrpSpPr>
+      <p:grpSpPr>
+        <a:xfrm>
+          <a:off x="0" y="0"/>
+          <a:ext cx="0" cy="0"/>
+          <a:chOff x="0" y="0"/>
+          <a:chExt cx="0" cy="0"/>
+        </a:xfrm>
+      </p:grpSpPr>
+      <p:sp>
+        <p:nvSpPr>
+          <p:cNvPr id="2" name="Slide Image Placeholder 1"/>
+          <p:cNvSpPr>
+            <a:spLocks noGrp="1" noRot="1" noChangeAspect="1"/>
+          </p:cNvSpPr>
+          <p:nvPr>
+            <p:ph type="sldImg"/>
+          </p:nvPr>
+        </p:nvSpPr>
+        <p:spPr/>
+      </p:sp>
+      <p:sp>
+        <p:nvSpPr>
+          <p:cNvPr id="3" name="Notes Placeholder 2"/>
+          <p:cNvSpPr>
+            <a:spLocks noGrp="1"/>
+          </p:cNvSpPr>
+          <p:nvPr>
+            <p:ph type="body" idx="1"/>
+          </p:nvPr>
+        </p:nvSpPr>
+        <p:spPr/>
+        <p:txBody>
+          <a:bodyPr/>
+          <a:lstStyle/>
+          <a:p>
+            <a:r>
+              <a:rPr lang="en-US" dirty="0"/>
+              <a:t/>
+            </a:r>
+            <a:endParaRPr lang="en-US" dirty="0"/>
+          </a:p>
+        </p:txBody>
+      </p:sp>
+      <p:sp>
+        <p:nvSpPr>
+          <p:cNvPr id="4" name="Slide Number Placeholder 3"/>
+          <p:cNvSpPr>
+            <a:spLocks noGrp="1"/>
+          </p:cNvSpPr>
+          <p:nvPr>
+            <p:ph type="sldNum" sz="quarter" idx="10"/>
+          </p:nvPr>
+        </p:nvSpPr>
+        <p:spPr/>
+        <p:txBody>
+          <a:bodyPr/>
+          <a:lstStyle/>
+          <a:p>
+            <a:fld id="{F7021451-1387-4CA6-816F-3879F97B5CBC}" type="slidenum">
+              <a:rPr lang="en-US"/>
+              <a:t>22</a:t>
             </a:fld>
             <a:endParaRPr lang="en-US"/>
           </a:p>
@@ -2100,194 +2990,6 @@
         </p:nvSpPr>
         <p:spPr>
           <a:xfrm>
-            <a:off x="406301" y="1223963"/>
-            <a:ext cx="8498026" cy="274290"/>
-          </a:xfrm>
-          <a:prstGeom prst="rect">
-            <a:avLst/>
-          </a:prstGeom>
-          <a:noFill/>
-          <a:ln/>
-        </p:spPr>
-        <p:txBody>
-          <a:bodyPr wrap="square" lIns="0" tIns="0" rIns="0" bIns="0" rtlCol="0" anchor="t"/>
-          <a:lstStyle/>
-          <a:p>
-            <a:pPr algn="l" indent="0" marL="0">
-              <a:lnSpc>
-                <a:spcPts val="2160"/>
-              </a:lnSpc>
-              <a:spcBef>
-                <a:spcPts val="600"/>
-              </a:spcBef>
-              <a:spcAft>
-                <a:spcPts val="800"/>
-              </a:spcAft>
-              <a:buNone/>
-            </a:pPr>
-            <a:r>
-              <a:rPr lang="en-US" sz="1800" b="1" dirty="0">
-                <a:solidFill>
-                  <a:srgbClr val="FE4447"/>
-                </a:solidFill>
-                <a:latin typeface="Georgia" pitchFamily="34" charset="0"/>
-                <a:ea typeface="Georgia" pitchFamily="34" charset="-122"/>
-                <a:cs typeface="Georgia" pitchFamily="34" charset="-120"/>
-              </a:rPr>
-              <a:t>Learning objective</a:t>
-            </a:r>
-            <a:endParaRPr lang="en-US" sz="1800" dirty="0"/>
-          </a:p>
-        </p:txBody>
-      </p:sp>
-      <p:sp>
-        <p:nvSpPr>
-          <p:cNvPr id="6" name="Text 4"/>
-          <p:cNvSpPr/>
-          <p:nvPr/>
-        </p:nvSpPr>
-        <p:spPr>
-          <a:xfrm>
-            <a:off x="406301" y="1637854"/>
-            <a:ext cx="8498026" cy="426541"/>
-          </a:xfrm>
-          <a:prstGeom prst="rect">
-            <a:avLst/>
-          </a:prstGeom>
-          <a:noFill/>
-          <a:ln/>
-        </p:spPr>
-        <p:txBody>
-          <a:bodyPr wrap="square" lIns="0" tIns="0" rIns="0" bIns="0" rtlCol="0" anchor="t"/>
-          <a:lstStyle/>
-          <a:p>
-            <a:pPr algn="l" indent="0" marL="0">
-              <a:lnSpc>
-                <a:spcPts val="1680"/>
-              </a:lnSpc>
-              <a:spcBef>
-                <a:spcPts val="300"/>
-              </a:spcBef>
-              <a:spcAft>
-                <a:spcPts val="300"/>
-              </a:spcAft>
-              <a:buNone/>
-            </a:pPr>
-            <a:r>
-              <a:rPr lang="en-US" sz="1200" dirty="0">
-                <a:solidFill>
-                  <a:srgbClr val="1C2833"/>
-                </a:solidFill>
-                <a:latin typeface="Arial" pitchFamily="34" charset="0"/>
-                <a:ea typeface="Arial" pitchFamily="34" charset="-122"/>
-                <a:cs typeface="Arial" pitchFamily="34" charset="-120"/>
-              </a:rPr>
-              <a:t>Students will name the 12 lunar months in order, explain how each month is named (after the </a:t>
-            </a:r>
-            <a:pPr algn="l" indent="0" marL="0">
-              <a:lnSpc>
-                <a:spcPts val="1680"/>
-              </a:lnSpc>
-              <a:spcBef>
-                <a:spcPts val="300"/>
-              </a:spcBef>
-              <a:spcAft>
-                <a:spcPts val="300"/>
-              </a:spcAft>
-              <a:buNone/>
-            </a:pPr>
-            <a:r>
-              <a:rPr lang="en-US" sz="1200" i="1" dirty="0">
-                <a:solidFill>
-                  <a:srgbClr val="1C2833"/>
-                </a:solidFill>
-                <a:latin typeface="Arial" pitchFamily="34" charset="0"/>
-                <a:ea typeface="Arial" pitchFamily="34" charset="-122"/>
-                <a:cs typeface="Arial" pitchFamily="34" charset="-120"/>
-              </a:rPr>
-              <a:t>nakṣatra</a:t>
-            </a:r>
-            <a:pPr algn="l" indent="0" marL="0">
-              <a:lnSpc>
-                <a:spcPts val="1680"/>
-              </a:lnSpc>
-              <a:spcBef>
-                <a:spcPts val="300"/>
-              </a:spcBef>
-              <a:spcAft>
-                <a:spcPts val="300"/>
-              </a:spcAft>
-              <a:buNone/>
-            </a:pPr>
-            <a:r>
-              <a:rPr lang="en-US" sz="1200" dirty="0">
-                <a:solidFill>
-                  <a:srgbClr val="1C2833"/>
-                </a:solidFill>
-                <a:latin typeface="Arial" pitchFamily="34" charset="0"/>
-                <a:ea typeface="Arial" pitchFamily="34" charset="-122"/>
-                <a:cs typeface="Arial" pitchFamily="34" charset="-120"/>
-              </a:rPr>
-              <a:t> of its </a:t>
-            </a:r>
-            <a:pPr algn="l" indent="0" marL="0">
-              <a:lnSpc>
-                <a:spcPts val="1680"/>
-              </a:lnSpc>
-              <a:spcBef>
-                <a:spcPts val="300"/>
-              </a:spcBef>
-              <a:spcAft>
-                <a:spcPts val="300"/>
-              </a:spcAft>
-              <a:buNone/>
-            </a:pPr>
-            <a:r>
-              <a:rPr lang="en-US" sz="1200" i="1" dirty="0">
-                <a:solidFill>
-                  <a:srgbClr val="1C2833"/>
-                </a:solidFill>
-                <a:latin typeface="Arial" pitchFamily="34" charset="0"/>
-                <a:ea typeface="Arial" pitchFamily="34" charset="-122"/>
-                <a:cs typeface="Arial" pitchFamily="34" charset="-120"/>
-              </a:rPr>
-              <a:t>pūrṇimā</a:t>
-            </a:r>
-            <a:pPr algn="l" indent="0" marL="0">
-              <a:lnSpc>
-                <a:spcPts val="1680"/>
-              </a:lnSpc>
-              <a:spcBef>
-                <a:spcPts val="300"/>
-              </a:spcBef>
-              <a:spcAft>
-                <a:spcPts val="300"/>
-              </a:spcAft>
-              <a:buNone/>
-            </a:pPr>
-            <a:r>
-              <a:rPr lang="en-US" sz="1200" dirty="0">
-                <a:solidFill>
-                  <a:srgbClr val="1C2833"/>
-                </a:solidFill>
-                <a:latin typeface="Arial" pitchFamily="34" charset="0"/>
-                <a:ea typeface="Arial" pitchFamily="34" charset="-122"/>
-                <a:cs typeface="Arial" pitchFamily="34" charset="-120"/>
-              </a:rPr>
-              <a:t>), and link at least three festivals to their tithi-and-month positions.</a:t>
-            </a:r>
-            <a:endParaRPr lang="en-US" sz="1200" dirty="0"/>
-          </a:p>
-        </p:txBody>
-      </p:sp>
-      <p:sp>
-        <p:nvSpPr>
-          <p:cNvPr id="7" name="Text 5"/>
-          <p:cNvSpPr/>
-          <p:nvPr/>
-        </p:nvSpPr>
-        <p:spPr>
-          <a:xfrm>
             <a:off x="406301" y="4434929"/>
             <a:ext cx="8498026" cy="213271"/>
           </a:xfrm>
@@ -2432,7 +3134,7 @@
                 <a:ea typeface="Georgia" pitchFamily="34" charset="-122"/>
                 <a:cs typeface="Georgia" pitchFamily="34" charset="-120"/>
               </a:rPr>
-              <a:t>Differentiation</a:t>
+              <a:t>Core (20 min) (cont.)</a:t>
             </a:r>
             <a:endParaRPr lang="en-US" sz="1800" dirty="0"/>
           </a:p>
@@ -2447,6 +3149,72 @@
         <p:spPr>
           <a:xfrm>
             <a:off x="634901" y="883593"/>
+            <a:ext cx="8102798" cy="281880"/>
+          </a:xfrm>
+          <a:prstGeom prst="rect">
+            <a:avLst/>
+          </a:prstGeom>
+          <a:noFill/>
+          <a:ln/>
+        </p:spPr>
+        <p:txBody>
+          <a:bodyPr wrap="square" lIns="0" tIns="0" rIns="0" bIns="0" rtlCol="0" anchor="t"/>
+          <a:lstStyle/>
+          <a:p>
+            <a:pPr algn="l" marL="342900" indent="-342900">
+              <a:lnSpc>
+                <a:spcPts val="1620"/>
+              </a:lnSpc>
+              <a:spcAft>
+                <a:spcPts val="300"/>
+              </a:spcAft>
+              <a:buSzPct val="100000"/>
+              <a:buChar char="•"/>
+            </a:pPr>
+            <a:r>
+              <a:rPr lang="en-US" sz="1200" b="1" dirty="0">
+                <a:solidFill>
+                  <a:srgbClr val="1C2833"/>
+                </a:solidFill>
+                <a:latin typeface="Arial" pitchFamily="34" charset="0"/>
+                <a:ea typeface="Arial" pitchFamily="34" charset="-122"/>
+                <a:cs typeface="Arial" pitchFamily="34" charset="-120"/>
+              </a:rPr>
+              <a:t>Two month-counting conventions.</a:t>
+            </a:r>
+            <a:pPr algn="l" indent="0" marL="0">
+              <a:lnSpc>
+                <a:spcPts val="1620"/>
+              </a:lnSpc>
+              <a:spcAft>
+                <a:spcPts val="300"/>
+              </a:spcAft>
+              <a:buNone/>
+            </a:pPr>
+            <a:r>
+              <a:rPr lang="en-US" sz="1200" dirty="0">
+                <a:solidFill>
+                  <a:srgbClr val="1C2833"/>
+                </a:solidFill>
+                <a:latin typeface="Arial" pitchFamily="34" charset="0"/>
+                <a:ea typeface="Arial" pitchFamily="34" charset="-122"/>
+                <a:cs typeface="Arial" pitchFamily="34" charset="-120"/>
+              </a:rPr>
+              <a:t> This is a real difference and worth noting:</a:t>
+            </a:r>
+            <a:endParaRPr lang="en-US" sz="1200" dirty="0"/>
+          </a:p>
+        </p:txBody>
+      </p:sp>
+      <p:sp>
+        <p:nvSpPr>
+          <p:cNvPr id="5" name="Text 3"/>
+          <p:cNvSpPr/>
+          <p:nvPr/>
+        </p:nvSpPr>
+        <p:spPr>
+          <a:xfrm>
+            <a:off x="634901" y="1266974"/>
             <a:ext cx="8102798" cy="731341"/>
           </a:xfrm>
           <a:prstGeom prst="rect">
@@ -2470,46 +3238,6 @@
               <a:buChar char="•"/>
             </a:pPr>
             <a:r>
-              <a:rPr lang="en-US" sz="1200" b="1" dirty="0">
-                <a:solidFill>
-                  <a:srgbClr val="1C2833"/>
-                </a:solidFill>
-                <a:latin typeface="Arial" pitchFamily="34" charset="0"/>
-                <a:ea typeface="Arial" pitchFamily="34" charset="-122"/>
-                <a:cs typeface="Arial" pitchFamily="34" charset="-120"/>
-              </a:rPr>
-              <a:t>One tier up:</a:t>
-            </a:r>
-            <a:pPr algn="l" indent="0" marL="0">
-              <a:lnSpc>
-                <a:spcPts val="1620"/>
-              </a:lnSpc>
-              <a:spcAft>
-                <a:spcPts val="300"/>
-              </a:spcAft>
-              <a:buNone/>
-            </a:pPr>
-            <a:r>
-              <a:rPr lang="en-US" sz="1200" dirty="0">
-                <a:solidFill>
-                  <a:srgbClr val="1C2833"/>
-                </a:solidFill>
-                <a:latin typeface="Arial" pitchFamily="34" charset="0"/>
-                <a:ea typeface="Arial" pitchFamily="34" charset="-122"/>
-                <a:cs typeface="Arial" pitchFamily="34" charset="-120"/>
-              </a:rPr>
-              <a:t> </a:t>
-            </a:r>
-            <a:pPr algn="l" indent="0" marL="0">
-              <a:lnSpc>
-                <a:spcPts val="1620"/>
-              </a:lnSpc>
-              <a:spcAft>
-                <a:spcPts val="300"/>
-              </a:spcAft>
-              <a:buNone/>
-            </a:pPr>
-            <a:r>
               <a:rPr lang="en-US" sz="1200" i="1" dirty="0">
                 <a:solidFill>
                   <a:srgbClr val="1C2833"/>
@@ -2518,27 +3246,27 @@
                 <a:ea typeface="Arial" pitchFamily="34" charset="-122"/>
                 <a:cs typeface="Arial" pitchFamily="34" charset="-120"/>
               </a:rPr>
-              <a:t>Adhika māsa</a:t>
-            </a:r>
-            <a:pPr algn="l" indent="0" marL="0">
-              <a:lnSpc>
-                <a:spcPts val="1620"/>
-              </a:lnSpc>
-              <a:spcAft>
-                <a:spcPts val="300"/>
-              </a:spcAft>
-              <a:buNone/>
-            </a:pPr>
-            <a:r>
-              <a:rPr lang="en-US" sz="1200" dirty="0">
-                <a:solidFill>
-                  <a:srgbClr val="1C2833"/>
-                </a:solidFill>
-                <a:latin typeface="Arial" pitchFamily="34" charset="0"/>
-                <a:ea typeface="Arial" pitchFamily="34" charset="-122"/>
-                <a:cs typeface="Arial" pitchFamily="34" charset="-120"/>
-              </a:rPr>
-              <a:t> deep-dive. Look up the rule: an </a:t>
+              <a:t>Amānta</a:t>
+            </a:r>
+            <a:pPr algn="l" indent="0" marL="0">
+              <a:lnSpc>
+                <a:spcPts val="1620"/>
+              </a:lnSpc>
+              <a:spcAft>
+                <a:spcPts val="300"/>
+              </a:spcAft>
+              <a:buNone/>
+            </a:pPr>
+            <a:r>
+              <a:rPr lang="en-US" sz="1200" dirty="0">
+                <a:solidFill>
+                  <a:srgbClr val="1C2833"/>
+                </a:solidFill>
+                <a:latin typeface="Arial" pitchFamily="34" charset="0"/>
+                <a:ea typeface="Arial" pitchFamily="34" charset="-122"/>
+                <a:cs typeface="Arial" pitchFamily="34" charset="-120"/>
+              </a:rPr>
+              <a:t> — the lunar month ends at </a:t>
             </a:r>
             <a:pPr algn="l" indent="0" marL="0">
               <a:lnSpc>
@@ -2558,67 +3286,27 @@
                 <a:ea typeface="Arial" pitchFamily="34" charset="-122"/>
                 <a:cs typeface="Arial" pitchFamily="34" charset="-120"/>
               </a:rPr>
-              <a:t>adhika māsa</a:t>
-            </a:r>
-            <a:pPr algn="l" indent="0" marL="0">
-              <a:lnSpc>
-                <a:spcPts val="1620"/>
-              </a:lnSpc>
-              <a:spcAft>
-                <a:spcPts val="300"/>
-              </a:spcAft>
-              <a:buNone/>
-            </a:pPr>
-            <a:r>
-              <a:rPr lang="en-US" sz="1200" dirty="0">
-                <a:solidFill>
-                  <a:srgbClr val="1C2833"/>
-                </a:solidFill>
-                <a:latin typeface="Arial" pitchFamily="34" charset="0"/>
-                <a:ea typeface="Arial" pitchFamily="34" charset="-122"/>
-                <a:cs typeface="Arial" pitchFamily="34" charset="-120"/>
-              </a:rPr>
-              <a:t> is a lunar month in which no </a:t>
-            </a:r>
-            <a:pPr algn="l" indent="0" marL="0">
-              <a:lnSpc>
-                <a:spcPts val="1620"/>
-              </a:lnSpc>
-              <a:spcAft>
-                <a:spcPts val="300"/>
-              </a:spcAft>
-              <a:buNone/>
-            </a:pPr>
-            <a:r>
-              <a:rPr lang="en-US" sz="1200" i="1" dirty="0">
-                <a:solidFill>
-                  <a:srgbClr val="1C2833"/>
-                </a:solidFill>
-                <a:latin typeface="Arial" pitchFamily="34" charset="0"/>
-                <a:ea typeface="Arial" pitchFamily="34" charset="-122"/>
-                <a:cs typeface="Arial" pitchFamily="34" charset="-120"/>
-              </a:rPr>
-              <a:t>saṁkrānti</a:t>
-            </a:r>
-            <a:pPr algn="l" indent="0" marL="0">
-              <a:lnSpc>
-                <a:spcPts val="1620"/>
-              </a:lnSpc>
-              <a:spcAft>
-                <a:spcPts val="300"/>
-              </a:spcAft>
-              <a:buNone/>
-            </a:pPr>
-            <a:r>
-              <a:rPr lang="en-US" sz="1200" dirty="0">
-                <a:solidFill>
-                  <a:srgbClr val="1C2833"/>
-                </a:solidFill>
-                <a:latin typeface="Arial" pitchFamily="34" charset="0"/>
-                <a:ea typeface="Arial" pitchFamily="34" charset="-122"/>
-                <a:cs typeface="Arial" pitchFamily="34" charset="-120"/>
-              </a:rPr>
-              <a:t> (Sun's entry into a new zodiac sign) occurs. Why does the rule produce ~7 extra months in 19 years?</a:t>
+              <a:t>amāvasyā</a:t>
+            </a:r>
+            <a:pPr algn="l" indent="0" marL="0">
+              <a:lnSpc>
+                <a:spcPts val="1620"/>
+              </a:lnSpc>
+              <a:spcAft>
+                <a:spcPts val="300"/>
+              </a:spcAft>
+              <a:buNone/>
+            </a:pPr>
+            <a:r>
+              <a:rPr lang="en-US" sz="1200" dirty="0">
+                <a:solidFill>
+                  <a:srgbClr val="1C2833"/>
+                </a:solidFill>
+                <a:latin typeface="Arial" pitchFamily="34" charset="0"/>
+                <a:ea typeface="Arial" pitchFamily="34" charset="-122"/>
+                <a:cs typeface="Arial" pitchFamily="34" charset="-120"/>
+              </a:rPr>
+              <a:t>. Common in South and Western India (Maharashtra, Karnataka, Andhra, Tamil Nadu, Gujarat).</a:t>
             </a:r>
             <a:endParaRPr lang="en-US" sz="1200" dirty="0"/>
           </a:p>
@@ -2634,35 +3322,75 @@
               <a:buChar char="•"/>
             </a:pPr>
             <a:r>
-              <a:rPr lang="en-US" sz="1200" b="1" dirty="0">
-                <a:solidFill>
-                  <a:srgbClr val="1C2833"/>
-                </a:solidFill>
-                <a:latin typeface="Arial" pitchFamily="34" charset="0"/>
-                <a:ea typeface="Arial" pitchFamily="34" charset="-122"/>
-                <a:cs typeface="Arial" pitchFamily="34" charset="-120"/>
-              </a:rPr>
-              <a:t>One tier down:</a:t>
-            </a:r>
-            <a:pPr algn="l" indent="0" marL="0">
-              <a:lnSpc>
-                <a:spcPts val="1620"/>
-              </a:lnSpc>
-              <a:spcAft>
-                <a:spcPts val="300"/>
-              </a:spcAft>
-              <a:buNone/>
-            </a:pPr>
-            <a:r>
-              <a:rPr lang="en-US" sz="1200" dirty="0">
-                <a:solidFill>
-                  <a:srgbClr val="1C2833"/>
-                </a:solidFill>
-                <a:latin typeface="Arial" pitchFamily="34" charset="0"/>
-                <a:ea typeface="Arial" pitchFamily="34" charset="-122"/>
-                <a:cs typeface="Arial" pitchFamily="34" charset="-120"/>
-              </a:rPr>
-              <a:t> Memorise only the first 6 month names this week. The rest can come during the project.</a:t>
+              <a:rPr lang="en-US" sz="1200" i="1" dirty="0">
+                <a:solidFill>
+                  <a:srgbClr val="1C2833"/>
+                </a:solidFill>
+                <a:latin typeface="Arial" pitchFamily="34" charset="0"/>
+                <a:ea typeface="Arial" pitchFamily="34" charset="-122"/>
+                <a:cs typeface="Arial" pitchFamily="34" charset="-120"/>
+              </a:rPr>
+              <a:t>Pūrṇimānta</a:t>
+            </a:r>
+            <a:pPr algn="l" indent="0" marL="0">
+              <a:lnSpc>
+                <a:spcPts val="1620"/>
+              </a:lnSpc>
+              <a:spcAft>
+                <a:spcPts val="300"/>
+              </a:spcAft>
+              <a:buNone/>
+            </a:pPr>
+            <a:r>
+              <a:rPr lang="en-US" sz="1200" dirty="0">
+                <a:solidFill>
+                  <a:srgbClr val="1C2833"/>
+                </a:solidFill>
+                <a:latin typeface="Arial" pitchFamily="34" charset="0"/>
+                <a:ea typeface="Arial" pitchFamily="34" charset="-122"/>
+                <a:cs typeface="Arial" pitchFamily="34" charset="-120"/>
+              </a:rPr>
+              <a:t> — the lunar month ends at </a:t>
+            </a:r>
+            <a:pPr algn="l" indent="0" marL="0">
+              <a:lnSpc>
+                <a:spcPts val="1620"/>
+              </a:lnSpc>
+              <a:spcAft>
+                <a:spcPts val="300"/>
+              </a:spcAft>
+              <a:buNone/>
+            </a:pPr>
+            <a:r>
+              <a:rPr lang="en-US" sz="1200" i="1" dirty="0">
+                <a:solidFill>
+                  <a:srgbClr val="1C2833"/>
+                </a:solidFill>
+                <a:latin typeface="Arial" pitchFamily="34" charset="0"/>
+                <a:ea typeface="Arial" pitchFamily="34" charset="-122"/>
+                <a:cs typeface="Arial" pitchFamily="34" charset="-120"/>
+              </a:rPr>
+              <a:t>pūrṇimā</a:t>
+            </a:r>
+            <a:pPr algn="l" indent="0" marL="0">
+              <a:lnSpc>
+                <a:spcPts val="1620"/>
+              </a:lnSpc>
+              <a:spcAft>
+                <a:spcPts val="300"/>
+              </a:spcAft>
+              <a:buNone/>
+            </a:pPr>
+            <a:r>
+              <a:rPr lang="en-US" sz="1200" dirty="0">
+                <a:solidFill>
+                  <a:srgbClr val="1C2833"/>
+                </a:solidFill>
+                <a:latin typeface="Arial" pitchFamily="34" charset="0"/>
+                <a:ea typeface="Arial" pitchFamily="34" charset="-122"/>
+                <a:cs typeface="Arial" pitchFamily="34" charset="-120"/>
+              </a:rPr>
+              <a:t>. Common in North India (Uttar Pradesh, Bihar, North Indian Hindi belt).</a:t>
             </a:r>
             <a:endParaRPr lang="en-US" sz="1200" dirty="0"/>
           </a:p>
@@ -2670,7 +3398,7 @@
       </p:sp>
       <p:sp>
         <p:nvSpPr>
-          <p:cNvPr id="5" name="Text 3"/>
+          <p:cNvPr id="6" name="Text 4"/>
           <p:cNvSpPr/>
           <p:nvPr/>
         </p:nvSpPr>
@@ -2820,7 +3548,7 @@
                 <a:ea typeface="Georgia" pitchFamily="34" charset="-122"/>
                 <a:cs typeface="Georgia" pitchFamily="34" charset="-120"/>
               </a:rPr>
-              <a:t>Teacher notes</a:t>
+              <a:t>Core (20 min) (cont.)</a:t>
             </a:r>
             <a:endParaRPr lang="en-US" sz="1800" dirty="0"/>
           </a:p>
@@ -2835,7 +3563,7 @@
         <p:spPr>
           <a:xfrm>
             <a:off x="406301" y="870942"/>
-            <a:ext cx="8498026" cy="1066354"/>
+            <a:ext cx="8498026" cy="639812"/>
           </a:xfrm>
           <a:prstGeom prst="rect">
             <a:avLst/>
@@ -2868,7 +3596,7 @@
                 <a:ea typeface="Arial" pitchFamily="34" charset="-122"/>
                 <a:cs typeface="Arial" pitchFamily="34" charset="-120"/>
               </a:rPr>
-              <a:t>– The </a:t>
+              <a:t>So the same fortnight can be called by different month names under the two conventions! For example, the </a:t>
             </a:r>
             <a:pPr algn="l" indent="0" marL="0">
               <a:lnSpc>
@@ -2891,6 +3619,190 @@
                 <a:ea typeface="Arial" pitchFamily="34" charset="-122"/>
                 <a:cs typeface="Arial" pitchFamily="34" charset="-120"/>
               </a:rPr>
+              <a:t>kṛṣṇa pakṣa</a:t>
+            </a:r>
+            <a:pPr algn="l" indent="0" marL="0">
+              <a:lnSpc>
+                <a:spcPts val="1680"/>
+              </a:lnSpc>
+              <a:spcBef>
+                <a:spcPts val="300"/>
+              </a:spcBef>
+              <a:spcAft>
+                <a:spcPts val="300"/>
+              </a:spcAft>
+              <a:buNone/>
+            </a:pPr>
+            <a:r>
+              <a:rPr lang="en-US" sz="1200" dirty="0">
+                <a:solidFill>
+                  <a:srgbClr val="1C2833"/>
+                </a:solidFill>
+                <a:latin typeface="Arial" pitchFamily="34" charset="0"/>
+                <a:ea typeface="Arial" pitchFamily="34" charset="-122"/>
+                <a:cs typeface="Arial" pitchFamily="34" charset="-120"/>
+              </a:rPr>
+              <a:t> before Janmāṣṭamī is "</a:t>
+            </a:r>
+            <a:pPr algn="l" indent="0" marL="0">
+              <a:lnSpc>
+                <a:spcPts val="1680"/>
+              </a:lnSpc>
+              <a:spcBef>
+                <a:spcPts val="300"/>
+              </a:spcBef>
+              <a:spcAft>
+                <a:spcPts val="300"/>
+              </a:spcAft>
+              <a:buNone/>
+            </a:pPr>
+            <a:r>
+              <a:rPr lang="en-US" sz="1200" i="1" dirty="0">
+                <a:solidFill>
+                  <a:srgbClr val="1C2833"/>
+                </a:solidFill>
+                <a:latin typeface="Arial" pitchFamily="34" charset="0"/>
+                <a:ea typeface="Arial" pitchFamily="34" charset="-122"/>
+                <a:cs typeface="Arial" pitchFamily="34" charset="-120"/>
+              </a:rPr>
+              <a:t>Śrāvaṇa kṛṣṇa pakṣa</a:t>
+            </a:r>
+            <a:pPr algn="l" indent="0" marL="0">
+              <a:lnSpc>
+                <a:spcPts val="1680"/>
+              </a:lnSpc>
+              <a:spcBef>
+                <a:spcPts val="300"/>
+              </a:spcBef>
+              <a:spcAft>
+                <a:spcPts val="300"/>
+              </a:spcAft>
+              <a:buNone/>
+            </a:pPr>
+            <a:r>
+              <a:rPr lang="en-US" sz="1200" dirty="0">
+                <a:solidFill>
+                  <a:srgbClr val="1C2833"/>
+                </a:solidFill>
+                <a:latin typeface="Arial" pitchFamily="34" charset="0"/>
+                <a:ea typeface="Arial" pitchFamily="34" charset="-122"/>
+                <a:cs typeface="Arial" pitchFamily="34" charset="-120"/>
+              </a:rPr>
+              <a:t>" under </a:t>
+            </a:r>
+            <a:pPr algn="l" indent="0" marL="0">
+              <a:lnSpc>
+                <a:spcPts val="1680"/>
+              </a:lnSpc>
+              <a:spcBef>
+                <a:spcPts val="300"/>
+              </a:spcBef>
+              <a:spcAft>
+                <a:spcPts val="300"/>
+              </a:spcAft>
+              <a:buNone/>
+            </a:pPr>
+            <a:r>
+              <a:rPr lang="en-US" sz="1200" i="1" dirty="0">
+                <a:solidFill>
+                  <a:srgbClr val="1C2833"/>
+                </a:solidFill>
+                <a:latin typeface="Arial" pitchFamily="34" charset="0"/>
+                <a:ea typeface="Arial" pitchFamily="34" charset="-122"/>
+                <a:cs typeface="Arial" pitchFamily="34" charset="-120"/>
+              </a:rPr>
+              <a:t>pūrṇimānta</a:t>
+            </a:r>
+            <a:pPr algn="l" indent="0" marL="0">
+              <a:lnSpc>
+                <a:spcPts val="1680"/>
+              </a:lnSpc>
+              <a:spcBef>
+                <a:spcPts val="300"/>
+              </a:spcBef>
+              <a:spcAft>
+                <a:spcPts val="300"/>
+              </a:spcAft>
+              <a:buNone/>
+            </a:pPr>
+            <a:r>
+              <a:rPr lang="en-US" sz="1200" dirty="0">
+                <a:solidFill>
+                  <a:srgbClr val="1C2833"/>
+                </a:solidFill>
+                <a:latin typeface="Arial" pitchFamily="34" charset="0"/>
+                <a:ea typeface="Arial" pitchFamily="34" charset="-122"/>
+                <a:cs typeface="Arial" pitchFamily="34" charset="-120"/>
+              </a:rPr>
+              <a:t> and "</a:t>
+            </a:r>
+            <a:pPr algn="l" indent="0" marL="0">
+              <a:lnSpc>
+                <a:spcPts val="1680"/>
+              </a:lnSpc>
+              <a:spcBef>
+                <a:spcPts val="300"/>
+              </a:spcBef>
+              <a:spcAft>
+                <a:spcPts val="300"/>
+              </a:spcAft>
+              <a:buNone/>
+            </a:pPr>
+            <a:r>
+              <a:rPr lang="en-US" sz="1200" i="1" dirty="0">
+                <a:solidFill>
+                  <a:srgbClr val="1C2833"/>
+                </a:solidFill>
+                <a:latin typeface="Arial" pitchFamily="34" charset="0"/>
+                <a:ea typeface="Arial" pitchFamily="34" charset="-122"/>
+                <a:cs typeface="Arial" pitchFamily="34" charset="-120"/>
+              </a:rPr>
+              <a:t>Bhādrapada kṛṣṇa pakṣa</a:t>
+            </a:r>
+            <a:pPr algn="l" indent="0" marL="0">
+              <a:lnSpc>
+                <a:spcPts val="1680"/>
+              </a:lnSpc>
+              <a:spcBef>
+                <a:spcPts val="300"/>
+              </a:spcBef>
+              <a:spcAft>
+                <a:spcPts val="300"/>
+              </a:spcAft>
+              <a:buNone/>
+            </a:pPr>
+            <a:r>
+              <a:rPr lang="en-US" sz="1200" dirty="0">
+                <a:solidFill>
+                  <a:srgbClr val="1C2833"/>
+                </a:solidFill>
+                <a:latin typeface="Arial" pitchFamily="34" charset="0"/>
+                <a:ea typeface="Arial" pitchFamily="34" charset="-122"/>
+                <a:cs typeface="Arial" pitchFamily="34" charset="-120"/>
+              </a:rPr>
+              <a:t>" under </a:t>
+            </a:r>
+            <a:pPr algn="l" indent="0" marL="0">
+              <a:lnSpc>
+                <a:spcPts val="1680"/>
+              </a:lnSpc>
+              <a:spcBef>
+                <a:spcPts val="300"/>
+              </a:spcBef>
+              <a:spcAft>
+                <a:spcPts val="300"/>
+              </a:spcAft>
+              <a:buNone/>
+            </a:pPr>
+            <a:r>
+              <a:rPr lang="en-US" sz="1200" i="1" dirty="0">
+                <a:solidFill>
+                  <a:srgbClr val="1C2833"/>
+                </a:solidFill>
+                <a:latin typeface="Arial" pitchFamily="34" charset="0"/>
+                <a:ea typeface="Arial" pitchFamily="34" charset="-122"/>
+                <a:cs typeface="Arial" pitchFamily="34" charset="-120"/>
+              </a:rPr>
               <a:t>amānta</a:t>
             </a:r>
             <a:pPr algn="l" indent="0" marL="0">
@@ -2914,8 +3826,99 @@
                 <a:ea typeface="Arial" pitchFamily="34" charset="-122"/>
                 <a:cs typeface="Arial" pitchFamily="34" charset="-120"/>
               </a:rPr>
-              <a:t> / </a:t>
-            </a:r>
+              <a:t>. Both are correct — they are counting from different anchor points.</a:t>
+            </a:r>
+            <a:endParaRPr lang="en-US" sz="1200" dirty="0"/>
+          </a:p>
+        </p:txBody>
+      </p:sp>
+      <p:sp>
+        <p:nvSpPr>
+          <p:cNvPr id="5" name="Text 3"/>
+          <p:cNvSpPr/>
+          <p:nvPr/>
+        </p:nvSpPr>
+        <p:spPr>
+          <a:xfrm>
+            <a:off x="634901" y="1599605"/>
+            <a:ext cx="8102798" cy="281880"/>
+          </a:xfrm>
+          <a:prstGeom prst="rect">
+            <a:avLst/>
+          </a:prstGeom>
+          <a:noFill/>
+          <a:ln/>
+        </p:spPr>
+        <p:txBody>
+          <a:bodyPr wrap="square" lIns="0" tIns="0" rIns="0" bIns="0" rtlCol="0" anchor="t"/>
+          <a:lstStyle/>
+          <a:p>
+            <a:pPr algn="l" marL="342900" indent="-342900">
+              <a:lnSpc>
+                <a:spcPts val="1620"/>
+              </a:lnSpc>
+              <a:spcAft>
+                <a:spcPts val="300"/>
+              </a:spcAft>
+              <a:buSzPct val="100000"/>
+              <a:buChar char="•"/>
+            </a:pPr>
+            <a:r>
+              <a:rPr lang="en-US" sz="1200" b="1" dirty="0">
+                <a:solidFill>
+                  <a:srgbClr val="1C2833"/>
+                </a:solidFill>
+                <a:latin typeface="Arial" pitchFamily="34" charset="0"/>
+                <a:ea typeface="Arial" pitchFamily="34" charset="-122"/>
+                <a:cs typeface="Arial" pitchFamily="34" charset="-120"/>
+              </a:rPr>
+              <a:t>Linking festivals to tithis — the festival table.</a:t>
+            </a:r>
+            <a:pPr algn="l" indent="0" marL="0">
+              <a:lnSpc>
+                <a:spcPts val="1620"/>
+              </a:lnSpc>
+              <a:spcAft>
+                <a:spcPts val="300"/>
+              </a:spcAft>
+              <a:buNone/>
+            </a:pPr>
+            <a:r>
+              <a:rPr lang="en-US" sz="1200" dirty="0">
+                <a:solidFill>
+                  <a:srgbClr val="1C2833"/>
+                </a:solidFill>
+                <a:latin typeface="Arial" pitchFamily="34" charset="0"/>
+                <a:ea typeface="Arial" pitchFamily="34" charset="-122"/>
+                <a:cs typeface="Arial" pitchFamily="34" charset="-120"/>
+              </a:rPr>
+              <a:t> Write 6 examples:</a:t>
+            </a:r>
+            <a:endParaRPr lang="en-US" sz="1200" dirty="0"/>
+          </a:p>
+        </p:txBody>
+      </p:sp>
+      <p:sp>
+        <p:nvSpPr>
+          <p:cNvPr id="6" name="Text 4"/>
+          <p:cNvSpPr/>
+          <p:nvPr/>
+        </p:nvSpPr>
+        <p:spPr>
+          <a:xfrm>
+            <a:off x="406301" y="1970336"/>
+            <a:ext cx="8498026" cy="213271"/>
+          </a:xfrm>
+          <a:prstGeom prst="rect">
+            <a:avLst/>
+          </a:prstGeom>
+          <a:noFill/>
+          <a:ln/>
+        </p:spPr>
+        <p:txBody>
+          <a:bodyPr wrap="square" lIns="0" tIns="0" rIns="0" bIns="0" rtlCol="0" anchor="t"/>
+          <a:lstStyle/>
+          <a:p>
             <a:pPr algn="l" indent="0" marL="0">
               <a:lnSpc>
                 <a:spcPts val="1680"/>
@@ -2937,214 +3940,7 @@
                 <a:ea typeface="Arial" pitchFamily="34" charset="-122"/>
                 <a:cs typeface="Arial" pitchFamily="34" charset="-120"/>
               </a:rPr>
-              <a:t>pūrṇimānta</a:t>
-            </a:r>
-            <a:pPr algn="l" indent="0" marL="0">
-              <a:lnSpc>
-                <a:spcPts val="1680"/>
-              </a:lnSpc>
-              <a:spcBef>
-                <a:spcPts val="300"/>
-              </a:spcBef>
-              <a:spcAft>
-                <a:spcPts val="300"/>
-              </a:spcAft>
-              <a:buNone/>
-            </a:pPr>
-            <a:r>
-              <a:rPr lang="en-US" sz="1200" dirty="0">
-                <a:solidFill>
-                  <a:srgbClr val="1C2833"/>
-                </a:solidFill>
-                <a:latin typeface="Arial" pitchFamily="34" charset="0"/>
-                <a:ea typeface="Arial" pitchFamily="34" charset="-122"/>
-                <a:cs typeface="Arial" pitchFamily="34" charset="-120"/>
-              </a:rPr>
-              <a:t> distinction confuses everyone the first time. It's OK to leave students slightly fuzzy on it — the key insight is that conventions vary regionally, and "the calendar" isn't one fixed thing. – Some students will know a festival under a regional name (e.g. </a:t>
-            </a:r>
-            <a:pPr algn="l" indent="0" marL="0">
-              <a:lnSpc>
-                <a:spcPts val="1680"/>
-              </a:lnSpc>
-              <a:spcBef>
-                <a:spcPts val="300"/>
-              </a:spcBef>
-              <a:spcAft>
-                <a:spcPts val="300"/>
-              </a:spcAft>
-              <a:buNone/>
-            </a:pPr>
-            <a:r>
-              <a:rPr lang="en-US" sz="1200" i="1" dirty="0">
-                <a:solidFill>
-                  <a:srgbClr val="1C2833"/>
-                </a:solidFill>
-                <a:latin typeface="Arial" pitchFamily="34" charset="0"/>
-                <a:ea typeface="Arial" pitchFamily="34" charset="-122"/>
-                <a:cs typeface="Arial" pitchFamily="34" charset="-120"/>
-              </a:rPr>
-              <a:t>Gudi Pādvā</a:t>
-            </a:r>
-            <a:pPr algn="l" indent="0" marL="0">
-              <a:lnSpc>
-                <a:spcPts val="1680"/>
-              </a:lnSpc>
-              <a:spcBef>
-                <a:spcPts val="300"/>
-              </a:spcBef>
-              <a:spcAft>
-                <a:spcPts val="300"/>
-              </a:spcAft>
-              <a:buNone/>
-            </a:pPr>
-            <a:r>
-              <a:rPr lang="en-US" sz="1200" dirty="0">
-                <a:solidFill>
-                  <a:srgbClr val="1C2833"/>
-                </a:solidFill>
-                <a:latin typeface="Arial" pitchFamily="34" charset="0"/>
-                <a:ea typeface="Arial" pitchFamily="34" charset="-122"/>
-                <a:cs typeface="Arial" pitchFamily="34" charset="-120"/>
-              </a:rPr>
-              <a:t> vs. </a:t>
-            </a:r>
-            <a:pPr algn="l" indent="0" marL="0">
-              <a:lnSpc>
-                <a:spcPts val="1680"/>
-              </a:lnSpc>
-              <a:spcBef>
-                <a:spcPts val="300"/>
-              </a:spcBef>
-              <a:spcAft>
-                <a:spcPts val="300"/>
-              </a:spcAft>
-              <a:buNone/>
-            </a:pPr>
-            <a:r>
-              <a:rPr lang="en-US" sz="1200" i="1" dirty="0">
-                <a:solidFill>
-                  <a:srgbClr val="1C2833"/>
-                </a:solidFill>
-                <a:latin typeface="Arial" pitchFamily="34" charset="0"/>
-                <a:ea typeface="Arial" pitchFamily="34" charset="-122"/>
-                <a:cs typeface="Arial" pitchFamily="34" charset="-120"/>
-              </a:rPr>
-              <a:t>Ugādi</a:t>
-            </a:r>
-            <a:pPr algn="l" indent="0" marL="0">
-              <a:lnSpc>
-                <a:spcPts val="1680"/>
-              </a:lnSpc>
-              <a:spcBef>
-                <a:spcPts val="300"/>
-              </a:spcBef>
-              <a:spcAft>
-                <a:spcPts val="300"/>
-              </a:spcAft>
-              <a:buNone/>
-            </a:pPr>
-            <a:r>
-              <a:rPr lang="en-US" sz="1200" dirty="0">
-                <a:solidFill>
-                  <a:srgbClr val="1C2833"/>
-                </a:solidFill>
-                <a:latin typeface="Arial" pitchFamily="34" charset="0"/>
-                <a:ea typeface="Arial" pitchFamily="34" charset="-122"/>
-                <a:cs typeface="Arial" pitchFamily="34" charset="-120"/>
-              </a:rPr>
-              <a:t> — both </a:t>
-            </a:r>
-            <a:pPr algn="l" indent="0" marL="0">
-              <a:lnSpc>
-                <a:spcPts val="1680"/>
-              </a:lnSpc>
-              <a:spcBef>
-                <a:spcPts val="300"/>
-              </a:spcBef>
-              <a:spcAft>
-                <a:spcPts val="300"/>
-              </a:spcAft>
-              <a:buNone/>
-            </a:pPr>
-            <a:r>
-              <a:rPr lang="en-US" sz="1200" i="1" dirty="0">
-                <a:solidFill>
-                  <a:srgbClr val="1C2833"/>
-                </a:solidFill>
-                <a:latin typeface="Arial" pitchFamily="34" charset="0"/>
-                <a:ea typeface="Arial" pitchFamily="34" charset="-122"/>
-                <a:cs typeface="Arial" pitchFamily="34" charset="-120"/>
-              </a:rPr>
-              <a:t>Caitra</a:t>
-            </a:r>
-            <a:pPr algn="l" indent="0" marL="0">
-              <a:lnSpc>
-                <a:spcPts val="1680"/>
-              </a:lnSpc>
-              <a:spcBef>
-                <a:spcPts val="300"/>
-              </a:spcBef>
-              <a:spcAft>
-                <a:spcPts val="300"/>
-              </a:spcAft>
-              <a:buNone/>
-            </a:pPr>
-            <a:r>
-              <a:rPr lang="en-US" sz="1200" dirty="0">
-                <a:solidFill>
-                  <a:srgbClr val="1C2833"/>
-                </a:solidFill>
-                <a:latin typeface="Arial" pitchFamily="34" charset="0"/>
-                <a:ea typeface="Arial" pitchFamily="34" charset="-122"/>
-                <a:cs typeface="Arial" pitchFamily="34" charset="-120"/>
-              </a:rPr>
-              <a:t> śukla pratipadā). Honour both. – The "12 months are named after nakṣatras" point doesn't need full nakṣatra coverage today — that comes in a later module. Today we just say </a:t>
-            </a:r>
-            <a:pPr algn="l" indent="0" marL="0">
-              <a:lnSpc>
-                <a:spcPts val="1680"/>
-              </a:lnSpc>
-              <a:spcBef>
-                <a:spcPts val="300"/>
-              </a:spcBef>
-              <a:spcAft>
-                <a:spcPts val="300"/>
-              </a:spcAft>
-              <a:buNone/>
-            </a:pPr>
-            <a:r>
-              <a:rPr lang="en-US" sz="1200" i="1" dirty="0">
-                <a:solidFill>
-                  <a:srgbClr val="1C2833"/>
-                </a:solidFill>
-                <a:latin typeface="Arial" pitchFamily="34" charset="0"/>
-                <a:ea typeface="Arial" pitchFamily="34" charset="-122"/>
-                <a:cs typeface="Arial" pitchFamily="34" charset="-120"/>
-              </a:rPr>
-              <a:t>what</a:t>
-            </a:r>
-            <a:pPr algn="l" indent="0" marL="0">
-              <a:lnSpc>
-                <a:spcPts val="1680"/>
-              </a:lnSpc>
-              <a:spcBef>
-                <a:spcPts val="300"/>
-              </a:spcBef>
-              <a:spcAft>
-                <a:spcPts val="300"/>
-              </a:spcAft>
-              <a:buNone/>
-            </a:pPr>
-            <a:r>
-              <a:rPr lang="en-US" sz="1200" dirty="0">
-                <a:solidFill>
-                  <a:srgbClr val="1C2833"/>
-                </a:solidFill>
-                <a:latin typeface="Arial" pitchFamily="34" charset="0"/>
-                <a:ea typeface="Arial" pitchFamily="34" charset="-122"/>
-                <a:cs typeface="Arial" pitchFamily="34" charset="-120"/>
-              </a:rPr>
-              <a:t> the naming convention is.</a:t>
+              <a:t>Each row: Festival · Lunar month + pakṣa + tithi · What it celebrates / who observes.</a:t>
             </a:r>
             <a:endParaRPr lang="en-US" sz="1200" dirty="0"/>
           </a:p>
@@ -3152,7 +3948,7 @@
       </p:sp>
       <p:sp>
         <p:nvSpPr>
-          <p:cNvPr id="5" name="Text 3"/>
+          <p:cNvPr id="7" name="Text 5"/>
           <p:cNvSpPr/>
           <p:nvPr/>
         </p:nvSpPr>
@@ -3302,7 +4098,7 @@
                 <a:ea typeface="Georgia" pitchFamily="34" charset="-122"/>
                 <a:cs typeface="Georgia" pitchFamily="34" charset="-120"/>
               </a:rPr>
-              <a:t>Citation(s) used in this lesson</a:t>
+              <a:t>Core (20 min) (cont.)</a:t>
             </a:r>
             <a:endParaRPr lang="en-US" sz="1800" dirty="0"/>
           </a:p>
@@ -3316,8 +4112,8 @@
         </p:nvSpPr>
         <p:spPr>
           <a:xfrm>
-            <a:off x="406301" y="870942"/>
-            <a:ext cx="8498026" cy="426541"/>
+            <a:off x="634901" y="883593"/>
+            <a:ext cx="8102798" cy="1988344"/>
           </a:xfrm>
           <a:prstGeom prst="rect">
             <a:avLst/>
@@ -3329,6 +4125,700 @@
           <a:bodyPr wrap="square" lIns="0" tIns="0" rIns="0" bIns="0" rtlCol="0" anchor="t"/>
           <a:lstStyle/>
           <a:p>
+            <a:pPr algn="l" marL="342900" indent="-342900">
+              <a:lnSpc>
+                <a:spcPts val="1620"/>
+              </a:lnSpc>
+              <a:spcAft>
+                <a:spcPts val="300"/>
+              </a:spcAft>
+              <a:buSzPct val="100000"/>
+              <a:buChar char="•"/>
+            </a:pPr>
+            <a:r>
+              <a:rPr lang="en-US" sz="1200" i="1" dirty="0">
+                <a:solidFill>
+                  <a:srgbClr val="1C2833"/>
+                </a:solidFill>
+                <a:latin typeface="Arial" pitchFamily="34" charset="0"/>
+                <a:ea typeface="Arial" pitchFamily="34" charset="-122"/>
+                <a:cs typeface="Arial" pitchFamily="34" charset="-120"/>
+              </a:rPr>
+              <a:t>Ugādi / Gudi Pādvā</a:t>
+            </a:r>
+            <a:pPr algn="l" indent="0" marL="0">
+              <a:lnSpc>
+                <a:spcPts val="1620"/>
+              </a:lnSpc>
+              <a:spcAft>
+                <a:spcPts val="300"/>
+              </a:spcAft>
+              <a:buNone/>
+            </a:pPr>
+            <a:r>
+              <a:rPr lang="en-US" sz="1200" dirty="0">
+                <a:solidFill>
+                  <a:srgbClr val="1C2833"/>
+                </a:solidFill>
+                <a:latin typeface="Arial" pitchFamily="34" charset="0"/>
+                <a:ea typeface="Arial" pitchFamily="34" charset="-122"/>
+                <a:cs typeface="Arial" pitchFamily="34" charset="-120"/>
+              </a:rPr>
+              <a:t> — </a:t>
+            </a:r>
+            <a:pPr algn="l" indent="0" marL="0">
+              <a:lnSpc>
+                <a:spcPts val="1620"/>
+              </a:lnSpc>
+              <a:spcAft>
+                <a:spcPts val="300"/>
+              </a:spcAft>
+              <a:buNone/>
+            </a:pPr>
+            <a:r>
+              <a:rPr lang="en-US" sz="1200" i="1" dirty="0">
+                <a:solidFill>
+                  <a:srgbClr val="1C2833"/>
+                </a:solidFill>
+                <a:latin typeface="Arial" pitchFamily="34" charset="0"/>
+                <a:ea typeface="Arial" pitchFamily="34" charset="-122"/>
+                <a:cs typeface="Arial" pitchFamily="34" charset="-120"/>
+              </a:rPr>
+              <a:t>Caitra</a:t>
+            </a:r>
+            <a:pPr algn="l" indent="0" marL="0">
+              <a:lnSpc>
+                <a:spcPts val="1620"/>
+              </a:lnSpc>
+              <a:spcAft>
+                <a:spcPts val="300"/>
+              </a:spcAft>
+              <a:buNone/>
+            </a:pPr>
+            <a:r>
+              <a:rPr lang="en-US" sz="1200" dirty="0">
+                <a:solidFill>
+                  <a:srgbClr val="1C2833"/>
+                </a:solidFill>
+                <a:latin typeface="Arial" pitchFamily="34" charset="0"/>
+                <a:ea typeface="Arial" pitchFamily="34" charset="-122"/>
+                <a:cs typeface="Arial" pitchFamily="34" charset="-120"/>
+              </a:rPr>
+              <a:t> śukla pratipadā · Lunar new year (in much of South / West India)</a:t>
+            </a:r>
+            <a:endParaRPr lang="en-US" sz="1200" dirty="0"/>
+          </a:p>
+          <a:p>
+            <a:pPr algn="l" marL="342900" indent="-342900">
+              <a:lnSpc>
+                <a:spcPts val="1620"/>
+              </a:lnSpc>
+              <a:spcAft>
+                <a:spcPts val="300"/>
+              </a:spcAft>
+              <a:buSzPct val="100000"/>
+              <a:buChar char="•"/>
+            </a:pPr>
+            <a:r>
+              <a:rPr lang="en-US" sz="1200" i="1" dirty="0">
+                <a:solidFill>
+                  <a:srgbClr val="1C2833"/>
+                </a:solidFill>
+                <a:latin typeface="Arial" pitchFamily="34" charset="0"/>
+                <a:ea typeface="Arial" pitchFamily="34" charset="-122"/>
+                <a:cs typeface="Arial" pitchFamily="34" charset="-120"/>
+              </a:rPr>
+              <a:t>Rāma Navamī</a:t>
+            </a:r>
+            <a:pPr algn="l" indent="0" marL="0">
+              <a:lnSpc>
+                <a:spcPts val="1620"/>
+              </a:lnSpc>
+              <a:spcAft>
+                <a:spcPts val="300"/>
+              </a:spcAft>
+              <a:buNone/>
+            </a:pPr>
+            <a:r>
+              <a:rPr lang="en-US" sz="1200" dirty="0">
+                <a:solidFill>
+                  <a:srgbClr val="1C2833"/>
+                </a:solidFill>
+                <a:latin typeface="Arial" pitchFamily="34" charset="0"/>
+                <a:ea typeface="Arial" pitchFamily="34" charset="-122"/>
+                <a:cs typeface="Arial" pitchFamily="34" charset="-120"/>
+              </a:rPr>
+              <a:t> — </a:t>
+            </a:r>
+            <a:pPr algn="l" indent="0" marL="0">
+              <a:lnSpc>
+                <a:spcPts val="1620"/>
+              </a:lnSpc>
+              <a:spcAft>
+                <a:spcPts val="300"/>
+              </a:spcAft>
+              <a:buNone/>
+            </a:pPr>
+            <a:r>
+              <a:rPr lang="en-US" sz="1200" i="1" dirty="0">
+                <a:solidFill>
+                  <a:srgbClr val="1C2833"/>
+                </a:solidFill>
+                <a:latin typeface="Arial" pitchFamily="34" charset="0"/>
+                <a:ea typeface="Arial" pitchFamily="34" charset="-122"/>
+                <a:cs typeface="Arial" pitchFamily="34" charset="-120"/>
+              </a:rPr>
+              <a:t>Caitra</a:t>
+            </a:r>
+            <a:pPr algn="l" indent="0" marL="0">
+              <a:lnSpc>
+                <a:spcPts val="1620"/>
+              </a:lnSpc>
+              <a:spcAft>
+                <a:spcPts val="300"/>
+              </a:spcAft>
+              <a:buNone/>
+            </a:pPr>
+            <a:r>
+              <a:rPr lang="en-US" sz="1200" dirty="0">
+                <a:solidFill>
+                  <a:srgbClr val="1C2833"/>
+                </a:solidFill>
+                <a:latin typeface="Arial" pitchFamily="34" charset="0"/>
+                <a:ea typeface="Arial" pitchFamily="34" charset="-122"/>
+                <a:cs typeface="Arial" pitchFamily="34" charset="-120"/>
+              </a:rPr>
+              <a:t> śukla navamī · Birth of Rāma</a:t>
+            </a:r>
+            <a:endParaRPr lang="en-US" sz="1200" dirty="0"/>
+          </a:p>
+          <a:p>
+            <a:pPr algn="l" marL="342900" indent="-342900">
+              <a:lnSpc>
+                <a:spcPts val="1620"/>
+              </a:lnSpc>
+              <a:spcAft>
+                <a:spcPts val="300"/>
+              </a:spcAft>
+              <a:buSzPct val="100000"/>
+              <a:buChar char="•"/>
+            </a:pPr>
+            <a:r>
+              <a:rPr lang="en-US" sz="1200" i="1" dirty="0">
+                <a:solidFill>
+                  <a:srgbClr val="1C2833"/>
+                </a:solidFill>
+                <a:latin typeface="Arial" pitchFamily="34" charset="0"/>
+                <a:ea typeface="Arial" pitchFamily="34" charset="-122"/>
+                <a:cs typeface="Arial" pitchFamily="34" charset="-120"/>
+              </a:rPr>
+              <a:t>Akṣaya Tṛtīyā</a:t>
+            </a:r>
+            <a:pPr algn="l" indent="0" marL="0">
+              <a:lnSpc>
+                <a:spcPts val="1620"/>
+              </a:lnSpc>
+              <a:spcAft>
+                <a:spcPts val="300"/>
+              </a:spcAft>
+              <a:buNone/>
+            </a:pPr>
+            <a:r>
+              <a:rPr lang="en-US" sz="1200" dirty="0">
+                <a:solidFill>
+                  <a:srgbClr val="1C2833"/>
+                </a:solidFill>
+                <a:latin typeface="Arial" pitchFamily="34" charset="0"/>
+                <a:ea typeface="Arial" pitchFamily="34" charset="-122"/>
+                <a:cs typeface="Arial" pitchFamily="34" charset="-120"/>
+              </a:rPr>
+              <a:t> — </a:t>
+            </a:r>
+            <a:pPr algn="l" indent="0" marL="0">
+              <a:lnSpc>
+                <a:spcPts val="1620"/>
+              </a:lnSpc>
+              <a:spcAft>
+                <a:spcPts val="300"/>
+              </a:spcAft>
+              <a:buNone/>
+            </a:pPr>
+            <a:r>
+              <a:rPr lang="en-US" sz="1200" i="1" dirty="0">
+                <a:solidFill>
+                  <a:srgbClr val="1C2833"/>
+                </a:solidFill>
+                <a:latin typeface="Arial" pitchFamily="34" charset="0"/>
+                <a:ea typeface="Arial" pitchFamily="34" charset="-122"/>
+                <a:cs typeface="Arial" pitchFamily="34" charset="-120"/>
+              </a:rPr>
+              <a:t>Vaiśākha</a:t>
+            </a:r>
+            <a:pPr algn="l" indent="0" marL="0">
+              <a:lnSpc>
+                <a:spcPts val="1620"/>
+              </a:lnSpc>
+              <a:spcAft>
+                <a:spcPts val="300"/>
+              </a:spcAft>
+              <a:buNone/>
+            </a:pPr>
+            <a:r>
+              <a:rPr lang="en-US" sz="1200" dirty="0">
+                <a:solidFill>
+                  <a:srgbClr val="1C2833"/>
+                </a:solidFill>
+                <a:latin typeface="Arial" pitchFamily="34" charset="0"/>
+                <a:ea typeface="Arial" pitchFamily="34" charset="-122"/>
+                <a:cs typeface="Arial" pitchFamily="34" charset="-120"/>
+              </a:rPr>
+              <a:t> śukla tṛtīyā · Auspicious for beginnings</a:t>
+            </a:r>
+            <a:endParaRPr lang="en-US" sz="1200" dirty="0"/>
+          </a:p>
+          <a:p>
+            <a:pPr algn="l" marL="342900" indent="-342900">
+              <a:lnSpc>
+                <a:spcPts val="1620"/>
+              </a:lnSpc>
+              <a:spcAft>
+                <a:spcPts val="300"/>
+              </a:spcAft>
+              <a:buSzPct val="100000"/>
+              <a:buChar char="•"/>
+            </a:pPr>
+            <a:r>
+              <a:rPr lang="en-US" sz="1200" i="1" dirty="0">
+                <a:solidFill>
+                  <a:srgbClr val="1C2833"/>
+                </a:solidFill>
+                <a:latin typeface="Arial" pitchFamily="34" charset="0"/>
+                <a:ea typeface="Arial" pitchFamily="34" charset="-122"/>
+                <a:cs typeface="Arial" pitchFamily="34" charset="-120"/>
+              </a:rPr>
+              <a:t>Guru Pūrṇimā</a:t>
+            </a:r>
+            <a:pPr algn="l" indent="0" marL="0">
+              <a:lnSpc>
+                <a:spcPts val="1620"/>
+              </a:lnSpc>
+              <a:spcAft>
+                <a:spcPts val="300"/>
+              </a:spcAft>
+              <a:buNone/>
+            </a:pPr>
+            <a:r>
+              <a:rPr lang="en-US" sz="1200" dirty="0">
+                <a:solidFill>
+                  <a:srgbClr val="1C2833"/>
+                </a:solidFill>
+                <a:latin typeface="Arial" pitchFamily="34" charset="0"/>
+                <a:ea typeface="Arial" pitchFamily="34" charset="-122"/>
+                <a:cs typeface="Arial" pitchFamily="34" charset="-120"/>
+              </a:rPr>
+              <a:t> — </a:t>
+            </a:r>
+            <a:pPr algn="l" indent="0" marL="0">
+              <a:lnSpc>
+                <a:spcPts val="1620"/>
+              </a:lnSpc>
+              <a:spcAft>
+                <a:spcPts val="300"/>
+              </a:spcAft>
+              <a:buNone/>
+            </a:pPr>
+            <a:r>
+              <a:rPr lang="en-US" sz="1200" i="1" dirty="0">
+                <a:solidFill>
+                  <a:srgbClr val="1C2833"/>
+                </a:solidFill>
+                <a:latin typeface="Arial" pitchFamily="34" charset="0"/>
+                <a:ea typeface="Arial" pitchFamily="34" charset="-122"/>
+                <a:cs typeface="Arial" pitchFamily="34" charset="-120"/>
+              </a:rPr>
+              <a:t>Āṣāḍha</a:t>
+            </a:r>
+            <a:pPr algn="l" indent="0" marL="0">
+              <a:lnSpc>
+                <a:spcPts val="1620"/>
+              </a:lnSpc>
+              <a:spcAft>
+                <a:spcPts val="300"/>
+              </a:spcAft>
+              <a:buNone/>
+            </a:pPr>
+            <a:r>
+              <a:rPr lang="en-US" sz="1200" dirty="0">
+                <a:solidFill>
+                  <a:srgbClr val="1C2833"/>
+                </a:solidFill>
+                <a:latin typeface="Arial" pitchFamily="34" charset="0"/>
+                <a:ea typeface="Arial" pitchFamily="34" charset="-122"/>
+                <a:cs typeface="Arial" pitchFamily="34" charset="-120"/>
+              </a:rPr>
+              <a:t> pūrṇimā · Honouring teachers</a:t>
+            </a:r>
+            <a:endParaRPr lang="en-US" sz="1200" dirty="0"/>
+          </a:p>
+          <a:p>
+            <a:pPr algn="l" marL="342900" indent="-342900">
+              <a:lnSpc>
+                <a:spcPts val="1620"/>
+              </a:lnSpc>
+              <a:spcAft>
+                <a:spcPts val="300"/>
+              </a:spcAft>
+              <a:buSzPct val="100000"/>
+              <a:buChar char="•"/>
+            </a:pPr>
+            <a:r>
+              <a:rPr lang="en-US" sz="1200" i="1" dirty="0">
+                <a:solidFill>
+                  <a:srgbClr val="1C2833"/>
+                </a:solidFill>
+                <a:latin typeface="Arial" pitchFamily="34" charset="0"/>
+                <a:ea typeface="Arial" pitchFamily="34" charset="-122"/>
+                <a:cs typeface="Arial" pitchFamily="34" charset="-120"/>
+              </a:rPr>
+              <a:t>Janmāṣṭamī</a:t>
+            </a:r>
+            <a:pPr algn="l" indent="0" marL="0">
+              <a:lnSpc>
+                <a:spcPts val="1620"/>
+              </a:lnSpc>
+              <a:spcAft>
+                <a:spcPts val="300"/>
+              </a:spcAft>
+              <a:buNone/>
+            </a:pPr>
+            <a:r>
+              <a:rPr lang="en-US" sz="1200" dirty="0">
+                <a:solidFill>
+                  <a:srgbClr val="1C2833"/>
+                </a:solidFill>
+                <a:latin typeface="Arial" pitchFamily="34" charset="0"/>
+                <a:ea typeface="Arial" pitchFamily="34" charset="-122"/>
+                <a:cs typeface="Arial" pitchFamily="34" charset="-120"/>
+              </a:rPr>
+              <a:t> — </a:t>
+            </a:r>
+            <a:pPr algn="l" indent="0" marL="0">
+              <a:lnSpc>
+                <a:spcPts val="1620"/>
+              </a:lnSpc>
+              <a:spcAft>
+                <a:spcPts val="300"/>
+              </a:spcAft>
+              <a:buNone/>
+            </a:pPr>
+            <a:r>
+              <a:rPr lang="en-US" sz="1200" i="1" dirty="0">
+                <a:solidFill>
+                  <a:srgbClr val="1C2833"/>
+                </a:solidFill>
+                <a:latin typeface="Arial" pitchFamily="34" charset="0"/>
+                <a:ea typeface="Arial" pitchFamily="34" charset="-122"/>
+                <a:cs typeface="Arial" pitchFamily="34" charset="-120"/>
+              </a:rPr>
+              <a:t>Bhādrapada</a:t>
+            </a:r>
+            <a:pPr algn="l" indent="0" marL="0">
+              <a:lnSpc>
+                <a:spcPts val="1620"/>
+              </a:lnSpc>
+              <a:spcAft>
+                <a:spcPts val="300"/>
+              </a:spcAft>
+              <a:buNone/>
+            </a:pPr>
+            <a:r>
+              <a:rPr lang="en-US" sz="1200" dirty="0">
+                <a:solidFill>
+                  <a:srgbClr val="1C2833"/>
+                </a:solidFill>
+                <a:latin typeface="Arial" pitchFamily="34" charset="0"/>
+                <a:ea typeface="Arial" pitchFamily="34" charset="-122"/>
+                <a:cs typeface="Arial" pitchFamily="34" charset="-120"/>
+              </a:rPr>
+              <a:t> (or Śrāvaṇa, depending) kṛṣṇa aṣṭamī · Birth of Kṛṣṇa</a:t>
+            </a:r>
+            <a:endParaRPr lang="en-US" sz="1200" dirty="0"/>
+          </a:p>
+          <a:p>
+            <a:pPr algn="l" marL="342900" indent="-342900">
+              <a:lnSpc>
+                <a:spcPts val="1620"/>
+              </a:lnSpc>
+              <a:spcAft>
+                <a:spcPts val="300"/>
+              </a:spcAft>
+              <a:buSzPct val="100000"/>
+              <a:buChar char="•"/>
+            </a:pPr>
+            <a:r>
+              <a:rPr lang="en-US" sz="1200" i="1" dirty="0">
+                <a:solidFill>
+                  <a:srgbClr val="1C2833"/>
+                </a:solidFill>
+                <a:latin typeface="Arial" pitchFamily="34" charset="0"/>
+                <a:ea typeface="Arial" pitchFamily="34" charset="-122"/>
+                <a:cs typeface="Arial" pitchFamily="34" charset="-120"/>
+              </a:rPr>
+              <a:t>Dīpāvalī / Dīwālī</a:t>
+            </a:r>
+            <a:pPr algn="l" indent="0" marL="0">
+              <a:lnSpc>
+                <a:spcPts val="1620"/>
+              </a:lnSpc>
+              <a:spcAft>
+                <a:spcPts val="300"/>
+              </a:spcAft>
+              <a:buNone/>
+            </a:pPr>
+            <a:r>
+              <a:rPr lang="en-US" sz="1200" dirty="0">
+                <a:solidFill>
+                  <a:srgbClr val="1C2833"/>
+                </a:solidFill>
+                <a:latin typeface="Arial" pitchFamily="34" charset="0"/>
+                <a:ea typeface="Arial" pitchFamily="34" charset="-122"/>
+                <a:cs typeface="Arial" pitchFamily="34" charset="-120"/>
+              </a:rPr>
+              <a:t> — </a:t>
+            </a:r>
+            <a:pPr algn="l" indent="0" marL="0">
+              <a:lnSpc>
+                <a:spcPts val="1620"/>
+              </a:lnSpc>
+              <a:spcAft>
+                <a:spcPts val="300"/>
+              </a:spcAft>
+              <a:buNone/>
+            </a:pPr>
+            <a:r>
+              <a:rPr lang="en-US" sz="1200" i="1" dirty="0">
+                <a:solidFill>
+                  <a:srgbClr val="1C2833"/>
+                </a:solidFill>
+                <a:latin typeface="Arial" pitchFamily="34" charset="0"/>
+                <a:ea typeface="Arial" pitchFamily="34" charset="-122"/>
+                <a:cs typeface="Arial" pitchFamily="34" charset="-120"/>
+              </a:rPr>
+              <a:t>Kārtika</a:t>
+            </a:r>
+            <a:pPr algn="l" indent="0" marL="0">
+              <a:lnSpc>
+                <a:spcPts val="1620"/>
+              </a:lnSpc>
+              <a:spcAft>
+                <a:spcPts val="300"/>
+              </a:spcAft>
+              <a:buNone/>
+            </a:pPr>
+            <a:r>
+              <a:rPr lang="en-US" sz="1200" dirty="0">
+                <a:solidFill>
+                  <a:srgbClr val="1C2833"/>
+                </a:solidFill>
+                <a:latin typeface="Arial" pitchFamily="34" charset="0"/>
+                <a:ea typeface="Arial" pitchFamily="34" charset="-122"/>
+                <a:cs typeface="Arial" pitchFamily="34" charset="-120"/>
+              </a:rPr>
+              <a:t> amāvasyā · Festival of lights</a:t>
+            </a:r>
+            <a:endParaRPr lang="en-US" sz="1200" dirty="0"/>
+          </a:p>
+          <a:p>
+            <a:pPr algn="l" marL="342900" indent="-342900">
+              <a:lnSpc>
+                <a:spcPts val="1620"/>
+              </a:lnSpc>
+              <a:spcAft>
+                <a:spcPts val="300"/>
+              </a:spcAft>
+              <a:buSzPct val="100000"/>
+              <a:buChar char="•"/>
+            </a:pPr>
+            <a:r>
+              <a:rPr lang="en-US" sz="1200" i="1" dirty="0">
+                <a:solidFill>
+                  <a:srgbClr val="1C2833"/>
+                </a:solidFill>
+                <a:latin typeface="Arial" pitchFamily="34" charset="0"/>
+                <a:ea typeface="Arial" pitchFamily="34" charset="-122"/>
+                <a:cs typeface="Arial" pitchFamily="34" charset="-120"/>
+              </a:rPr>
+              <a:t>Mahā-śivarātri</a:t>
+            </a:r>
+            <a:pPr algn="l" indent="0" marL="0">
+              <a:lnSpc>
+                <a:spcPts val="1620"/>
+              </a:lnSpc>
+              <a:spcAft>
+                <a:spcPts val="300"/>
+              </a:spcAft>
+              <a:buNone/>
+            </a:pPr>
+            <a:r>
+              <a:rPr lang="en-US" sz="1200" dirty="0">
+                <a:solidFill>
+                  <a:srgbClr val="1C2833"/>
+                </a:solidFill>
+                <a:latin typeface="Arial" pitchFamily="34" charset="0"/>
+                <a:ea typeface="Arial" pitchFamily="34" charset="-122"/>
+                <a:cs typeface="Arial" pitchFamily="34" charset="-120"/>
+              </a:rPr>
+              <a:t> — </a:t>
+            </a:r>
+            <a:pPr algn="l" indent="0" marL="0">
+              <a:lnSpc>
+                <a:spcPts val="1620"/>
+              </a:lnSpc>
+              <a:spcAft>
+                <a:spcPts val="300"/>
+              </a:spcAft>
+              <a:buNone/>
+            </a:pPr>
+            <a:r>
+              <a:rPr lang="en-US" sz="1200" i="1" dirty="0">
+                <a:solidFill>
+                  <a:srgbClr val="1C2833"/>
+                </a:solidFill>
+                <a:latin typeface="Arial" pitchFamily="34" charset="0"/>
+                <a:ea typeface="Arial" pitchFamily="34" charset="-122"/>
+                <a:cs typeface="Arial" pitchFamily="34" charset="-120"/>
+              </a:rPr>
+              <a:t>Phālguna</a:t>
+            </a:r>
+            <a:pPr algn="l" indent="0" marL="0">
+              <a:lnSpc>
+                <a:spcPts val="1620"/>
+              </a:lnSpc>
+              <a:spcAft>
+                <a:spcPts val="300"/>
+              </a:spcAft>
+              <a:buNone/>
+            </a:pPr>
+            <a:r>
+              <a:rPr lang="en-US" sz="1200" dirty="0">
+                <a:solidFill>
+                  <a:srgbClr val="1C2833"/>
+                </a:solidFill>
+                <a:latin typeface="Arial" pitchFamily="34" charset="0"/>
+                <a:ea typeface="Arial" pitchFamily="34" charset="-122"/>
+                <a:cs typeface="Arial" pitchFamily="34" charset="-120"/>
+              </a:rPr>
+              <a:t> (or Māgha) kṛṣṇa caturdaśī · Great night of Śiva</a:t>
+            </a:r>
+            <a:endParaRPr lang="en-US" sz="1200" dirty="0"/>
+          </a:p>
+          <a:p>
+            <a:pPr algn="l" marL="342900" indent="-342900">
+              <a:lnSpc>
+                <a:spcPts val="1620"/>
+              </a:lnSpc>
+              <a:spcAft>
+                <a:spcPts val="300"/>
+              </a:spcAft>
+              <a:buSzPct val="100000"/>
+              <a:buChar char="•"/>
+            </a:pPr>
+            <a:r>
+              <a:rPr lang="en-US" sz="1200" i="1" dirty="0">
+                <a:solidFill>
+                  <a:srgbClr val="1C2833"/>
+                </a:solidFill>
+                <a:latin typeface="Arial" pitchFamily="34" charset="0"/>
+                <a:ea typeface="Arial" pitchFamily="34" charset="-122"/>
+                <a:cs typeface="Arial" pitchFamily="34" charset="-120"/>
+              </a:rPr>
+              <a:t>Holī</a:t>
+            </a:r>
+            <a:pPr algn="l" indent="0" marL="0">
+              <a:lnSpc>
+                <a:spcPts val="1620"/>
+              </a:lnSpc>
+              <a:spcAft>
+                <a:spcPts val="300"/>
+              </a:spcAft>
+              <a:buNone/>
+            </a:pPr>
+            <a:r>
+              <a:rPr lang="en-US" sz="1200" dirty="0">
+                <a:solidFill>
+                  <a:srgbClr val="1C2833"/>
+                </a:solidFill>
+                <a:latin typeface="Arial" pitchFamily="34" charset="0"/>
+                <a:ea typeface="Arial" pitchFamily="34" charset="-122"/>
+                <a:cs typeface="Arial" pitchFamily="34" charset="-120"/>
+              </a:rPr>
+              <a:t> — </a:t>
+            </a:r>
+            <a:pPr algn="l" indent="0" marL="0">
+              <a:lnSpc>
+                <a:spcPts val="1620"/>
+              </a:lnSpc>
+              <a:spcAft>
+                <a:spcPts val="300"/>
+              </a:spcAft>
+              <a:buNone/>
+            </a:pPr>
+            <a:r>
+              <a:rPr lang="en-US" sz="1200" i="1" dirty="0">
+                <a:solidFill>
+                  <a:srgbClr val="1C2833"/>
+                </a:solidFill>
+                <a:latin typeface="Arial" pitchFamily="34" charset="0"/>
+                <a:ea typeface="Arial" pitchFamily="34" charset="-122"/>
+                <a:cs typeface="Arial" pitchFamily="34" charset="-120"/>
+              </a:rPr>
+              <a:t>Phālguna</a:t>
+            </a:r>
+            <a:pPr algn="l" indent="0" marL="0">
+              <a:lnSpc>
+                <a:spcPts val="1620"/>
+              </a:lnSpc>
+              <a:spcAft>
+                <a:spcPts val="300"/>
+              </a:spcAft>
+              <a:buNone/>
+            </a:pPr>
+            <a:r>
+              <a:rPr lang="en-US" sz="1200" dirty="0">
+                <a:solidFill>
+                  <a:srgbClr val="1C2833"/>
+                </a:solidFill>
+                <a:latin typeface="Arial" pitchFamily="34" charset="0"/>
+                <a:ea typeface="Arial" pitchFamily="34" charset="-122"/>
+                <a:cs typeface="Arial" pitchFamily="34" charset="-120"/>
+              </a:rPr>
+              <a:t> pūrṇimā · Festival of colours</a:t>
+            </a:r>
+            <a:endParaRPr lang="en-US" sz="1200" dirty="0"/>
+          </a:p>
+        </p:txBody>
+      </p:sp>
+      <p:sp>
+        <p:nvSpPr>
+          <p:cNvPr id="5" name="Text 3"/>
+          <p:cNvSpPr/>
+          <p:nvPr/>
+        </p:nvSpPr>
+        <p:spPr>
+          <a:xfrm>
+            <a:off x="406301" y="4434929"/>
+            <a:ext cx="8498026" cy="213271"/>
+          </a:xfrm>
+          <a:prstGeom prst="rect">
+            <a:avLst/>
+          </a:prstGeom>
+          <a:noFill/>
+          <a:ln/>
+        </p:spPr>
+        <p:txBody>
+          <a:bodyPr wrap="square" lIns="0" tIns="0" rIns="0" bIns="0" rtlCol="0" anchor="t"/>
+          <a:lstStyle/>
+          <a:p>
             <a:pPr algn="l" indent="0" marL="0">
               <a:lnSpc>
                 <a:spcPts val="1680"/>
@@ -3350,8 +4840,143 @@
                 <a:ea typeface="Arial" pitchFamily="34" charset="-122"/>
                 <a:cs typeface="Arial" pitchFamily="34" charset="-120"/>
               </a:rPr>
-              <a:t>– General reference: </a:t>
-            </a:r>
+              <a:t>Middle ·  · IKS Curriculum</a:t>
+            </a:r>
+            <a:endParaRPr lang="en-US" sz="1200" dirty="0"/>
+          </a:p>
+        </p:txBody>
+      </p:sp>
+    </p:spTree>
+  </p:cSld>
+  <p:clrMapOvr>
+    <a:masterClrMapping/>
+  </p:clrMapOvr>
+</p:sld>
+</file>
+
+<file path=ppt/slides/slide13.xml><?xml version="1.0" encoding="utf-8"?>
+<p:sld xmlns:a="http://schemas.openxmlformats.org/drawingml/2006/main" xmlns:r="http://schemas.openxmlformats.org/officeDocument/2006/relationships" xmlns:p="http://schemas.openxmlformats.org/presentationml/2006/main">
+  <p:cSld name="Slide 13">
+    <p:bg>
+      <p:bgPr>
+        <a:solidFill>
+          <a:srgbClr val="FFFFFF"/>
+        </a:solidFill>
+      </p:bgPr>
+    </p:bg>
+    <p:spTree>
+      <p:nvGrpSpPr>
+        <p:cNvPr id="1" name=""/>
+        <p:cNvGrpSpPr/>
+        <p:nvPr/>
+      </p:nvGrpSpPr>
+      <p:grpSpPr>
+        <a:xfrm>
+          <a:off x="0" y="0"/>
+          <a:ext cx="0" cy="0"/>
+          <a:chOff x="0" y="0"/>
+          <a:chExt cx="0" cy="0"/>
+        </a:xfrm>
+      </p:grpSpPr>
+      <p:sp>
+        <p:nvSpPr>
+          <p:cNvPr id="2" name="Text 0"/>
+          <p:cNvSpPr/>
+          <p:nvPr/>
+        </p:nvSpPr>
+        <p:spPr>
+          <a:xfrm>
+            <a:off x="0" y="0"/>
+            <a:ext cx="9144000" cy="101501"/>
+          </a:xfrm>
+          <a:prstGeom prst="rect">
+            <a:avLst/>
+          </a:prstGeom>
+          <a:solidFill>
+            <a:srgbClr val="277884"/>
+          </a:solidFill>
+          <a:ln/>
+        </p:spPr>
+        <p:txBody>
+          <a:bodyPr wrap="square" rtlCol="0" anchor="ctr"/>
+          <a:lstStyle/>
+          <a:p>
+            <a:pPr indent="0" marL="0">
+              <a:buNone/>
+            </a:pPr>
+            <a:endParaRPr lang="en-US" dirty="0"/>
+          </a:p>
+        </p:txBody>
+      </p:sp>
+      <p:sp>
+        <p:nvSpPr>
+          <p:cNvPr id="3" name="Text 1"/>
+          <p:cNvSpPr/>
+          <p:nvPr/>
+        </p:nvSpPr>
+        <p:spPr>
+          <a:xfrm>
+            <a:off x="406301" y="457051"/>
+            <a:ext cx="8498026" cy="274290"/>
+          </a:xfrm>
+          <a:prstGeom prst="rect">
+            <a:avLst/>
+          </a:prstGeom>
+          <a:noFill/>
+          <a:ln/>
+        </p:spPr>
+        <p:txBody>
+          <a:bodyPr wrap="square" lIns="0" tIns="0" rIns="0" bIns="0" rtlCol="0" anchor="t"/>
+          <a:lstStyle/>
+          <a:p>
+            <a:pPr algn="l" indent="0" marL="0">
+              <a:lnSpc>
+                <a:spcPts val="2160"/>
+              </a:lnSpc>
+              <a:spcBef>
+                <a:spcPts val="600"/>
+              </a:spcBef>
+              <a:spcAft>
+                <a:spcPts val="800"/>
+              </a:spcAft>
+              <a:buNone/>
+            </a:pPr>
+            <a:r>
+              <a:rPr lang="en-US" sz="1800" b="1" dirty="0">
+                <a:solidFill>
+                  <a:srgbClr val="FE4447"/>
+                </a:solidFill>
+                <a:latin typeface="Georgia" pitchFamily="34" charset="0"/>
+                <a:ea typeface="Georgia" pitchFamily="34" charset="-122"/>
+                <a:cs typeface="Georgia" pitchFamily="34" charset="-120"/>
+              </a:rPr>
+              <a:t>Core (20 min) (cont.)</a:t>
+            </a:r>
+            <a:endParaRPr lang="en-US" sz="1800" dirty="0"/>
+          </a:p>
+        </p:txBody>
+      </p:sp>
+      <p:sp>
+        <p:nvSpPr>
+          <p:cNvPr id="4" name="Text 2"/>
+          <p:cNvSpPr/>
+          <p:nvPr/>
+        </p:nvSpPr>
+        <p:spPr>
+          <a:xfrm>
+            <a:off x="406301" y="870942"/>
+            <a:ext cx="8498026" cy="213271"/>
+          </a:xfrm>
+          <a:prstGeom prst="rect">
+            <a:avLst/>
+          </a:prstGeom>
+          <a:noFill/>
+          <a:ln/>
+        </p:spPr>
+        <p:txBody>
+          <a:bodyPr wrap="square" lIns="0" tIns="0" rIns="0" bIns="0" rtlCol="0" anchor="t"/>
+          <a:lstStyle/>
+          <a:p>
             <a:pPr algn="l" indent="0" marL="0">
               <a:lnSpc>
                 <a:spcPts val="1680"/>
@@ -3365,6 +4990,29 @@
               <a:buNone/>
             </a:pPr>
             <a:r>
+              <a:rPr lang="en-US" sz="1200" dirty="0">
+                <a:solidFill>
+                  <a:srgbClr val="1C2833"/>
+                </a:solidFill>
+                <a:latin typeface="Arial" pitchFamily="34" charset="0"/>
+                <a:ea typeface="Arial" pitchFamily="34" charset="-122"/>
+                <a:cs typeface="Arial" pitchFamily="34" charset="-120"/>
+              </a:rPr>
+              <a:t>Every festival here has a precise tithi-and-month coordinate. That's the whole point of the </a:t>
+            </a:r>
+            <a:pPr algn="l" indent="0" marL="0">
+              <a:lnSpc>
+                <a:spcPts val="1680"/>
+              </a:lnSpc>
+              <a:spcBef>
+                <a:spcPts val="300"/>
+              </a:spcBef>
+              <a:spcAft>
+                <a:spcPts val="300"/>
+              </a:spcAft>
+              <a:buNone/>
+            </a:pPr>
+            <a:r>
               <a:rPr lang="en-US" sz="1200" i="1" dirty="0">
                 <a:solidFill>
                   <a:srgbClr val="1C2833"/>
@@ -3396,8 +5044,33 @@
                 <a:ea typeface="Arial" pitchFamily="34" charset="-122"/>
                 <a:cs typeface="Arial" pitchFamily="34" charset="-120"/>
               </a:rPr>
-              <a:t> sources (named in class). Paraphrase from </a:t>
-            </a:r>
+              <a:t> system.</a:t>
+            </a:r>
+            <a:endParaRPr lang="en-US" sz="1200" dirty="0"/>
+          </a:p>
+        </p:txBody>
+      </p:sp>
+      <p:sp>
+        <p:nvSpPr>
+          <p:cNvPr id="5" name="Text 3"/>
+          <p:cNvSpPr/>
+          <p:nvPr/>
+        </p:nvSpPr>
+        <p:spPr>
+          <a:xfrm>
+            <a:off x="406301" y="4434929"/>
+            <a:ext cx="8498026" cy="213271"/>
+          </a:xfrm>
+          <a:prstGeom prst="rect">
+            <a:avLst/>
+          </a:prstGeom>
+          <a:noFill/>
+          <a:ln/>
+        </p:spPr>
+        <p:txBody>
+          <a:bodyPr wrap="square" lIns="0" tIns="0" rIns="0" bIns="0" rtlCol="0" anchor="t"/>
+          <a:lstStyle/>
+          <a:p>
             <a:pPr algn="l" indent="0" marL="0">
               <a:lnSpc>
                 <a:spcPts val="1680"/>
@@ -3411,6 +5084,171 @@
               <a:buNone/>
             </a:pPr>
             <a:r>
+              <a:rPr lang="en-US" sz="1200" dirty="0">
+                <a:solidFill>
+                  <a:srgbClr val="1C2833"/>
+                </a:solidFill>
+                <a:latin typeface="Arial" pitchFamily="34" charset="0"/>
+                <a:ea typeface="Arial" pitchFamily="34" charset="-122"/>
+                <a:cs typeface="Arial" pitchFamily="34" charset="-120"/>
+              </a:rPr>
+              <a:t>Middle ·  · IKS Curriculum</a:t>
+            </a:r>
+            <a:endParaRPr lang="en-US" sz="1200" dirty="0"/>
+          </a:p>
+        </p:txBody>
+      </p:sp>
+    </p:spTree>
+  </p:cSld>
+  <p:clrMapOvr>
+    <a:masterClrMapping/>
+  </p:clrMapOvr>
+</p:sld>
+</file>
+
+<file path=ppt/slides/slide14.xml><?xml version="1.0" encoding="utf-8"?>
+<p:sld xmlns:a="http://schemas.openxmlformats.org/drawingml/2006/main" xmlns:r="http://schemas.openxmlformats.org/officeDocument/2006/relationships" xmlns:p="http://schemas.openxmlformats.org/presentationml/2006/main">
+  <p:cSld name="Slide 14">
+    <p:bg>
+      <p:bgPr>
+        <a:solidFill>
+          <a:srgbClr val="FFFFFF"/>
+        </a:solidFill>
+      </p:bgPr>
+    </p:bg>
+    <p:spTree>
+      <p:nvGrpSpPr>
+        <p:cNvPr id="1" name=""/>
+        <p:cNvGrpSpPr/>
+        <p:nvPr/>
+      </p:nvGrpSpPr>
+      <p:grpSpPr>
+        <a:xfrm>
+          <a:off x="0" y="0"/>
+          <a:ext cx="0" cy="0"/>
+          <a:chOff x="0" y="0"/>
+          <a:chExt cx="0" cy="0"/>
+        </a:xfrm>
+      </p:grpSpPr>
+      <p:sp>
+        <p:nvSpPr>
+          <p:cNvPr id="2" name="Text 0"/>
+          <p:cNvSpPr/>
+          <p:nvPr/>
+        </p:nvSpPr>
+        <p:spPr>
+          <a:xfrm>
+            <a:off x="0" y="0"/>
+            <a:ext cx="9144000" cy="101501"/>
+          </a:xfrm>
+          <a:prstGeom prst="rect">
+            <a:avLst/>
+          </a:prstGeom>
+          <a:solidFill>
+            <a:srgbClr val="277884"/>
+          </a:solidFill>
+          <a:ln/>
+        </p:spPr>
+        <p:txBody>
+          <a:bodyPr wrap="square" rtlCol="0" anchor="ctr"/>
+          <a:lstStyle/>
+          <a:p>
+            <a:pPr indent="0" marL="0">
+              <a:buNone/>
+            </a:pPr>
+            <a:endParaRPr lang="en-US" dirty="0"/>
+          </a:p>
+        </p:txBody>
+      </p:sp>
+      <p:sp>
+        <p:nvSpPr>
+          <p:cNvPr id="3" name="Text 1"/>
+          <p:cNvSpPr/>
+          <p:nvPr/>
+        </p:nvSpPr>
+        <p:spPr>
+          <a:xfrm>
+            <a:off x="406301" y="457051"/>
+            <a:ext cx="8498026" cy="274290"/>
+          </a:xfrm>
+          <a:prstGeom prst="rect">
+            <a:avLst/>
+          </a:prstGeom>
+          <a:noFill/>
+          <a:ln/>
+        </p:spPr>
+        <p:txBody>
+          <a:bodyPr wrap="square" lIns="0" tIns="0" rIns="0" bIns="0" rtlCol="0" anchor="t"/>
+          <a:lstStyle/>
+          <a:p>
+            <a:pPr algn="l" indent="0" marL="0">
+              <a:lnSpc>
+                <a:spcPts val="2160"/>
+              </a:lnSpc>
+              <a:spcBef>
+                <a:spcPts val="600"/>
+              </a:spcBef>
+              <a:spcAft>
+                <a:spcPts val="800"/>
+              </a:spcAft>
+              <a:buNone/>
+            </a:pPr>
+            <a:r>
+              <a:rPr lang="en-US" sz="1800" b="1" dirty="0">
+                <a:solidFill>
+                  <a:srgbClr val="FE4447"/>
+                </a:solidFill>
+                <a:latin typeface="Georgia" pitchFamily="34" charset="0"/>
+                <a:ea typeface="Georgia" pitchFamily="34" charset="-122"/>
+                <a:cs typeface="Georgia" pitchFamily="34" charset="-120"/>
+              </a:rPr>
+              <a:t>Core (20 min) (cont.)</a:t>
+            </a:r>
+            <a:endParaRPr lang="en-US" sz="1800" dirty="0"/>
+          </a:p>
+        </p:txBody>
+      </p:sp>
+      <p:sp>
+        <p:nvSpPr>
+          <p:cNvPr id="4" name="Text 2"/>
+          <p:cNvSpPr/>
+          <p:nvPr/>
+        </p:nvSpPr>
+        <p:spPr>
+          <a:xfrm>
+            <a:off x="634901" y="883593"/>
+            <a:ext cx="8102798" cy="898922"/>
+          </a:xfrm>
+          <a:prstGeom prst="rect">
+            <a:avLst/>
+          </a:prstGeom>
+          <a:noFill/>
+          <a:ln/>
+        </p:spPr>
+        <p:txBody>
+          <a:bodyPr wrap="square" lIns="0" tIns="0" rIns="0" bIns="0" rtlCol="0" anchor="t"/>
+          <a:lstStyle/>
+          <a:p>
+            <a:pPr algn="l" marL="342900" indent="-342900">
+              <a:lnSpc>
+                <a:spcPts val="1620"/>
+              </a:lnSpc>
+              <a:spcAft>
+                <a:spcPts val="300"/>
+              </a:spcAft>
+              <a:buSzPct val="100000"/>
+              <a:buChar char="•"/>
+            </a:pPr>
+            <a:pPr algn="l" indent="0" marL="0">
+              <a:lnSpc>
+                <a:spcPts val="1620"/>
+              </a:lnSpc>
+              <a:spcAft>
+                <a:spcPts val="300"/>
+              </a:spcAft>
+              <a:buNone/>
+            </a:pPr>
+            <a:r>
               <a:rPr lang="en-US" sz="1200" i="1" dirty="0">
                 <a:solidFill>
                   <a:srgbClr val="1C2833"/>
@@ -3419,8 +5257,153 @@
                 <a:ea typeface="Arial" pitchFamily="34" charset="-122"/>
                 <a:cs typeface="Arial" pitchFamily="34" charset="-120"/>
               </a:rPr>
-              <a:t>Sūrya-siddhānta</a:t>
-            </a:r>
+              <a:t>The intercalation puzzle —</a:t>
+            </a:r>
+            <a:pPr algn="l" indent="0" marL="0">
+              <a:lnSpc>
+                <a:spcPts val="1620"/>
+              </a:lnSpc>
+              <a:spcAft>
+                <a:spcPts val="300"/>
+              </a:spcAft>
+              <a:buNone/>
+            </a:pPr>
+            <a:r>
+              <a:rPr lang="en-US" sz="1200" dirty="0">
+                <a:solidFill>
+                  <a:srgbClr val="1C2833"/>
+                </a:solidFill>
+                <a:latin typeface="Arial" pitchFamily="34" charset="0"/>
+                <a:ea typeface="Arial" pitchFamily="34" charset="-122"/>
+                <a:cs typeface="Arial" pitchFamily="34" charset="-120"/>
+              </a:rPr>
+              <a:t>adhika māsa</a:t>
+            </a:r>
+            <a:pPr algn="l" indent="0" marL="0">
+              <a:lnSpc>
+                <a:spcPts val="1620"/>
+              </a:lnSpc>
+              <a:spcAft>
+                <a:spcPts val="300"/>
+              </a:spcAft>
+              <a:buNone/>
+            </a:pPr>
+            <a:r>
+              <a:rPr lang="en-US" sz="1200" i="1" dirty="0">
+                <a:solidFill>
+                  <a:srgbClr val="1C2833"/>
+                </a:solidFill>
+                <a:latin typeface="Arial" pitchFamily="34" charset="0"/>
+                <a:ea typeface="Arial" pitchFamily="34" charset="-122"/>
+                <a:cs typeface="Arial" pitchFamily="34" charset="-120"/>
+              </a:rPr>
+              <a:t>.</a:t>
+            </a:r>
+            <a:pPr algn="l" indent="0" marL="0">
+              <a:lnSpc>
+                <a:spcPts val="1620"/>
+              </a:lnSpc>
+              <a:spcAft>
+                <a:spcPts val="300"/>
+              </a:spcAft>
+              <a:buNone/>
+            </a:pPr>
+            <a:r>
+              <a:rPr lang="en-US" sz="1200" i="1" dirty="0">
+                <a:solidFill>
+                  <a:srgbClr val="1C2833"/>
+                </a:solidFill>
+                <a:latin typeface="Arial" pitchFamily="34" charset="0"/>
+                <a:ea typeface="Arial" pitchFamily="34" charset="-122"/>
+                <a:cs typeface="Arial" pitchFamily="34" charset="-120"/>
+              </a:rPr>
+              <a:t> 12 lunar months × 29.53 days = 354.36 days. The solar year is 365.24 days. So the lunar calendar drifts behind by ~11 days a year. After 3 years that's 33 days — about a whole month. To re-align, the Indian system inserts an</a:t>
+            </a:r>
+            <a:pPr algn="l" indent="0" marL="0">
+              <a:lnSpc>
+                <a:spcPts val="1620"/>
+              </a:lnSpc>
+              <a:spcAft>
+                <a:spcPts val="300"/>
+              </a:spcAft>
+              <a:buNone/>
+            </a:pPr>
+            <a:r>
+              <a:rPr lang="en-US" sz="1200" dirty="0">
+                <a:solidFill>
+                  <a:srgbClr val="1C2833"/>
+                </a:solidFill>
+                <a:latin typeface="Arial" pitchFamily="34" charset="0"/>
+                <a:ea typeface="Arial" pitchFamily="34" charset="-122"/>
+                <a:cs typeface="Arial" pitchFamily="34" charset="-120"/>
+              </a:rPr>
+              <a:t>adhika māsa* ("extra month") roughly every 32.5 months. This is what makes the Indian calendar </a:t>
+            </a:r>
+            <a:pPr algn="l" indent="0" marL="0">
+              <a:lnSpc>
+                <a:spcPts val="1620"/>
+              </a:lnSpc>
+              <a:spcAft>
+                <a:spcPts val="300"/>
+              </a:spcAft>
+              <a:buNone/>
+            </a:pPr>
+            <a:r>
+              <a:rPr lang="en-US" sz="1200" b="1" dirty="0">
+                <a:solidFill>
+                  <a:srgbClr val="1C2833"/>
+                </a:solidFill>
+                <a:latin typeface="Arial" pitchFamily="34" charset="0"/>
+                <a:ea typeface="Arial" pitchFamily="34" charset="-122"/>
+                <a:cs typeface="Arial" pitchFamily="34" charset="-120"/>
+              </a:rPr>
+              <a:t>lunisolar</a:t>
+            </a:r>
+            <a:pPr algn="l" indent="0" marL="0">
+              <a:lnSpc>
+                <a:spcPts val="1620"/>
+              </a:lnSpc>
+              <a:spcAft>
+                <a:spcPts val="300"/>
+              </a:spcAft>
+              <a:buNone/>
+            </a:pPr>
+            <a:r>
+              <a:rPr lang="en-US" sz="1200" dirty="0">
+                <a:solidFill>
+                  <a:srgbClr val="1C2833"/>
+                </a:solidFill>
+                <a:latin typeface="Arial" pitchFamily="34" charset="0"/>
+                <a:ea typeface="Arial" pitchFamily="34" charset="-122"/>
+                <a:cs typeface="Arial" pitchFamily="34" charset="-120"/>
+              </a:rPr>
+              <a:t> rather than purely lunar. (More on this in the cross-cultural lesson, Day 9.)</a:t>
+            </a:r>
+            <a:endParaRPr lang="en-US" sz="1200" dirty="0"/>
+          </a:p>
+        </p:txBody>
+      </p:sp>
+      <p:sp>
+        <p:nvSpPr>
+          <p:cNvPr id="5" name="Text 3"/>
+          <p:cNvSpPr/>
+          <p:nvPr/>
+        </p:nvSpPr>
+        <p:spPr>
+          <a:xfrm>
+            <a:off x="406301" y="4434929"/>
+            <a:ext cx="8498026" cy="213271"/>
+          </a:xfrm>
+          <a:prstGeom prst="rect">
+            <a:avLst/>
+          </a:prstGeom>
+          <a:noFill/>
+          <a:ln/>
+        </p:spPr>
+        <p:txBody>
+          <a:bodyPr wrap="square" lIns="0" tIns="0" rIns="0" bIns="0" rtlCol="0" anchor="t"/>
+          <a:lstStyle/>
+          <a:p>
             <a:pPr algn="l" indent="0" marL="0">
               <a:lnSpc>
                 <a:spcPts val="1680"/>
@@ -3442,8 +5425,143 @@
                 <a:ea typeface="Arial" pitchFamily="34" charset="-122"/>
                 <a:cs typeface="Arial" pitchFamily="34" charset="-120"/>
               </a:rPr>
-              <a:t>, chapter 14 (computation of </a:t>
-            </a:r>
+              <a:t>Middle ·  · IKS Curriculum</a:t>
+            </a:r>
+            <a:endParaRPr lang="en-US" sz="1200" dirty="0"/>
+          </a:p>
+        </p:txBody>
+      </p:sp>
+    </p:spTree>
+  </p:cSld>
+  <p:clrMapOvr>
+    <a:masterClrMapping/>
+  </p:clrMapOvr>
+</p:sld>
+</file>
+
+<file path=ppt/slides/slide15.xml><?xml version="1.0" encoding="utf-8"?>
+<p:sld xmlns:a="http://schemas.openxmlformats.org/drawingml/2006/main" xmlns:r="http://schemas.openxmlformats.org/officeDocument/2006/relationships" xmlns:p="http://schemas.openxmlformats.org/presentationml/2006/main">
+  <p:cSld name="Slide 15">
+    <p:bg>
+      <p:bgPr>
+        <a:solidFill>
+          <a:srgbClr val="FFFFFF"/>
+        </a:solidFill>
+      </p:bgPr>
+    </p:bg>
+    <p:spTree>
+      <p:nvGrpSpPr>
+        <p:cNvPr id="1" name=""/>
+        <p:cNvGrpSpPr/>
+        <p:nvPr/>
+      </p:nvGrpSpPr>
+      <p:grpSpPr>
+        <a:xfrm>
+          <a:off x="0" y="0"/>
+          <a:ext cx="0" cy="0"/>
+          <a:chOff x="0" y="0"/>
+          <a:chExt cx="0" cy="0"/>
+        </a:xfrm>
+      </p:grpSpPr>
+      <p:sp>
+        <p:nvSpPr>
+          <p:cNvPr id="2" name="Text 0"/>
+          <p:cNvSpPr/>
+          <p:nvPr/>
+        </p:nvSpPr>
+        <p:spPr>
+          <a:xfrm>
+            <a:off x="0" y="0"/>
+            <a:ext cx="9144000" cy="101501"/>
+          </a:xfrm>
+          <a:prstGeom prst="rect">
+            <a:avLst/>
+          </a:prstGeom>
+          <a:solidFill>
+            <a:srgbClr val="277884"/>
+          </a:solidFill>
+          <a:ln/>
+        </p:spPr>
+        <p:txBody>
+          <a:bodyPr wrap="square" rtlCol="0" anchor="ctr"/>
+          <a:lstStyle/>
+          <a:p>
+            <a:pPr indent="0" marL="0">
+              <a:buNone/>
+            </a:pPr>
+            <a:endParaRPr lang="en-US" dirty="0"/>
+          </a:p>
+        </p:txBody>
+      </p:sp>
+      <p:sp>
+        <p:nvSpPr>
+          <p:cNvPr id="3" name="Text 1"/>
+          <p:cNvSpPr/>
+          <p:nvPr/>
+        </p:nvSpPr>
+        <p:spPr>
+          <a:xfrm>
+            <a:off x="406301" y="457051"/>
+            <a:ext cx="8498026" cy="274290"/>
+          </a:xfrm>
+          <a:prstGeom prst="rect">
+            <a:avLst/>
+          </a:prstGeom>
+          <a:noFill/>
+          <a:ln/>
+        </p:spPr>
+        <p:txBody>
+          <a:bodyPr wrap="square" lIns="0" tIns="0" rIns="0" bIns="0" rtlCol="0" anchor="t"/>
+          <a:lstStyle/>
+          <a:p>
+            <a:pPr algn="l" indent="0" marL="0">
+              <a:lnSpc>
+                <a:spcPts val="2160"/>
+              </a:lnSpc>
+              <a:spcBef>
+                <a:spcPts val="600"/>
+              </a:spcBef>
+              <a:spcAft>
+                <a:spcPts val="800"/>
+              </a:spcAft>
+              <a:buNone/>
+            </a:pPr>
+            <a:r>
+              <a:rPr lang="en-US" sz="1800" b="1" dirty="0">
+                <a:solidFill>
+                  <a:srgbClr val="FE4447"/>
+                </a:solidFill>
+                <a:latin typeface="Georgia" pitchFamily="34" charset="0"/>
+                <a:ea typeface="Georgia" pitchFamily="34" charset="-122"/>
+                <a:cs typeface="Georgia" pitchFamily="34" charset="-120"/>
+              </a:rPr>
+              <a:t>Activity (15 min) — Festival mapping + formative quiz</a:t>
+            </a:r>
+            <a:endParaRPr lang="en-US" sz="1800" dirty="0"/>
+          </a:p>
+        </p:txBody>
+      </p:sp>
+      <p:sp>
+        <p:nvSpPr>
+          <p:cNvPr id="4" name="Text 2"/>
+          <p:cNvSpPr/>
+          <p:nvPr/>
+        </p:nvSpPr>
+        <p:spPr>
+          <a:xfrm>
+            <a:off x="406301" y="870942"/>
+            <a:ext cx="8498026" cy="213271"/>
+          </a:xfrm>
+          <a:prstGeom prst="rect">
+            <a:avLst/>
+          </a:prstGeom>
+          <a:noFill/>
+          <a:ln/>
+        </p:spPr>
+        <p:txBody>
+          <a:bodyPr wrap="square" lIns="0" tIns="0" rIns="0" bIns="0" rtlCol="0" anchor="t"/>
+          <a:lstStyle/>
+          <a:p>
             <a:pPr algn="l" indent="0" marL="0">
               <a:lnSpc>
                 <a:spcPts val="1680"/>
@@ -3457,15 +5575,15 @@
               <a:buNone/>
             </a:pPr>
             <a:r>
-              <a:rPr lang="en-US" sz="1200" i="1" dirty="0">
-                <a:solidFill>
-                  <a:srgbClr val="1C2833"/>
-                </a:solidFill>
-                <a:latin typeface="Arial" pitchFamily="34" charset="0"/>
-                <a:ea typeface="Arial" pitchFamily="34" charset="-122"/>
-                <a:cs typeface="Arial" pitchFamily="34" charset="-120"/>
-              </a:rPr>
-              <a:t>adhika māsa</a:t>
+              <a:rPr lang="en-US" sz="1200" b="1" dirty="0">
+                <a:solidFill>
+                  <a:srgbClr val="1C2833"/>
+                </a:solidFill>
+                <a:latin typeface="Arial" pitchFamily="34" charset="0"/>
+                <a:ea typeface="Arial" pitchFamily="34" charset="-122"/>
+                <a:cs typeface="Arial" pitchFamily="34" charset="-120"/>
+              </a:rPr>
+              <a:t>Part A (8 min) — pair work.</a:t>
             </a:r>
             <a:pPr algn="l" indent="0" marL="0">
               <a:lnSpc>
@@ -3488,7 +5606,1663 @@
                 <a:ea typeface="Arial" pitchFamily="34" charset="-122"/>
                 <a:cs typeface="Arial" pitchFamily="34" charset="-120"/>
               </a:rPr>
-              <a:t>) — cited by text and chapter name only.</a:t>
+              <a:t> Each pair gets the printed festival list (about 12 festivals). Their job:</a:t>
+            </a:r>
+            <a:endParaRPr lang="en-US" sz="1200" dirty="0"/>
+          </a:p>
+        </p:txBody>
+      </p:sp>
+      <p:sp>
+        <p:nvSpPr>
+          <p:cNvPr id="5" name="Text 3"/>
+          <p:cNvSpPr/>
+          <p:nvPr/>
+        </p:nvSpPr>
+        <p:spPr>
+          <a:xfrm>
+            <a:off x="634901" y="1173063"/>
+            <a:ext cx="8102798" cy="769441"/>
+          </a:xfrm>
+          <a:prstGeom prst="rect">
+            <a:avLst/>
+          </a:prstGeom>
+          <a:noFill/>
+          <a:ln/>
+        </p:spPr>
+        <p:txBody>
+          <a:bodyPr wrap="square" lIns="0" tIns="0" rIns="0" bIns="0" rtlCol="0" anchor="t"/>
+          <a:lstStyle/>
+          <a:p>
+            <a:pPr algn="l" marL="342900" indent="-342900">
+              <a:lnSpc>
+                <a:spcPts val="1620"/>
+              </a:lnSpc>
+              <a:spcAft>
+                <a:spcPts val="300"/>
+              </a:spcAft>
+              <a:buSzPct val="100000"/>
+              <a:buChar char="•"/>
+            </a:pPr>
+            <a:r>
+              <a:rPr lang="en-US" sz="1200" dirty="0">
+                <a:solidFill>
+                  <a:srgbClr val="1C2833"/>
+                </a:solidFill>
+                <a:latin typeface="Arial" pitchFamily="34" charset="0"/>
+                <a:ea typeface="Arial" pitchFamily="34" charset="-122"/>
+                <a:cs typeface="Arial" pitchFamily="34" charset="-120"/>
+              </a:rPr>
+              <a:t>Mark which lunar month each festival falls in.</a:t>
+            </a:r>
+            <a:endParaRPr lang="en-US" sz="1200" dirty="0"/>
+          </a:p>
+          <a:p>
+            <a:pPr algn="l" marL="342900" indent="-342900">
+              <a:lnSpc>
+                <a:spcPts val="1620"/>
+              </a:lnSpc>
+              <a:spcAft>
+                <a:spcPts val="300"/>
+              </a:spcAft>
+              <a:buSzPct val="100000"/>
+              <a:buChar char="•"/>
+            </a:pPr>
+            <a:r>
+              <a:rPr lang="en-US" sz="1200" dirty="0">
+                <a:solidFill>
+                  <a:srgbClr val="1C2833"/>
+                </a:solidFill>
+                <a:latin typeface="Arial" pitchFamily="34" charset="0"/>
+                <a:ea typeface="Arial" pitchFamily="34" charset="-122"/>
+                <a:cs typeface="Arial" pitchFamily="34" charset="-120"/>
+              </a:rPr>
+              <a:t>Identify the tithi and pakṣa.</a:t>
+            </a:r>
+            <a:endParaRPr lang="en-US" sz="1200" dirty="0"/>
+          </a:p>
+          <a:p>
+            <a:pPr algn="l" marL="342900" indent="-342900">
+              <a:lnSpc>
+                <a:spcPts val="1620"/>
+              </a:lnSpc>
+              <a:spcAft>
+                <a:spcPts val="300"/>
+              </a:spcAft>
+              <a:buSzPct val="100000"/>
+              <a:buChar char="•"/>
+            </a:pPr>
+            <a:r>
+              <a:rPr lang="en-US" sz="1200" dirty="0">
+                <a:solidFill>
+                  <a:srgbClr val="1C2833"/>
+                </a:solidFill>
+                <a:latin typeface="Arial" pitchFamily="34" charset="0"/>
+                <a:ea typeface="Arial" pitchFamily="34" charset="-122"/>
+                <a:cs typeface="Arial" pitchFamily="34" charset="-120"/>
+              </a:rPr>
+              <a:t>Find ONE festival that no one in the pair had heard of before. Write its month + pakṣa + tithi.</a:t>
+            </a:r>
+            <a:endParaRPr lang="en-US" sz="1200" dirty="0"/>
+          </a:p>
+        </p:txBody>
+      </p:sp>
+      <p:sp>
+        <p:nvSpPr>
+          <p:cNvPr id="6" name="Text 4"/>
+          <p:cNvSpPr/>
+          <p:nvPr/>
+        </p:nvSpPr>
+        <p:spPr>
+          <a:xfrm>
+            <a:off x="406301" y="4434929"/>
+            <a:ext cx="8498026" cy="213271"/>
+          </a:xfrm>
+          <a:prstGeom prst="rect">
+            <a:avLst/>
+          </a:prstGeom>
+          <a:noFill/>
+          <a:ln/>
+        </p:spPr>
+        <p:txBody>
+          <a:bodyPr wrap="square" lIns="0" tIns="0" rIns="0" bIns="0" rtlCol="0" anchor="t"/>
+          <a:lstStyle/>
+          <a:p>
+            <a:pPr algn="l" indent="0" marL="0">
+              <a:lnSpc>
+                <a:spcPts val="1680"/>
+              </a:lnSpc>
+              <a:spcBef>
+                <a:spcPts val="300"/>
+              </a:spcBef>
+              <a:spcAft>
+                <a:spcPts val="300"/>
+              </a:spcAft>
+              <a:buNone/>
+            </a:pPr>
+            <a:r>
+              <a:rPr lang="en-US" sz="1200" dirty="0">
+                <a:solidFill>
+                  <a:srgbClr val="1C2833"/>
+                </a:solidFill>
+                <a:latin typeface="Arial" pitchFamily="34" charset="0"/>
+                <a:ea typeface="Arial" pitchFamily="34" charset="-122"/>
+                <a:cs typeface="Arial" pitchFamily="34" charset="-120"/>
+              </a:rPr>
+              <a:t>Middle ·  · IKS Curriculum</a:t>
+            </a:r>
+            <a:endParaRPr lang="en-US" sz="1200" dirty="0"/>
+          </a:p>
+        </p:txBody>
+      </p:sp>
+    </p:spTree>
+  </p:cSld>
+  <p:clrMapOvr>
+    <a:masterClrMapping/>
+  </p:clrMapOvr>
+</p:sld>
+</file>
+
+<file path=ppt/slides/slide16.xml><?xml version="1.0" encoding="utf-8"?>
+<p:sld xmlns:a="http://schemas.openxmlformats.org/drawingml/2006/main" xmlns:r="http://schemas.openxmlformats.org/officeDocument/2006/relationships" xmlns:p="http://schemas.openxmlformats.org/presentationml/2006/main">
+  <p:cSld name="Slide 16">
+    <p:bg>
+      <p:bgPr>
+        <a:solidFill>
+          <a:srgbClr val="FFFFFF"/>
+        </a:solidFill>
+      </p:bgPr>
+    </p:bg>
+    <p:spTree>
+      <p:nvGrpSpPr>
+        <p:cNvPr id="1" name=""/>
+        <p:cNvGrpSpPr/>
+        <p:nvPr/>
+      </p:nvGrpSpPr>
+      <p:grpSpPr>
+        <a:xfrm>
+          <a:off x="0" y="0"/>
+          <a:ext cx="0" cy="0"/>
+          <a:chOff x="0" y="0"/>
+          <a:chExt cx="0" cy="0"/>
+        </a:xfrm>
+      </p:grpSpPr>
+      <p:sp>
+        <p:nvSpPr>
+          <p:cNvPr id="2" name="Text 0"/>
+          <p:cNvSpPr/>
+          <p:nvPr/>
+        </p:nvSpPr>
+        <p:spPr>
+          <a:xfrm>
+            <a:off x="0" y="0"/>
+            <a:ext cx="9144000" cy="101501"/>
+          </a:xfrm>
+          <a:prstGeom prst="rect">
+            <a:avLst/>
+          </a:prstGeom>
+          <a:solidFill>
+            <a:srgbClr val="277884"/>
+          </a:solidFill>
+          <a:ln/>
+        </p:spPr>
+        <p:txBody>
+          <a:bodyPr wrap="square" rtlCol="0" anchor="ctr"/>
+          <a:lstStyle/>
+          <a:p>
+            <a:pPr indent="0" marL="0">
+              <a:buNone/>
+            </a:pPr>
+            <a:endParaRPr lang="en-US" dirty="0"/>
+          </a:p>
+        </p:txBody>
+      </p:sp>
+      <p:sp>
+        <p:nvSpPr>
+          <p:cNvPr id="3" name="Text 1"/>
+          <p:cNvSpPr/>
+          <p:nvPr/>
+        </p:nvSpPr>
+        <p:spPr>
+          <a:xfrm>
+            <a:off x="406301" y="457051"/>
+            <a:ext cx="8498026" cy="274290"/>
+          </a:xfrm>
+          <a:prstGeom prst="rect">
+            <a:avLst/>
+          </a:prstGeom>
+          <a:noFill/>
+          <a:ln/>
+        </p:spPr>
+        <p:txBody>
+          <a:bodyPr wrap="square" lIns="0" tIns="0" rIns="0" bIns="0" rtlCol="0" anchor="t"/>
+          <a:lstStyle/>
+          <a:p>
+            <a:pPr algn="l" indent="0" marL="0">
+              <a:lnSpc>
+                <a:spcPts val="2160"/>
+              </a:lnSpc>
+              <a:spcBef>
+                <a:spcPts val="600"/>
+              </a:spcBef>
+              <a:spcAft>
+                <a:spcPts val="800"/>
+              </a:spcAft>
+              <a:buNone/>
+            </a:pPr>
+            <a:r>
+              <a:rPr lang="en-US" sz="1800" b="1" dirty="0">
+                <a:solidFill>
+                  <a:srgbClr val="FE4447"/>
+                </a:solidFill>
+                <a:latin typeface="Georgia" pitchFamily="34" charset="0"/>
+                <a:ea typeface="Georgia" pitchFamily="34" charset="-122"/>
+                <a:cs typeface="Georgia" pitchFamily="34" charset="-120"/>
+              </a:rPr>
+              <a:t>Activity (15 min) — Festival mapping + formative quiz (cont.)</a:t>
+            </a:r>
+            <a:endParaRPr lang="en-US" sz="1800" dirty="0"/>
+          </a:p>
+        </p:txBody>
+      </p:sp>
+      <p:sp>
+        <p:nvSpPr>
+          <p:cNvPr id="4" name="Text 2"/>
+          <p:cNvSpPr/>
+          <p:nvPr/>
+        </p:nvSpPr>
+        <p:spPr>
+          <a:xfrm>
+            <a:off x="406301" y="870942"/>
+            <a:ext cx="8498026" cy="222796"/>
+          </a:xfrm>
+          <a:prstGeom prst="rect">
+            <a:avLst/>
+          </a:prstGeom>
+          <a:noFill/>
+          <a:ln/>
+        </p:spPr>
+        <p:txBody>
+          <a:bodyPr wrap="square" lIns="0" tIns="0" rIns="0" bIns="0" rtlCol="0" anchor="t"/>
+          <a:lstStyle/>
+          <a:p>
+            <a:pPr algn="l" indent="0" marL="0">
+              <a:lnSpc>
+                <a:spcPts val="1680"/>
+              </a:lnSpc>
+              <a:spcBef>
+                <a:spcPts val="300"/>
+              </a:spcBef>
+              <a:spcAft>
+                <a:spcPts val="300"/>
+              </a:spcAft>
+              <a:buNone/>
+            </a:pPr>
+            <a:r>
+              <a:rPr lang="en-US" sz="1200" b="1" dirty="0">
+                <a:solidFill>
+                  <a:srgbClr val="1C2833"/>
+                </a:solidFill>
+                <a:latin typeface="Arial" pitchFamily="34" charset="0"/>
+                <a:ea typeface="Arial" pitchFamily="34" charset="-122"/>
+                <a:cs typeface="Arial" pitchFamily="34" charset="-120"/>
+              </a:rPr>
+              <a:t>Part B (7 min) — formative quiz</a:t>
+            </a:r>
+            <a:pPr algn="l" indent="0" marL="0">
+              <a:lnSpc>
+                <a:spcPts val="1680"/>
+              </a:lnSpc>
+              <a:spcBef>
+                <a:spcPts val="300"/>
+              </a:spcBef>
+              <a:spcAft>
+                <a:spcPts val="300"/>
+              </a:spcAft>
+              <a:buNone/>
+            </a:pPr>
+            <a:r>
+              <a:rPr lang="en-US" sz="1200" dirty="0">
+                <a:solidFill>
+                  <a:srgbClr val="1C2833"/>
+                </a:solidFill>
+                <a:latin typeface="Arial" pitchFamily="34" charset="0"/>
+                <a:ea typeface="Arial" pitchFamily="34" charset="-122"/>
+                <a:cs typeface="Arial" pitchFamily="34" charset="-120"/>
+              </a:rPr>
+              <a:t>, see </a:t>
+            </a:r>
+            <a:pPr algn="l" indent="0" marL="0">
+              <a:lnSpc>
+                <a:spcPts val="1680"/>
+              </a:lnSpc>
+              <a:spcBef>
+                <a:spcPts val="300"/>
+              </a:spcBef>
+              <a:spcAft>
+                <a:spcPts val="300"/>
+              </a:spcAft>
+              <a:buNone/>
+            </a:pPr>
+            <a:r>
+              <a:rPr lang="en-US" sz="1200" dirty="0">
+                <a:solidFill>
+                  <a:srgbClr val="1C2833"/>
+                </a:solidFill>
+                <a:latin typeface="Arial" pitchFamily="34" charset="0"/>
+                <a:ea typeface="Arial" pitchFamily="34" charset="-122"/>
+                <a:cs typeface="Arial" pitchFamily="34" charset="-120"/>
+              </a:rPr>
+              <a:t>quizzes/formative.md</a:t>
+            </a:r>
+            <a:pPr algn="l" indent="0" marL="0">
+              <a:lnSpc>
+                <a:spcPts val="1680"/>
+              </a:lnSpc>
+              <a:spcBef>
+                <a:spcPts val="300"/>
+              </a:spcBef>
+              <a:spcAft>
+                <a:spcPts val="300"/>
+              </a:spcAft>
+              <a:buNone/>
+            </a:pPr>
+            <a:r>
+              <a:rPr lang="en-US" sz="1200" dirty="0">
+                <a:solidFill>
+                  <a:srgbClr val="1C2833"/>
+                </a:solidFill>
+                <a:latin typeface="Arial" pitchFamily="34" charset="0"/>
+                <a:ea typeface="Arial" pitchFamily="34" charset="-122"/>
+                <a:cs typeface="Arial" pitchFamily="34" charset="-120"/>
+              </a:rPr>
+              <a:t> Part B. Collect and mark within 24 hours.</a:t>
+            </a:r>
+            <a:endParaRPr lang="en-US" sz="1200" dirty="0"/>
+          </a:p>
+        </p:txBody>
+      </p:sp>
+      <p:sp>
+        <p:nvSpPr>
+          <p:cNvPr id="5" name="Text 3"/>
+          <p:cNvSpPr/>
+          <p:nvPr/>
+        </p:nvSpPr>
+        <p:spPr>
+          <a:xfrm>
+            <a:off x="406301" y="4434929"/>
+            <a:ext cx="8498026" cy="213271"/>
+          </a:xfrm>
+          <a:prstGeom prst="rect">
+            <a:avLst/>
+          </a:prstGeom>
+          <a:noFill/>
+          <a:ln/>
+        </p:spPr>
+        <p:txBody>
+          <a:bodyPr wrap="square" lIns="0" tIns="0" rIns="0" bIns="0" rtlCol="0" anchor="t"/>
+          <a:lstStyle/>
+          <a:p>
+            <a:pPr algn="l" indent="0" marL="0">
+              <a:lnSpc>
+                <a:spcPts val="1680"/>
+              </a:lnSpc>
+              <a:spcBef>
+                <a:spcPts val="300"/>
+              </a:spcBef>
+              <a:spcAft>
+                <a:spcPts val="300"/>
+              </a:spcAft>
+              <a:buNone/>
+            </a:pPr>
+            <a:r>
+              <a:rPr lang="en-US" sz="1200" dirty="0">
+                <a:solidFill>
+                  <a:srgbClr val="1C2833"/>
+                </a:solidFill>
+                <a:latin typeface="Arial" pitchFamily="34" charset="0"/>
+                <a:ea typeface="Arial" pitchFamily="34" charset="-122"/>
+                <a:cs typeface="Arial" pitchFamily="34" charset="-120"/>
+              </a:rPr>
+              <a:t>Middle ·  · IKS Curriculum</a:t>
+            </a:r>
+            <a:endParaRPr lang="en-US" sz="1200" dirty="0"/>
+          </a:p>
+        </p:txBody>
+      </p:sp>
+    </p:spTree>
+  </p:cSld>
+  <p:clrMapOvr>
+    <a:masterClrMapping/>
+  </p:clrMapOvr>
+</p:sld>
+</file>
+
+<file path=ppt/slides/slide17.xml><?xml version="1.0" encoding="utf-8"?>
+<p:sld xmlns:a="http://schemas.openxmlformats.org/drawingml/2006/main" xmlns:r="http://schemas.openxmlformats.org/officeDocument/2006/relationships" xmlns:p="http://schemas.openxmlformats.org/presentationml/2006/main">
+  <p:cSld name="Slide 17">
+    <p:bg>
+      <p:bgPr>
+        <a:solidFill>
+          <a:srgbClr val="FFFFFF"/>
+        </a:solidFill>
+      </p:bgPr>
+    </p:bg>
+    <p:spTree>
+      <p:nvGrpSpPr>
+        <p:cNvPr id="1" name=""/>
+        <p:cNvGrpSpPr/>
+        <p:nvPr/>
+      </p:nvGrpSpPr>
+      <p:grpSpPr>
+        <a:xfrm>
+          <a:off x="0" y="0"/>
+          <a:ext cx="0" cy="0"/>
+          <a:chOff x="0" y="0"/>
+          <a:chExt cx="0" cy="0"/>
+        </a:xfrm>
+      </p:grpSpPr>
+      <p:sp>
+        <p:nvSpPr>
+          <p:cNvPr id="2" name="Text 0"/>
+          <p:cNvSpPr/>
+          <p:nvPr/>
+        </p:nvSpPr>
+        <p:spPr>
+          <a:xfrm>
+            <a:off x="0" y="0"/>
+            <a:ext cx="9144000" cy="101501"/>
+          </a:xfrm>
+          <a:prstGeom prst="rect">
+            <a:avLst/>
+          </a:prstGeom>
+          <a:solidFill>
+            <a:srgbClr val="277884"/>
+          </a:solidFill>
+          <a:ln/>
+        </p:spPr>
+        <p:txBody>
+          <a:bodyPr wrap="square" rtlCol="0" anchor="ctr"/>
+          <a:lstStyle/>
+          <a:p>
+            <a:pPr indent="0" marL="0">
+              <a:buNone/>
+            </a:pPr>
+            <a:endParaRPr lang="en-US" dirty="0"/>
+          </a:p>
+        </p:txBody>
+      </p:sp>
+      <p:sp>
+        <p:nvSpPr>
+          <p:cNvPr id="3" name="Text 1"/>
+          <p:cNvSpPr/>
+          <p:nvPr/>
+        </p:nvSpPr>
+        <p:spPr>
+          <a:xfrm>
+            <a:off x="406301" y="457051"/>
+            <a:ext cx="8498026" cy="274290"/>
+          </a:xfrm>
+          <a:prstGeom prst="rect">
+            <a:avLst/>
+          </a:prstGeom>
+          <a:noFill/>
+          <a:ln/>
+        </p:spPr>
+        <p:txBody>
+          <a:bodyPr wrap="square" lIns="0" tIns="0" rIns="0" bIns="0" rtlCol="0" anchor="t"/>
+          <a:lstStyle/>
+          <a:p>
+            <a:pPr algn="l" indent="0" marL="0">
+              <a:lnSpc>
+                <a:spcPts val="2160"/>
+              </a:lnSpc>
+              <a:spcBef>
+                <a:spcPts val="600"/>
+              </a:spcBef>
+              <a:spcAft>
+                <a:spcPts val="800"/>
+              </a:spcAft>
+              <a:buNone/>
+            </a:pPr>
+            <a:r>
+              <a:rPr lang="en-US" sz="1800" b="1" dirty="0">
+                <a:solidFill>
+                  <a:srgbClr val="FE4447"/>
+                </a:solidFill>
+                <a:latin typeface="Georgia" pitchFamily="34" charset="0"/>
+                <a:ea typeface="Georgia" pitchFamily="34" charset="-122"/>
+                <a:cs typeface="Georgia" pitchFamily="34" charset="-120"/>
+              </a:rPr>
+              <a:t>Wrap-up (5 min)</a:t>
+            </a:r>
+            <a:endParaRPr lang="en-US" sz="1800" dirty="0"/>
+          </a:p>
+        </p:txBody>
+      </p:sp>
+      <p:sp>
+        <p:nvSpPr>
+          <p:cNvPr id="4" name="Text 2"/>
+          <p:cNvSpPr/>
+          <p:nvPr/>
+        </p:nvSpPr>
+        <p:spPr>
+          <a:xfrm>
+            <a:off x="634901" y="883593"/>
+            <a:ext cx="8102798" cy="731341"/>
+          </a:xfrm>
+          <a:prstGeom prst="rect">
+            <a:avLst/>
+          </a:prstGeom>
+          <a:noFill/>
+          <a:ln/>
+        </p:spPr>
+        <p:txBody>
+          <a:bodyPr wrap="square" lIns="0" tIns="0" rIns="0" bIns="0" rtlCol="0" anchor="t"/>
+          <a:lstStyle/>
+          <a:p>
+            <a:pPr algn="l" marL="342900" indent="-342900">
+              <a:lnSpc>
+                <a:spcPts val="1620"/>
+              </a:lnSpc>
+              <a:spcAft>
+                <a:spcPts val="300"/>
+              </a:spcAft>
+              <a:buSzPct val="100000"/>
+              <a:buChar char="•"/>
+            </a:pPr>
+            <a:r>
+              <a:rPr lang="en-US" sz="1200" dirty="0">
+                <a:solidFill>
+                  <a:srgbClr val="1C2833"/>
+                </a:solidFill>
+                <a:latin typeface="Arial" pitchFamily="34" charset="0"/>
+                <a:ea typeface="Arial" pitchFamily="34" charset="-122"/>
+                <a:cs typeface="Arial" pitchFamily="34" charset="-120"/>
+              </a:rPr>
+              <a:t>One student names a festival their family celebrates; the class names the tithi+pakṣa+month. Two rounds.</a:t>
+            </a:r>
+            <a:endParaRPr lang="en-US" sz="1200" dirty="0"/>
+          </a:p>
+          <a:p>
+            <a:pPr algn="l" marL="342900" indent="-342900">
+              <a:lnSpc>
+                <a:spcPts val="1620"/>
+              </a:lnSpc>
+              <a:spcAft>
+                <a:spcPts val="300"/>
+              </a:spcAft>
+              <a:buSzPct val="100000"/>
+              <a:buChar char="•"/>
+            </a:pPr>
+            <a:r>
+              <a:rPr lang="en-US" sz="1200" b="1" dirty="0">
+                <a:solidFill>
+                  <a:srgbClr val="1C2833"/>
+                </a:solidFill>
+                <a:latin typeface="Arial" pitchFamily="34" charset="0"/>
+                <a:ea typeface="Arial" pitchFamily="34" charset="-122"/>
+                <a:cs typeface="Arial" pitchFamily="34" charset="-120"/>
+              </a:rPr>
+              <a:t>Project decision deadline:</a:t>
+            </a:r>
+            <a:pPr algn="l" indent="0" marL="0">
+              <a:lnSpc>
+                <a:spcPts val="1620"/>
+              </a:lnSpc>
+              <a:spcAft>
+                <a:spcPts val="300"/>
+              </a:spcAft>
+              <a:buNone/>
+            </a:pPr>
+            <a:r>
+              <a:rPr lang="en-US" sz="1200" dirty="0">
+                <a:solidFill>
+                  <a:srgbClr val="1C2833"/>
+                </a:solidFill>
+                <a:latin typeface="Arial" pitchFamily="34" charset="0"/>
+                <a:ea typeface="Arial" pitchFamily="34" charset="-122"/>
+                <a:cs typeface="Arial" pitchFamily="34" charset="-120"/>
+              </a:rPr>
+              <a:t> by the end of today, every student has a project partner (or has confirmed individual work) and a tentative topic. Sticky note on the board.</a:t>
+            </a:r>
+            <a:endParaRPr lang="en-US" sz="1200" dirty="0"/>
+          </a:p>
+        </p:txBody>
+      </p:sp>
+      <p:sp>
+        <p:nvSpPr>
+          <p:cNvPr id="5" name="Text 3"/>
+          <p:cNvSpPr/>
+          <p:nvPr/>
+        </p:nvSpPr>
+        <p:spPr>
+          <a:xfrm>
+            <a:off x="406301" y="4434929"/>
+            <a:ext cx="8498026" cy="213271"/>
+          </a:xfrm>
+          <a:prstGeom prst="rect">
+            <a:avLst/>
+          </a:prstGeom>
+          <a:noFill/>
+          <a:ln/>
+        </p:spPr>
+        <p:txBody>
+          <a:bodyPr wrap="square" lIns="0" tIns="0" rIns="0" bIns="0" rtlCol="0" anchor="t"/>
+          <a:lstStyle/>
+          <a:p>
+            <a:pPr algn="l" indent="0" marL="0">
+              <a:lnSpc>
+                <a:spcPts val="1680"/>
+              </a:lnSpc>
+              <a:spcBef>
+                <a:spcPts val="300"/>
+              </a:spcBef>
+              <a:spcAft>
+                <a:spcPts val="300"/>
+              </a:spcAft>
+              <a:buNone/>
+            </a:pPr>
+            <a:r>
+              <a:rPr lang="en-US" sz="1200" dirty="0">
+                <a:solidFill>
+                  <a:srgbClr val="1C2833"/>
+                </a:solidFill>
+                <a:latin typeface="Arial" pitchFamily="34" charset="0"/>
+                <a:ea typeface="Arial" pitchFamily="34" charset="-122"/>
+                <a:cs typeface="Arial" pitchFamily="34" charset="-120"/>
+              </a:rPr>
+              <a:t>Middle ·  · IKS Curriculum</a:t>
+            </a:r>
+            <a:endParaRPr lang="en-US" sz="1200" dirty="0"/>
+          </a:p>
+        </p:txBody>
+      </p:sp>
+    </p:spTree>
+  </p:cSld>
+  <p:clrMapOvr>
+    <a:masterClrMapping/>
+  </p:clrMapOvr>
+</p:sld>
+</file>
+
+<file path=ppt/slides/slide18.xml><?xml version="1.0" encoding="utf-8"?>
+<p:sld xmlns:a="http://schemas.openxmlformats.org/drawingml/2006/main" xmlns:r="http://schemas.openxmlformats.org/officeDocument/2006/relationships" xmlns:p="http://schemas.openxmlformats.org/presentationml/2006/main">
+  <p:cSld name="Slide 18">
+    <p:bg>
+      <p:bgPr>
+        <a:solidFill>
+          <a:srgbClr val="FFFFFF"/>
+        </a:solidFill>
+      </p:bgPr>
+    </p:bg>
+    <p:spTree>
+      <p:nvGrpSpPr>
+        <p:cNvPr id="1" name=""/>
+        <p:cNvGrpSpPr/>
+        <p:nvPr/>
+      </p:nvGrpSpPr>
+      <p:grpSpPr>
+        <a:xfrm>
+          <a:off x="0" y="0"/>
+          <a:ext cx="0" cy="0"/>
+          <a:chOff x="0" y="0"/>
+          <a:chExt cx="0" cy="0"/>
+        </a:xfrm>
+      </p:grpSpPr>
+      <p:sp>
+        <p:nvSpPr>
+          <p:cNvPr id="2" name="Text 0"/>
+          <p:cNvSpPr/>
+          <p:nvPr/>
+        </p:nvSpPr>
+        <p:spPr>
+          <a:xfrm>
+            <a:off x="0" y="0"/>
+            <a:ext cx="9144000" cy="101501"/>
+          </a:xfrm>
+          <a:prstGeom prst="rect">
+            <a:avLst/>
+          </a:prstGeom>
+          <a:solidFill>
+            <a:srgbClr val="277884"/>
+          </a:solidFill>
+          <a:ln/>
+        </p:spPr>
+        <p:txBody>
+          <a:bodyPr wrap="square" rtlCol="0" anchor="ctr"/>
+          <a:lstStyle/>
+          <a:p>
+            <a:pPr indent="0" marL="0">
+              <a:buNone/>
+            </a:pPr>
+            <a:endParaRPr lang="en-US" dirty="0"/>
+          </a:p>
+        </p:txBody>
+      </p:sp>
+      <p:sp>
+        <p:nvSpPr>
+          <p:cNvPr id="3" name="Text 1"/>
+          <p:cNvSpPr/>
+          <p:nvPr/>
+        </p:nvSpPr>
+        <p:spPr>
+          <a:xfrm>
+            <a:off x="406301" y="457051"/>
+            <a:ext cx="8498026" cy="274290"/>
+          </a:xfrm>
+          <a:prstGeom prst="rect">
+            <a:avLst/>
+          </a:prstGeom>
+          <a:noFill/>
+          <a:ln/>
+        </p:spPr>
+        <p:txBody>
+          <a:bodyPr wrap="square" lIns="0" tIns="0" rIns="0" bIns="0" rtlCol="0" anchor="t"/>
+          <a:lstStyle/>
+          <a:p>
+            <a:pPr algn="l" indent="0" marL="0">
+              <a:lnSpc>
+                <a:spcPts val="2160"/>
+              </a:lnSpc>
+              <a:spcBef>
+                <a:spcPts val="600"/>
+              </a:spcBef>
+              <a:spcAft>
+                <a:spcPts val="800"/>
+              </a:spcAft>
+              <a:buNone/>
+            </a:pPr>
+            <a:r>
+              <a:rPr lang="en-US" sz="1800" b="1" dirty="0">
+                <a:solidFill>
+                  <a:srgbClr val="FE4447"/>
+                </a:solidFill>
+                <a:latin typeface="Georgia" pitchFamily="34" charset="0"/>
+                <a:ea typeface="Georgia" pitchFamily="34" charset="-122"/>
+                <a:cs typeface="Georgia" pitchFamily="34" charset="-120"/>
+              </a:rPr>
+              <a:t>Student-facing content</a:t>
+            </a:r>
+            <a:endParaRPr lang="en-US" sz="1800" dirty="0"/>
+          </a:p>
+        </p:txBody>
+      </p:sp>
+      <p:sp>
+        <p:nvSpPr>
+          <p:cNvPr id="4" name="Text 2"/>
+          <p:cNvSpPr/>
+          <p:nvPr/>
+        </p:nvSpPr>
+        <p:spPr>
+          <a:xfrm>
+            <a:off x="406301" y="883593"/>
+            <a:ext cx="8331398" cy="2112169"/>
+          </a:xfrm>
+          <a:prstGeom prst="rect">
+            <a:avLst/>
+          </a:prstGeom>
+          <a:solidFill>
+            <a:srgbClr val="F4F8F9"/>
+          </a:solidFill>
+          <a:ln/>
+        </p:spPr>
+        <p:txBody>
+          <a:bodyPr wrap="square" rtlCol="0" anchor="ctr"/>
+          <a:lstStyle/>
+          <a:p>
+            <a:pPr indent="0" marL="0">
+              <a:buNone/>
+            </a:pPr>
+            <a:endParaRPr lang="en-US" dirty="0"/>
+          </a:p>
+        </p:txBody>
+      </p:sp>
+      <p:sp>
+        <p:nvSpPr>
+          <p:cNvPr id="5" name="Shape 3"/>
+          <p:cNvSpPr/>
+          <p:nvPr/>
+        </p:nvSpPr>
+        <p:spPr>
+          <a:xfrm>
+            <a:off x="434876" y="883593"/>
+            <a:ext cx="0" cy="2112169"/>
+          </a:xfrm>
+          <a:prstGeom prst="line">
+            <a:avLst/>
+          </a:prstGeom>
+          <a:noFill/>
+          <a:ln w="57150">
+            <a:solidFill>
+              <a:srgbClr val="FE4447"/>
+            </a:solidFill>
+            <a:prstDash val="solid"/>
+          </a:ln>
+        </p:spPr>
+      </p:sp>
+      <p:sp>
+        <p:nvSpPr>
+          <p:cNvPr id="6" name="Text 4"/>
+          <p:cNvSpPr/>
+          <p:nvPr/>
+        </p:nvSpPr>
+        <p:spPr>
+          <a:xfrm>
+            <a:off x="692051" y="1074093"/>
+            <a:ext cx="7973389" cy="230981"/>
+          </a:xfrm>
+          <a:prstGeom prst="rect">
+            <a:avLst/>
+          </a:prstGeom>
+          <a:noFill/>
+          <a:ln/>
+        </p:spPr>
+        <p:txBody>
+          <a:bodyPr wrap="square" lIns="0" tIns="0" rIns="0" bIns="0" rtlCol="0" anchor="t"/>
+          <a:lstStyle/>
+          <a:p>
+            <a:pPr algn="l" indent="0" marL="0">
+              <a:lnSpc>
+                <a:spcPts val="1820"/>
+              </a:lnSpc>
+              <a:spcBef>
+                <a:spcPts val="300"/>
+              </a:spcBef>
+              <a:spcAft>
+                <a:spcPts val="300"/>
+              </a:spcAft>
+              <a:buNone/>
+            </a:pPr>
+            <a:r>
+              <a:rPr lang="en-US" sz="1300" dirty="0">
+                <a:solidFill>
+                  <a:srgbClr val="1C2833"/>
+                </a:solidFill>
+                <a:latin typeface="Georgia" pitchFamily="34" charset="0"/>
+                <a:ea typeface="Georgia" pitchFamily="34" charset="-122"/>
+                <a:cs typeface="Georgia" pitchFamily="34" charset="-120"/>
+              </a:rPr>
+              <a:t>*</a:t>
+            </a:r>
+            <a:pPr algn="l" indent="0" marL="0">
+              <a:lnSpc>
+                <a:spcPts val="1820"/>
+              </a:lnSpc>
+              <a:spcBef>
+                <a:spcPts val="300"/>
+              </a:spcBef>
+              <a:spcAft>
+                <a:spcPts val="300"/>
+              </a:spcAft>
+              <a:buNone/>
+            </a:pPr>
+            <a:r>
+              <a:rPr lang="en-US" sz="1300" i="1" dirty="0">
+                <a:solidFill>
+                  <a:srgbClr val="1C2833"/>
+                </a:solidFill>
+                <a:latin typeface="Georgia" pitchFamily="34" charset="0"/>
+                <a:ea typeface="Georgia" pitchFamily="34" charset="-122"/>
+                <a:cs typeface="Georgia" pitchFamily="34" charset="-120"/>
+              </a:rPr>
+              <a:t>There are 12 lunar months. Each is named after the</a:t>
+            </a:r>
+            <a:pPr algn="l" indent="0" marL="0">
+              <a:lnSpc>
+                <a:spcPts val="1820"/>
+              </a:lnSpc>
+              <a:spcBef>
+                <a:spcPts val="300"/>
+              </a:spcBef>
+              <a:spcAft>
+                <a:spcPts val="300"/>
+              </a:spcAft>
+              <a:buNone/>
+            </a:pPr>
+            <a:r>
+              <a:rPr lang="en-US" sz="1300" dirty="0">
+                <a:solidFill>
+                  <a:srgbClr val="1C2833"/>
+                </a:solidFill>
+                <a:latin typeface="Georgia" pitchFamily="34" charset="0"/>
+                <a:ea typeface="Georgia" pitchFamily="34" charset="-122"/>
+                <a:cs typeface="Georgia" pitchFamily="34" charset="-120"/>
+              </a:rPr>
+              <a:t>nakṣatra</a:t>
+            </a:r>
+            <a:pPr algn="l" indent="0" marL="0">
+              <a:lnSpc>
+                <a:spcPts val="1820"/>
+              </a:lnSpc>
+              <a:spcBef>
+                <a:spcPts val="300"/>
+              </a:spcBef>
+              <a:spcAft>
+                <a:spcPts val="300"/>
+              </a:spcAft>
+              <a:buNone/>
+            </a:pPr>
+            <a:r>
+              <a:rPr lang="en-US" sz="1300" i="1" dirty="0">
+                <a:solidFill>
+                  <a:srgbClr val="1C2833"/>
+                </a:solidFill>
+                <a:latin typeface="Georgia" pitchFamily="34" charset="0"/>
+                <a:ea typeface="Georgia" pitchFamily="34" charset="-122"/>
+                <a:cs typeface="Georgia" pitchFamily="34" charset="-120"/>
+              </a:rPr>
+              <a:t> in which its</a:t>
+            </a:r>
+            <a:pPr algn="l" indent="0" marL="0">
+              <a:lnSpc>
+                <a:spcPts val="1820"/>
+              </a:lnSpc>
+              <a:spcBef>
+                <a:spcPts val="300"/>
+              </a:spcBef>
+              <a:spcAft>
+                <a:spcPts val="300"/>
+              </a:spcAft>
+              <a:buNone/>
+            </a:pPr>
+            <a:r>
+              <a:rPr lang="en-US" sz="1300" dirty="0">
+                <a:solidFill>
+                  <a:srgbClr val="1C2833"/>
+                </a:solidFill>
+                <a:latin typeface="Georgia" pitchFamily="34" charset="0"/>
+                <a:ea typeface="Georgia" pitchFamily="34" charset="-122"/>
+                <a:cs typeface="Georgia" pitchFamily="34" charset="-120"/>
+              </a:rPr>
+              <a:t>pūrṇimā</a:t>
+            </a:r>
+            <a:pPr algn="l" indent="0" marL="0">
+              <a:lnSpc>
+                <a:spcPts val="1820"/>
+              </a:lnSpc>
+              <a:spcBef>
+                <a:spcPts val="300"/>
+              </a:spcBef>
+              <a:spcAft>
+                <a:spcPts val="300"/>
+              </a:spcAft>
+              <a:buNone/>
+            </a:pPr>
+            <a:r>
+              <a:rPr lang="en-US" sz="1300" i="1" dirty="0">
+                <a:solidFill>
+                  <a:srgbClr val="1C2833"/>
+                </a:solidFill>
+                <a:latin typeface="Georgia" pitchFamily="34" charset="0"/>
+                <a:ea typeface="Georgia" pitchFamily="34" charset="-122"/>
+                <a:cs typeface="Georgia" pitchFamily="34" charset="-120"/>
+              </a:rPr>
+              <a:t> falls.</a:t>
+            </a:r>
+            <a:pPr algn="l" indent="0" marL="0">
+              <a:lnSpc>
+                <a:spcPts val="1820"/>
+              </a:lnSpc>
+              <a:spcBef>
+                <a:spcPts val="300"/>
+              </a:spcBef>
+              <a:spcAft>
+                <a:spcPts val="300"/>
+              </a:spcAft>
+              <a:buNone/>
+            </a:pPr>
+            <a:r>
+              <a:rPr lang="en-US" sz="1300" dirty="0">
+                <a:solidFill>
+                  <a:srgbClr val="1C2833"/>
+                </a:solidFill>
+                <a:latin typeface="Georgia" pitchFamily="34" charset="0"/>
+                <a:ea typeface="Georgia" pitchFamily="34" charset="-122"/>
+                <a:cs typeface="Georgia" pitchFamily="34" charset="-120"/>
+              </a:rPr>
+              <a:t>*</a:t>
+            </a:r>
+            <a:endParaRPr lang="en-US" sz="1300" dirty="0"/>
+          </a:p>
+        </p:txBody>
+      </p:sp>
+      <p:sp>
+        <p:nvSpPr>
+          <p:cNvPr id="7" name="Text 5"/>
+          <p:cNvSpPr/>
+          <p:nvPr/>
+        </p:nvSpPr>
+        <p:spPr>
+          <a:xfrm>
+            <a:off x="692051" y="1343174"/>
+            <a:ext cx="7973389" cy="461963"/>
+          </a:xfrm>
+          <a:prstGeom prst="rect">
+            <a:avLst/>
+          </a:prstGeom>
+          <a:noFill/>
+          <a:ln/>
+        </p:spPr>
+        <p:txBody>
+          <a:bodyPr wrap="square" lIns="0" tIns="0" rIns="0" bIns="0" rtlCol="0" anchor="t"/>
+          <a:lstStyle/>
+          <a:p>
+            <a:pPr algn="l" indent="0" marL="0">
+              <a:lnSpc>
+                <a:spcPts val="1820"/>
+              </a:lnSpc>
+              <a:spcBef>
+                <a:spcPts val="300"/>
+              </a:spcBef>
+              <a:spcAft>
+                <a:spcPts val="300"/>
+              </a:spcAft>
+              <a:buNone/>
+            </a:pPr>
+            <a:r>
+              <a:rPr lang="en-US" sz="1300" i="1" dirty="0">
+                <a:solidFill>
+                  <a:srgbClr val="1C2833"/>
+                </a:solidFill>
+                <a:latin typeface="Georgia" pitchFamily="34" charset="0"/>
+                <a:ea typeface="Georgia" pitchFamily="34" charset="-122"/>
+                <a:cs typeface="Georgia" pitchFamily="34" charset="-120"/>
+              </a:rPr>
+              <a:t>Caitra, Vaiśākha, Jyeṣṭha, Āṣāḍha, Śrāvaṇa, Bhādrapada, Āśvina, Kārtika, Mārgaśīrṣa, Pauṣa, Māgha, Phālguna.</a:t>
+            </a:r>
+            <a:endParaRPr lang="en-US" sz="1300" dirty="0"/>
+          </a:p>
+        </p:txBody>
+      </p:sp>
+      <p:sp>
+        <p:nvSpPr>
+          <p:cNvPr id="8" name="Text 6"/>
+          <p:cNvSpPr/>
+          <p:nvPr/>
+        </p:nvSpPr>
+        <p:spPr>
+          <a:xfrm>
+            <a:off x="692051" y="1843236"/>
+            <a:ext cx="7973389" cy="461963"/>
+          </a:xfrm>
+          <a:prstGeom prst="rect">
+            <a:avLst/>
+          </a:prstGeom>
+          <a:noFill/>
+          <a:ln/>
+        </p:spPr>
+        <p:txBody>
+          <a:bodyPr wrap="square" lIns="0" tIns="0" rIns="0" bIns="0" rtlCol="0" anchor="t"/>
+          <a:lstStyle/>
+          <a:p>
+            <a:pPr algn="l" indent="0" marL="0">
+              <a:lnSpc>
+                <a:spcPts val="1820"/>
+              </a:lnSpc>
+              <a:spcBef>
+                <a:spcPts val="300"/>
+              </a:spcBef>
+              <a:spcAft>
+                <a:spcPts val="300"/>
+              </a:spcAft>
+              <a:buNone/>
+            </a:pPr>
+            <a:r>
+              <a:rPr lang="en-US" sz="1300" dirty="0">
+                <a:solidFill>
+                  <a:srgbClr val="1C2833"/>
+                </a:solidFill>
+                <a:latin typeface="Georgia" pitchFamily="34" charset="0"/>
+                <a:ea typeface="Georgia" pitchFamily="34" charset="-122"/>
+                <a:cs typeface="Georgia" pitchFamily="34" charset="-120"/>
+              </a:rPr>
+              <a:t>Two conventions: months end at </a:t>
+            </a:r>
+            <a:pPr algn="l" indent="0" marL="0">
+              <a:lnSpc>
+                <a:spcPts val="1820"/>
+              </a:lnSpc>
+              <a:spcBef>
+                <a:spcPts val="300"/>
+              </a:spcBef>
+              <a:spcAft>
+                <a:spcPts val="300"/>
+              </a:spcAft>
+              <a:buNone/>
+            </a:pPr>
+            <a:r>
+              <a:rPr lang="en-US" sz="1300" i="1" dirty="0">
+                <a:solidFill>
+                  <a:srgbClr val="1C2833"/>
+                </a:solidFill>
+                <a:latin typeface="Georgia" pitchFamily="34" charset="0"/>
+                <a:ea typeface="Georgia" pitchFamily="34" charset="-122"/>
+                <a:cs typeface="Georgia" pitchFamily="34" charset="-120"/>
+              </a:rPr>
+              <a:t>amāvasyā</a:t>
+            </a:r>
+            <a:pPr algn="l" indent="0" marL="0">
+              <a:lnSpc>
+                <a:spcPts val="1820"/>
+              </a:lnSpc>
+              <a:spcBef>
+                <a:spcPts val="300"/>
+              </a:spcBef>
+              <a:spcAft>
+                <a:spcPts val="300"/>
+              </a:spcAft>
+              <a:buNone/>
+            </a:pPr>
+            <a:r>
+              <a:rPr lang="en-US" sz="1300" dirty="0">
+                <a:solidFill>
+                  <a:srgbClr val="1C2833"/>
+                </a:solidFill>
+                <a:latin typeface="Georgia" pitchFamily="34" charset="0"/>
+                <a:ea typeface="Georgia" pitchFamily="34" charset="-122"/>
+                <a:cs typeface="Georgia" pitchFamily="34" charset="-120"/>
+              </a:rPr>
+              <a:t> (</a:t>
+            </a:r>
+            <a:pPr algn="l" indent="0" marL="0">
+              <a:lnSpc>
+                <a:spcPts val="1820"/>
+              </a:lnSpc>
+              <a:spcBef>
+                <a:spcPts val="300"/>
+              </a:spcBef>
+              <a:spcAft>
+                <a:spcPts val="300"/>
+              </a:spcAft>
+              <a:buNone/>
+            </a:pPr>
+            <a:r>
+              <a:rPr lang="en-US" sz="1300" i="1" dirty="0">
+                <a:solidFill>
+                  <a:srgbClr val="1C2833"/>
+                </a:solidFill>
+                <a:latin typeface="Georgia" pitchFamily="34" charset="0"/>
+                <a:ea typeface="Georgia" pitchFamily="34" charset="-122"/>
+                <a:cs typeface="Georgia" pitchFamily="34" charset="-120"/>
+              </a:rPr>
+              <a:t>amānta</a:t>
+            </a:r>
+            <a:pPr algn="l" indent="0" marL="0">
+              <a:lnSpc>
+                <a:spcPts val="1820"/>
+              </a:lnSpc>
+              <a:spcBef>
+                <a:spcPts val="300"/>
+              </a:spcBef>
+              <a:spcAft>
+                <a:spcPts val="300"/>
+              </a:spcAft>
+              <a:buNone/>
+            </a:pPr>
+            <a:r>
+              <a:rPr lang="en-US" sz="1300" dirty="0">
+                <a:solidFill>
+                  <a:srgbClr val="1C2833"/>
+                </a:solidFill>
+                <a:latin typeface="Georgia" pitchFamily="34" charset="0"/>
+                <a:ea typeface="Georgia" pitchFamily="34" charset="-122"/>
+                <a:cs typeface="Georgia" pitchFamily="34" charset="-120"/>
+              </a:rPr>
+              <a:t>) or at </a:t>
+            </a:r>
+            <a:pPr algn="l" indent="0" marL="0">
+              <a:lnSpc>
+                <a:spcPts val="1820"/>
+              </a:lnSpc>
+              <a:spcBef>
+                <a:spcPts val="300"/>
+              </a:spcBef>
+              <a:spcAft>
+                <a:spcPts val="300"/>
+              </a:spcAft>
+              <a:buNone/>
+            </a:pPr>
+            <a:r>
+              <a:rPr lang="en-US" sz="1300" i="1" dirty="0">
+                <a:solidFill>
+                  <a:srgbClr val="1C2833"/>
+                </a:solidFill>
+                <a:latin typeface="Georgia" pitchFamily="34" charset="0"/>
+                <a:ea typeface="Georgia" pitchFamily="34" charset="-122"/>
+                <a:cs typeface="Georgia" pitchFamily="34" charset="-120"/>
+              </a:rPr>
+              <a:t>pūrṇimā</a:t>
+            </a:r>
+            <a:pPr algn="l" indent="0" marL="0">
+              <a:lnSpc>
+                <a:spcPts val="1820"/>
+              </a:lnSpc>
+              <a:spcBef>
+                <a:spcPts val="300"/>
+              </a:spcBef>
+              <a:spcAft>
+                <a:spcPts val="300"/>
+              </a:spcAft>
+              <a:buNone/>
+            </a:pPr>
+            <a:r>
+              <a:rPr lang="en-US" sz="1300" dirty="0">
+                <a:solidFill>
+                  <a:srgbClr val="1C2833"/>
+                </a:solidFill>
+                <a:latin typeface="Georgia" pitchFamily="34" charset="0"/>
+                <a:ea typeface="Georgia" pitchFamily="34" charset="-122"/>
+                <a:cs typeface="Georgia" pitchFamily="34" charset="-120"/>
+              </a:rPr>
+              <a:t> (</a:t>
+            </a:r>
+            <a:pPr algn="l" indent="0" marL="0">
+              <a:lnSpc>
+                <a:spcPts val="1820"/>
+              </a:lnSpc>
+              <a:spcBef>
+                <a:spcPts val="300"/>
+              </a:spcBef>
+              <a:spcAft>
+                <a:spcPts val="300"/>
+              </a:spcAft>
+              <a:buNone/>
+            </a:pPr>
+            <a:r>
+              <a:rPr lang="en-US" sz="1300" i="1" dirty="0">
+                <a:solidFill>
+                  <a:srgbClr val="1C2833"/>
+                </a:solidFill>
+                <a:latin typeface="Georgia" pitchFamily="34" charset="0"/>
+                <a:ea typeface="Georgia" pitchFamily="34" charset="-122"/>
+                <a:cs typeface="Georgia" pitchFamily="34" charset="-120"/>
+              </a:rPr>
+              <a:t>pūrṇimānta</a:t>
+            </a:r>
+            <a:pPr algn="l" indent="0" marL="0">
+              <a:lnSpc>
+                <a:spcPts val="1820"/>
+              </a:lnSpc>
+              <a:spcBef>
+                <a:spcPts val="300"/>
+              </a:spcBef>
+              <a:spcAft>
+                <a:spcPts val="300"/>
+              </a:spcAft>
+              <a:buNone/>
+            </a:pPr>
+            <a:r>
+              <a:rPr lang="en-US" sz="1300" dirty="0">
+                <a:solidFill>
+                  <a:srgbClr val="1C2833"/>
+                </a:solidFill>
+                <a:latin typeface="Georgia" pitchFamily="34" charset="0"/>
+                <a:ea typeface="Georgia" pitchFamily="34" charset="-122"/>
+                <a:cs typeface="Georgia" pitchFamily="34" charset="-120"/>
+              </a:rPr>
+              <a:t>). Different regions, different conventions — same astronomy.</a:t>
+            </a:r>
+            <a:endParaRPr lang="en-US" sz="1300" dirty="0"/>
+          </a:p>
+        </p:txBody>
+      </p:sp>
+      <p:sp>
+        <p:nvSpPr>
+          <p:cNvPr id="9" name="Text 7"/>
+          <p:cNvSpPr/>
+          <p:nvPr/>
+        </p:nvSpPr>
+        <p:spPr>
+          <a:xfrm>
+            <a:off x="692051" y="2343299"/>
+            <a:ext cx="7973389" cy="461963"/>
+          </a:xfrm>
+          <a:prstGeom prst="rect">
+            <a:avLst/>
+          </a:prstGeom>
+          <a:noFill/>
+          <a:ln/>
+        </p:spPr>
+        <p:txBody>
+          <a:bodyPr wrap="square" lIns="0" tIns="0" rIns="0" bIns="0" rtlCol="0" anchor="t"/>
+          <a:lstStyle/>
+          <a:p>
+            <a:pPr algn="l" indent="0" marL="0">
+              <a:lnSpc>
+                <a:spcPts val="1820"/>
+              </a:lnSpc>
+              <a:spcBef>
+                <a:spcPts val="300"/>
+              </a:spcBef>
+              <a:spcAft>
+                <a:spcPts val="300"/>
+              </a:spcAft>
+              <a:buNone/>
+            </a:pPr>
+            <a:r>
+              <a:rPr lang="en-US" sz="1300" dirty="0">
+                <a:solidFill>
+                  <a:srgbClr val="1C2833"/>
+                </a:solidFill>
+                <a:latin typeface="Georgia" pitchFamily="34" charset="0"/>
+                <a:ea typeface="Georgia" pitchFamily="34" charset="-122"/>
+                <a:cs typeface="Georgia" pitchFamily="34" charset="-120"/>
+              </a:rPr>
+              <a:t>Every Indian festival sits at a precise (month + pakṣa + tithi) coordinate. The </a:t>
+            </a:r>
+            <a:pPr algn="l" indent="0" marL="0">
+              <a:lnSpc>
+                <a:spcPts val="1820"/>
+              </a:lnSpc>
+              <a:spcBef>
+                <a:spcPts val="300"/>
+              </a:spcBef>
+              <a:spcAft>
+                <a:spcPts val="300"/>
+              </a:spcAft>
+              <a:buNone/>
+            </a:pPr>
+            <a:r>
+              <a:rPr lang="en-US" sz="1300" i="1" dirty="0">
+                <a:solidFill>
+                  <a:srgbClr val="1C2833"/>
+                </a:solidFill>
+                <a:latin typeface="Georgia" pitchFamily="34" charset="0"/>
+                <a:ea typeface="Georgia" pitchFamily="34" charset="-122"/>
+                <a:cs typeface="Georgia" pitchFamily="34" charset="-120"/>
+              </a:rPr>
+              <a:t>pañcāṅga</a:t>
+            </a:r>
+            <a:pPr algn="l" indent="0" marL="0">
+              <a:lnSpc>
+                <a:spcPts val="1820"/>
+              </a:lnSpc>
+              <a:spcBef>
+                <a:spcPts val="300"/>
+              </a:spcBef>
+              <a:spcAft>
+                <a:spcPts val="300"/>
+              </a:spcAft>
+              <a:buNone/>
+            </a:pPr>
+            <a:r>
+              <a:rPr lang="en-US" sz="1300" dirty="0">
+                <a:solidFill>
+                  <a:srgbClr val="1C2833"/>
+                </a:solidFill>
+                <a:latin typeface="Georgia" pitchFamily="34" charset="0"/>
+                <a:ea typeface="Georgia" pitchFamily="34" charset="-122"/>
+                <a:cs typeface="Georgia" pitchFamily="34" charset="-120"/>
+              </a:rPr>
+              <a:t> tells you exactly when.</a:t>
+            </a:r>
+            <a:endParaRPr lang="en-US" sz="1300" dirty="0"/>
+          </a:p>
+        </p:txBody>
+      </p:sp>
+      <p:sp>
+        <p:nvSpPr>
+          <p:cNvPr id="10" name="Text 8"/>
+          <p:cNvSpPr/>
+          <p:nvPr/>
+        </p:nvSpPr>
+        <p:spPr>
+          <a:xfrm>
+            <a:off x="406301" y="4434929"/>
+            <a:ext cx="8498026" cy="213271"/>
+          </a:xfrm>
+          <a:prstGeom prst="rect">
+            <a:avLst/>
+          </a:prstGeom>
+          <a:noFill/>
+          <a:ln/>
+        </p:spPr>
+        <p:txBody>
+          <a:bodyPr wrap="square" lIns="0" tIns="0" rIns="0" bIns="0" rtlCol="0" anchor="t"/>
+          <a:lstStyle/>
+          <a:p>
+            <a:pPr algn="l" indent="0" marL="0">
+              <a:lnSpc>
+                <a:spcPts val="1680"/>
+              </a:lnSpc>
+              <a:spcBef>
+                <a:spcPts val="300"/>
+              </a:spcBef>
+              <a:spcAft>
+                <a:spcPts val="300"/>
+              </a:spcAft>
+              <a:buNone/>
+            </a:pPr>
+            <a:r>
+              <a:rPr lang="en-US" sz="1200" dirty="0">
+                <a:solidFill>
+                  <a:srgbClr val="1C2833"/>
+                </a:solidFill>
+                <a:latin typeface="Arial" pitchFamily="34" charset="0"/>
+                <a:ea typeface="Arial" pitchFamily="34" charset="-122"/>
+                <a:cs typeface="Arial" pitchFamily="34" charset="-120"/>
+              </a:rPr>
+              <a:t>Middle ·  · IKS Curriculum</a:t>
+            </a:r>
+            <a:endParaRPr lang="en-US" sz="1200" dirty="0"/>
+          </a:p>
+        </p:txBody>
+      </p:sp>
+    </p:spTree>
+  </p:cSld>
+  <p:clrMapOvr>
+    <a:masterClrMapping/>
+  </p:clrMapOvr>
+</p:sld>
+</file>
+
+<file path=ppt/slides/slide19.xml><?xml version="1.0" encoding="utf-8"?>
+<p:sld xmlns:a="http://schemas.openxmlformats.org/drawingml/2006/main" xmlns:r="http://schemas.openxmlformats.org/officeDocument/2006/relationships" xmlns:p="http://schemas.openxmlformats.org/presentationml/2006/main">
+  <p:cSld name="Slide 19">
+    <p:bg>
+      <p:bgPr>
+        <a:solidFill>
+          <a:srgbClr val="FFFFFF"/>
+        </a:solidFill>
+      </p:bgPr>
+    </p:bg>
+    <p:spTree>
+      <p:nvGrpSpPr>
+        <p:cNvPr id="1" name=""/>
+        <p:cNvGrpSpPr/>
+        <p:nvPr/>
+      </p:nvGrpSpPr>
+      <p:grpSpPr>
+        <a:xfrm>
+          <a:off x="0" y="0"/>
+          <a:ext cx="0" cy="0"/>
+          <a:chOff x="0" y="0"/>
+          <a:chExt cx="0" cy="0"/>
+        </a:xfrm>
+      </p:grpSpPr>
+      <p:sp>
+        <p:nvSpPr>
+          <p:cNvPr id="2" name="Text 0"/>
+          <p:cNvSpPr/>
+          <p:nvPr/>
+        </p:nvSpPr>
+        <p:spPr>
+          <a:xfrm>
+            <a:off x="0" y="0"/>
+            <a:ext cx="9144000" cy="101501"/>
+          </a:xfrm>
+          <a:prstGeom prst="rect">
+            <a:avLst/>
+          </a:prstGeom>
+          <a:solidFill>
+            <a:srgbClr val="277884"/>
+          </a:solidFill>
+          <a:ln/>
+        </p:spPr>
+        <p:txBody>
+          <a:bodyPr wrap="square" rtlCol="0" anchor="ctr"/>
+          <a:lstStyle/>
+          <a:p>
+            <a:pPr indent="0" marL="0">
+              <a:buNone/>
+            </a:pPr>
+            <a:endParaRPr lang="en-US" dirty="0"/>
+          </a:p>
+        </p:txBody>
+      </p:sp>
+      <p:sp>
+        <p:nvSpPr>
+          <p:cNvPr id="3" name="Text 1"/>
+          <p:cNvSpPr/>
+          <p:nvPr/>
+        </p:nvSpPr>
+        <p:spPr>
+          <a:xfrm>
+            <a:off x="406301" y="457051"/>
+            <a:ext cx="8498026" cy="274290"/>
+          </a:xfrm>
+          <a:prstGeom prst="rect">
+            <a:avLst/>
+          </a:prstGeom>
+          <a:noFill/>
+          <a:ln/>
+        </p:spPr>
+        <p:txBody>
+          <a:bodyPr wrap="square" lIns="0" tIns="0" rIns="0" bIns="0" rtlCol="0" anchor="t"/>
+          <a:lstStyle/>
+          <a:p>
+            <a:pPr algn="l" indent="0" marL="0">
+              <a:lnSpc>
+                <a:spcPts val="2160"/>
+              </a:lnSpc>
+              <a:spcBef>
+                <a:spcPts val="600"/>
+              </a:spcBef>
+              <a:spcAft>
+                <a:spcPts val="800"/>
+              </a:spcAft>
+              <a:buNone/>
+            </a:pPr>
+            <a:r>
+              <a:rPr lang="en-US" sz="1800" b="1" dirty="0">
+                <a:solidFill>
+                  <a:srgbClr val="FE4447"/>
+                </a:solidFill>
+                <a:latin typeface="Georgia" pitchFamily="34" charset="0"/>
+                <a:ea typeface="Georgia" pitchFamily="34" charset="-122"/>
+                <a:cs typeface="Georgia" pitchFamily="34" charset="-120"/>
+              </a:rPr>
+              <a:t>Homework</a:t>
+            </a:r>
+            <a:endParaRPr lang="en-US" sz="1800" dirty="0"/>
+          </a:p>
+        </p:txBody>
+      </p:sp>
+      <p:sp>
+        <p:nvSpPr>
+          <p:cNvPr id="4" name="Text 2"/>
+          <p:cNvSpPr/>
+          <p:nvPr/>
+        </p:nvSpPr>
+        <p:spPr>
+          <a:xfrm>
+            <a:off x="634901" y="883593"/>
+            <a:ext cx="8102798" cy="731341"/>
+          </a:xfrm>
+          <a:prstGeom prst="rect">
+            <a:avLst/>
+          </a:prstGeom>
+          <a:noFill/>
+          <a:ln/>
+        </p:spPr>
+        <p:txBody>
+          <a:bodyPr wrap="square" lIns="0" tIns="0" rIns="0" bIns="0" rtlCol="0" anchor="t"/>
+          <a:lstStyle/>
+          <a:p>
+            <a:pPr algn="l" marL="342900" indent="-342900">
+              <a:lnSpc>
+                <a:spcPts val="1620"/>
+              </a:lnSpc>
+              <a:spcAft>
+                <a:spcPts val="300"/>
+              </a:spcAft>
+              <a:buSzPct val="100000"/>
+              <a:buChar char="•"/>
+            </a:pPr>
+            <a:r>
+              <a:rPr lang="en-US" sz="1200" dirty="0">
+                <a:solidFill>
+                  <a:srgbClr val="1C2833"/>
+                </a:solidFill>
+                <a:latin typeface="Arial" pitchFamily="34" charset="0"/>
+                <a:ea typeface="Arial" pitchFamily="34" charset="-122"/>
+                <a:cs typeface="Arial" pitchFamily="34" charset="-120"/>
+              </a:rPr>
+              <a:t>Continue the Moon diary.</a:t>
+            </a:r>
+            <a:endParaRPr lang="en-US" sz="1200" dirty="0"/>
+          </a:p>
+          <a:p>
+            <a:pPr algn="l" marL="342900" indent="-342900">
+              <a:lnSpc>
+                <a:spcPts val="1620"/>
+              </a:lnSpc>
+              <a:spcAft>
+                <a:spcPts val="300"/>
+              </a:spcAft>
+              <a:buSzPct val="100000"/>
+              <a:buChar char="•"/>
+            </a:pPr>
+            <a:r>
+              <a:rPr lang="en-US" sz="1200" dirty="0">
+                <a:solidFill>
+                  <a:srgbClr val="1C2833"/>
+                </a:solidFill>
+                <a:latin typeface="Arial" pitchFamily="34" charset="0"/>
+                <a:ea typeface="Arial" pitchFamily="34" charset="-122"/>
+                <a:cs typeface="Arial" pitchFamily="34" charset="-120"/>
+              </a:rPr>
+              <a:t>Submit your </a:t>
+            </a:r>
+            <a:pPr algn="l" indent="0" marL="0">
+              <a:lnSpc>
+                <a:spcPts val="1620"/>
+              </a:lnSpc>
+              <a:spcAft>
+                <a:spcPts val="300"/>
+              </a:spcAft>
+              <a:buNone/>
+            </a:pPr>
+            <a:r>
+              <a:rPr lang="en-US" sz="1200" b="1" dirty="0">
+                <a:solidFill>
+                  <a:srgbClr val="1C2833"/>
+                </a:solidFill>
+                <a:latin typeface="Arial" pitchFamily="34" charset="0"/>
+                <a:ea typeface="Arial" pitchFamily="34" charset="-122"/>
+                <a:cs typeface="Arial" pitchFamily="34" charset="-120"/>
+              </a:rPr>
+              <a:t>project plan paragraph</a:t>
+            </a:r>
+            <a:pPr algn="l" indent="0" marL="0">
+              <a:lnSpc>
+                <a:spcPts val="1620"/>
+              </a:lnSpc>
+              <a:spcAft>
+                <a:spcPts val="300"/>
+              </a:spcAft>
+              <a:buNone/>
+            </a:pPr>
+            <a:r>
+              <a:rPr lang="en-US" sz="1200" dirty="0">
+                <a:solidFill>
+                  <a:srgbClr val="1C2833"/>
+                </a:solidFill>
+                <a:latin typeface="Arial" pitchFamily="34" charset="0"/>
+                <a:ea typeface="Arial" pitchFamily="34" charset="-122"/>
+                <a:cs typeface="Arial" pitchFamily="34" charset="-120"/>
+              </a:rPr>
+              <a:t> — 5–8 sentences stating which lunar phenomenon you'll cover (phases / eclipses / intercalary month / something else), in what format, and what your audience walks away with.</a:t>
             </a:r>
             <a:endParaRPr lang="en-US" sz="1200" dirty="0"/>
           </a:p>
@@ -3646,7 +7420,7 @@
                 <a:ea typeface="Georgia" pitchFamily="34" charset="-122"/>
                 <a:cs typeface="Georgia" pitchFamily="34" charset="-120"/>
               </a:rPr>
-              <a:t>Materials</a:t>
+              <a:t>Learning objective</a:t>
             </a:r>
             <a:endParaRPr lang="en-US" sz="1800" dirty="0"/>
           </a:p>
@@ -3661,6 +7435,146 @@
         <p:spPr>
           <a:xfrm>
             <a:off x="406301" y="870942"/>
+            <a:ext cx="8498026" cy="426541"/>
+          </a:xfrm>
+          <a:prstGeom prst="rect">
+            <a:avLst/>
+          </a:prstGeom>
+          <a:noFill/>
+          <a:ln/>
+        </p:spPr>
+        <p:txBody>
+          <a:bodyPr wrap="square" lIns="0" tIns="0" rIns="0" bIns="0" rtlCol="0" anchor="t"/>
+          <a:lstStyle/>
+          <a:p>
+            <a:pPr algn="l" indent="0" marL="0">
+              <a:lnSpc>
+                <a:spcPts val="1680"/>
+              </a:lnSpc>
+              <a:spcBef>
+                <a:spcPts val="300"/>
+              </a:spcBef>
+              <a:spcAft>
+                <a:spcPts val="300"/>
+              </a:spcAft>
+              <a:buNone/>
+            </a:pPr>
+            <a:r>
+              <a:rPr lang="en-US" sz="1200" dirty="0">
+                <a:solidFill>
+                  <a:srgbClr val="1C2833"/>
+                </a:solidFill>
+                <a:latin typeface="Arial" pitchFamily="34" charset="0"/>
+                <a:ea typeface="Arial" pitchFamily="34" charset="-122"/>
+                <a:cs typeface="Arial" pitchFamily="34" charset="-120"/>
+              </a:rPr>
+              <a:t>Students will name the 12 lunar months in order, explain how each month is named (after the </a:t>
+            </a:r>
+            <a:pPr algn="l" indent="0" marL="0">
+              <a:lnSpc>
+                <a:spcPts val="1680"/>
+              </a:lnSpc>
+              <a:spcBef>
+                <a:spcPts val="300"/>
+              </a:spcBef>
+              <a:spcAft>
+                <a:spcPts val="300"/>
+              </a:spcAft>
+              <a:buNone/>
+            </a:pPr>
+            <a:r>
+              <a:rPr lang="en-US" sz="1200" i="1" dirty="0">
+                <a:solidFill>
+                  <a:srgbClr val="1C2833"/>
+                </a:solidFill>
+                <a:latin typeface="Arial" pitchFamily="34" charset="0"/>
+                <a:ea typeface="Arial" pitchFamily="34" charset="-122"/>
+                <a:cs typeface="Arial" pitchFamily="34" charset="-120"/>
+              </a:rPr>
+              <a:t>nakṣatra</a:t>
+            </a:r>
+            <a:pPr algn="l" indent="0" marL="0">
+              <a:lnSpc>
+                <a:spcPts val="1680"/>
+              </a:lnSpc>
+              <a:spcBef>
+                <a:spcPts val="300"/>
+              </a:spcBef>
+              <a:spcAft>
+                <a:spcPts val="300"/>
+              </a:spcAft>
+              <a:buNone/>
+            </a:pPr>
+            <a:r>
+              <a:rPr lang="en-US" sz="1200" dirty="0">
+                <a:solidFill>
+                  <a:srgbClr val="1C2833"/>
+                </a:solidFill>
+                <a:latin typeface="Arial" pitchFamily="34" charset="0"/>
+                <a:ea typeface="Arial" pitchFamily="34" charset="-122"/>
+                <a:cs typeface="Arial" pitchFamily="34" charset="-120"/>
+              </a:rPr>
+              <a:t> of its </a:t>
+            </a:r>
+            <a:pPr algn="l" indent="0" marL="0">
+              <a:lnSpc>
+                <a:spcPts val="1680"/>
+              </a:lnSpc>
+              <a:spcBef>
+                <a:spcPts val="300"/>
+              </a:spcBef>
+              <a:spcAft>
+                <a:spcPts val="300"/>
+              </a:spcAft>
+              <a:buNone/>
+            </a:pPr>
+            <a:r>
+              <a:rPr lang="en-US" sz="1200" i="1" dirty="0">
+                <a:solidFill>
+                  <a:srgbClr val="1C2833"/>
+                </a:solidFill>
+                <a:latin typeface="Arial" pitchFamily="34" charset="0"/>
+                <a:ea typeface="Arial" pitchFamily="34" charset="-122"/>
+                <a:cs typeface="Arial" pitchFamily="34" charset="-120"/>
+              </a:rPr>
+              <a:t>pūrṇimā</a:t>
+            </a:r>
+            <a:pPr algn="l" indent="0" marL="0">
+              <a:lnSpc>
+                <a:spcPts val="1680"/>
+              </a:lnSpc>
+              <a:spcBef>
+                <a:spcPts val="300"/>
+              </a:spcBef>
+              <a:spcAft>
+                <a:spcPts val="300"/>
+              </a:spcAft>
+              <a:buNone/>
+            </a:pPr>
+            <a:r>
+              <a:rPr lang="en-US" sz="1200" dirty="0">
+                <a:solidFill>
+                  <a:srgbClr val="1C2833"/>
+                </a:solidFill>
+                <a:latin typeface="Arial" pitchFamily="34" charset="0"/>
+                <a:ea typeface="Arial" pitchFamily="34" charset="-122"/>
+                <a:cs typeface="Arial" pitchFamily="34" charset="-120"/>
+              </a:rPr>
+              <a:t>), and link at least three festivals to their tithi-and-month positions.</a:t>
+            </a:r>
+            <a:endParaRPr lang="en-US" sz="1200" dirty="0"/>
+          </a:p>
+        </p:txBody>
+      </p:sp>
+      <p:sp>
+        <p:nvSpPr>
+          <p:cNvPr id="5" name="Text 3"/>
+          <p:cNvSpPr/>
+          <p:nvPr/>
+        </p:nvSpPr>
+        <p:spPr>
+          <a:xfrm>
+            <a:off x="406301" y="4434929"/>
             <a:ext cx="8498026" cy="213271"/>
           </a:xfrm>
           <a:prstGeom prst="rect">
@@ -3694,7 +7608,1163 @@
                 <a:ea typeface="Arial" pitchFamily="34" charset="-122"/>
                 <a:cs typeface="Arial" pitchFamily="34" charset="-120"/>
               </a:rPr>
-              <a:t>– Board with a 12-row table ready – A printed list of major festivals across the 12 lunar months (one per pair) – Notebooks</a:t>
+              <a:t>Middle ·  · IKS Curriculum</a:t>
+            </a:r>
+            <a:endParaRPr lang="en-US" sz="1200" dirty="0"/>
+          </a:p>
+        </p:txBody>
+      </p:sp>
+    </p:spTree>
+  </p:cSld>
+  <p:clrMapOvr>
+    <a:masterClrMapping/>
+  </p:clrMapOvr>
+</p:sld>
+</file>
+
+<file path=ppt/slides/slide20.xml><?xml version="1.0" encoding="utf-8"?>
+<p:sld xmlns:a="http://schemas.openxmlformats.org/drawingml/2006/main" xmlns:r="http://schemas.openxmlformats.org/officeDocument/2006/relationships" xmlns:p="http://schemas.openxmlformats.org/presentationml/2006/main">
+  <p:cSld name="Slide 20">
+    <p:bg>
+      <p:bgPr>
+        <a:solidFill>
+          <a:srgbClr val="FFFFFF"/>
+        </a:solidFill>
+      </p:bgPr>
+    </p:bg>
+    <p:spTree>
+      <p:nvGrpSpPr>
+        <p:cNvPr id="1" name=""/>
+        <p:cNvGrpSpPr/>
+        <p:nvPr/>
+      </p:nvGrpSpPr>
+      <p:grpSpPr>
+        <a:xfrm>
+          <a:off x="0" y="0"/>
+          <a:ext cx="0" cy="0"/>
+          <a:chOff x="0" y="0"/>
+          <a:chExt cx="0" cy="0"/>
+        </a:xfrm>
+      </p:grpSpPr>
+      <p:sp>
+        <p:nvSpPr>
+          <p:cNvPr id="2" name="Text 0"/>
+          <p:cNvSpPr/>
+          <p:nvPr/>
+        </p:nvSpPr>
+        <p:spPr>
+          <a:xfrm>
+            <a:off x="0" y="0"/>
+            <a:ext cx="9144000" cy="101501"/>
+          </a:xfrm>
+          <a:prstGeom prst="rect">
+            <a:avLst/>
+          </a:prstGeom>
+          <a:solidFill>
+            <a:srgbClr val="277884"/>
+          </a:solidFill>
+          <a:ln/>
+        </p:spPr>
+        <p:txBody>
+          <a:bodyPr wrap="square" rtlCol="0" anchor="ctr"/>
+          <a:lstStyle/>
+          <a:p>
+            <a:pPr indent="0" marL="0">
+              <a:buNone/>
+            </a:pPr>
+            <a:endParaRPr lang="en-US" dirty="0"/>
+          </a:p>
+        </p:txBody>
+      </p:sp>
+      <p:sp>
+        <p:nvSpPr>
+          <p:cNvPr id="3" name="Text 1"/>
+          <p:cNvSpPr/>
+          <p:nvPr/>
+        </p:nvSpPr>
+        <p:spPr>
+          <a:xfrm>
+            <a:off x="406301" y="457051"/>
+            <a:ext cx="8498026" cy="274290"/>
+          </a:xfrm>
+          <a:prstGeom prst="rect">
+            <a:avLst/>
+          </a:prstGeom>
+          <a:noFill/>
+          <a:ln/>
+        </p:spPr>
+        <p:txBody>
+          <a:bodyPr wrap="square" lIns="0" tIns="0" rIns="0" bIns="0" rtlCol="0" anchor="t"/>
+          <a:lstStyle/>
+          <a:p>
+            <a:pPr algn="l" indent="0" marL="0">
+              <a:lnSpc>
+                <a:spcPts val="2160"/>
+              </a:lnSpc>
+              <a:spcBef>
+                <a:spcPts val="600"/>
+              </a:spcBef>
+              <a:spcAft>
+                <a:spcPts val="800"/>
+              </a:spcAft>
+              <a:buNone/>
+            </a:pPr>
+            <a:r>
+              <a:rPr lang="en-US" sz="1800" b="1" dirty="0">
+                <a:solidFill>
+                  <a:srgbClr val="FE4447"/>
+                </a:solidFill>
+                <a:latin typeface="Georgia" pitchFamily="34" charset="0"/>
+                <a:ea typeface="Georgia" pitchFamily="34" charset="-122"/>
+                <a:cs typeface="Georgia" pitchFamily="34" charset="-120"/>
+              </a:rPr>
+              <a:t>Differentiation</a:t>
+            </a:r>
+            <a:endParaRPr lang="en-US" sz="1800" dirty="0"/>
+          </a:p>
+        </p:txBody>
+      </p:sp>
+      <p:sp>
+        <p:nvSpPr>
+          <p:cNvPr id="4" name="Text 2"/>
+          <p:cNvSpPr/>
+          <p:nvPr/>
+        </p:nvSpPr>
+        <p:spPr>
+          <a:xfrm>
+            <a:off x="634901" y="883593"/>
+            <a:ext cx="8102798" cy="731341"/>
+          </a:xfrm>
+          <a:prstGeom prst="rect">
+            <a:avLst/>
+          </a:prstGeom>
+          <a:noFill/>
+          <a:ln/>
+        </p:spPr>
+        <p:txBody>
+          <a:bodyPr wrap="square" lIns="0" tIns="0" rIns="0" bIns="0" rtlCol="0" anchor="t"/>
+          <a:lstStyle/>
+          <a:p>
+            <a:pPr algn="l" marL="342900" indent="-342900">
+              <a:lnSpc>
+                <a:spcPts val="1620"/>
+              </a:lnSpc>
+              <a:spcAft>
+                <a:spcPts val="300"/>
+              </a:spcAft>
+              <a:buSzPct val="100000"/>
+              <a:buChar char="•"/>
+            </a:pPr>
+            <a:r>
+              <a:rPr lang="en-US" sz="1200" b="1" dirty="0">
+                <a:solidFill>
+                  <a:srgbClr val="1C2833"/>
+                </a:solidFill>
+                <a:latin typeface="Arial" pitchFamily="34" charset="0"/>
+                <a:ea typeface="Arial" pitchFamily="34" charset="-122"/>
+                <a:cs typeface="Arial" pitchFamily="34" charset="-120"/>
+              </a:rPr>
+              <a:t>One tier up:</a:t>
+            </a:r>
+            <a:pPr algn="l" indent="0" marL="0">
+              <a:lnSpc>
+                <a:spcPts val="1620"/>
+              </a:lnSpc>
+              <a:spcAft>
+                <a:spcPts val="300"/>
+              </a:spcAft>
+              <a:buNone/>
+            </a:pPr>
+            <a:r>
+              <a:rPr lang="en-US" sz="1200" dirty="0">
+                <a:solidFill>
+                  <a:srgbClr val="1C2833"/>
+                </a:solidFill>
+                <a:latin typeface="Arial" pitchFamily="34" charset="0"/>
+                <a:ea typeface="Arial" pitchFamily="34" charset="-122"/>
+                <a:cs typeface="Arial" pitchFamily="34" charset="-120"/>
+              </a:rPr>
+              <a:t> </a:t>
+            </a:r>
+            <a:pPr algn="l" indent="0" marL="0">
+              <a:lnSpc>
+                <a:spcPts val="1620"/>
+              </a:lnSpc>
+              <a:spcAft>
+                <a:spcPts val="300"/>
+              </a:spcAft>
+              <a:buNone/>
+            </a:pPr>
+            <a:r>
+              <a:rPr lang="en-US" sz="1200" i="1" dirty="0">
+                <a:solidFill>
+                  <a:srgbClr val="1C2833"/>
+                </a:solidFill>
+                <a:latin typeface="Arial" pitchFamily="34" charset="0"/>
+                <a:ea typeface="Arial" pitchFamily="34" charset="-122"/>
+                <a:cs typeface="Arial" pitchFamily="34" charset="-120"/>
+              </a:rPr>
+              <a:t>Adhika māsa</a:t>
+            </a:r>
+            <a:pPr algn="l" indent="0" marL="0">
+              <a:lnSpc>
+                <a:spcPts val="1620"/>
+              </a:lnSpc>
+              <a:spcAft>
+                <a:spcPts val="300"/>
+              </a:spcAft>
+              <a:buNone/>
+            </a:pPr>
+            <a:r>
+              <a:rPr lang="en-US" sz="1200" dirty="0">
+                <a:solidFill>
+                  <a:srgbClr val="1C2833"/>
+                </a:solidFill>
+                <a:latin typeface="Arial" pitchFamily="34" charset="0"/>
+                <a:ea typeface="Arial" pitchFamily="34" charset="-122"/>
+                <a:cs typeface="Arial" pitchFamily="34" charset="-120"/>
+              </a:rPr>
+              <a:t> deep-dive. Look up the rule: an </a:t>
+            </a:r>
+            <a:pPr algn="l" indent="0" marL="0">
+              <a:lnSpc>
+                <a:spcPts val="1620"/>
+              </a:lnSpc>
+              <a:spcAft>
+                <a:spcPts val="300"/>
+              </a:spcAft>
+              <a:buNone/>
+            </a:pPr>
+            <a:r>
+              <a:rPr lang="en-US" sz="1200" i="1" dirty="0">
+                <a:solidFill>
+                  <a:srgbClr val="1C2833"/>
+                </a:solidFill>
+                <a:latin typeface="Arial" pitchFamily="34" charset="0"/>
+                <a:ea typeface="Arial" pitchFamily="34" charset="-122"/>
+                <a:cs typeface="Arial" pitchFamily="34" charset="-120"/>
+              </a:rPr>
+              <a:t>adhika māsa</a:t>
+            </a:r>
+            <a:pPr algn="l" indent="0" marL="0">
+              <a:lnSpc>
+                <a:spcPts val="1620"/>
+              </a:lnSpc>
+              <a:spcAft>
+                <a:spcPts val="300"/>
+              </a:spcAft>
+              <a:buNone/>
+            </a:pPr>
+            <a:r>
+              <a:rPr lang="en-US" sz="1200" dirty="0">
+                <a:solidFill>
+                  <a:srgbClr val="1C2833"/>
+                </a:solidFill>
+                <a:latin typeface="Arial" pitchFamily="34" charset="0"/>
+                <a:ea typeface="Arial" pitchFamily="34" charset="-122"/>
+                <a:cs typeface="Arial" pitchFamily="34" charset="-120"/>
+              </a:rPr>
+              <a:t> is a lunar month in which no </a:t>
+            </a:r>
+            <a:pPr algn="l" indent="0" marL="0">
+              <a:lnSpc>
+                <a:spcPts val="1620"/>
+              </a:lnSpc>
+              <a:spcAft>
+                <a:spcPts val="300"/>
+              </a:spcAft>
+              <a:buNone/>
+            </a:pPr>
+            <a:r>
+              <a:rPr lang="en-US" sz="1200" i="1" dirty="0">
+                <a:solidFill>
+                  <a:srgbClr val="1C2833"/>
+                </a:solidFill>
+                <a:latin typeface="Arial" pitchFamily="34" charset="0"/>
+                <a:ea typeface="Arial" pitchFamily="34" charset="-122"/>
+                <a:cs typeface="Arial" pitchFamily="34" charset="-120"/>
+              </a:rPr>
+              <a:t>saṁkrānti</a:t>
+            </a:r>
+            <a:pPr algn="l" indent="0" marL="0">
+              <a:lnSpc>
+                <a:spcPts val="1620"/>
+              </a:lnSpc>
+              <a:spcAft>
+                <a:spcPts val="300"/>
+              </a:spcAft>
+              <a:buNone/>
+            </a:pPr>
+            <a:r>
+              <a:rPr lang="en-US" sz="1200" dirty="0">
+                <a:solidFill>
+                  <a:srgbClr val="1C2833"/>
+                </a:solidFill>
+                <a:latin typeface="Arial" pitchFamily="34" charset="0"/>
+                <a:ea typeface="Arial" pitchFamily="34" charset="-122"/>
+                <a:cs typeface="Arial" pitchFamily="34" charset="-120"/>
+              </a:rPr>
+              <a:t> (Sun's entry into a new zodiac sign) occurs. Why does the rule produce ~7 extra months in 19 years?</a:t>
+            </a:r>
+            <a:endParaRPr lang="en-US" sz="1200" dirty="0"/>
+          </a:p>
+          <a:p>
+            <a:pPr algn="l" marL="342900" indent="-342900">
+              <a:lnSpc>
+                <a:spcPts val="1620"/>
+              </a:lnSpc>
+              <a:spcAft>
+                <a:spcPts val="300"/>
+              </a:spcAft>
+              <a:buSzPct val="100000"/>
+              <a:buChar char="•"/>
+            </a:pPr>
+            <a:r>
+              <a:rPr lang="en-US" sz="1200" b="1" dirty="0">
+                <a:solidFill>
+                  <a:srgbClr val="1C2833"/>
+                </a:solidFill>
+                <a:latin typeface="Arial" pitchFamily="34" charset="0"/>
+                <a:ea typeface="Arial" pitchFamily="34" charset="-122"/>
+                <a:cs typeface="Arial" pitchFamily="34" charset="-120"/>
+              </a:rPr>
+              <a:t>One tier down:</a:t>
+            </a:r>
+            <a:pPr algn="l" indent="0" marL="0">
+              <a:lnSpc>
+                <a:spcPts val="1620"/>
+              </a:lnSpc>
+              <a:spcAft>
+                <a:spcPts val="300"/>
+              </a:spcAft>
+              <a:buNone/>
+            </a:pPr>
+            <a:r>
+              <a:rPr lang="en-US" sz="1200" dirty="0">
+                <a:solidFill>
+                  <a:srgbClr val="1C2833"/>
+                </a:solidFill>
+                <a:latin typeface="Arial" pitchFamily="34" charset="0"/>
+                <a:ea typeface="Arial" pitchFamily="34" charset="-122"/>
+                <a:cs typeface="Arial" pitchFamily="34" charset="-120"/>
+              </a:rPr>
+              <a:t> Memorise only the first 6 month names this week. The rest can come during the project.</a:t>
+            </a:r>
+            <a:endParaRPr lang="en-US" sz="1200" dirty="0"/>
+          </a:p>
+        </p:txBody>
+      </p:sp>
+      <p:sp>
+        <p:nvSpPr>
+          <p:cNvPr id="5" name="Text 3"/>
+          <p:cNvSpPr/>
+          <p:nvPr/>
+        </p:nvSpPr>
+        <p:spPr>
+          <a:xfrm>
+            <a:off x="406301" y="4434929"/>
+            <a:ext cx="8498026" cy="213271"/>
+          </a:xfrm>
+          <a:prstGeom prst="rect">
+            <a:avLst/>
+          </a:prstGeom>
+          <a:noFill/>
+          <a:ln/>
+        </p:spPr>
+        <p:txBody>
+          <a:bodyPr wrap="square" lIns="0" tIns="0" rIns="0" bIns="0" rtlCol="0" anchor="t"/>
+          <a:lstStyle/>
+          <a:p>
+            <a:pPr algn="l" indent="0" marL="0">
+              <a:lnSpc>
+                <a:spcPts val="1680"/>
+              </a:lnSpc>
+              <a:spcBef>
+                <a:spcPts val="300"/>
+              </a:spcBef>
+              <a:spcAft>
+                <a:spcPts val="300"/>
+              </a:spcAft>
+              <a:buNone/>
+            </a:pPr>
+            <a:r>
+              <a:rPr lang="en-US" sz="1200" dirty="0">
+                <a:solidFill>
+                  <a:srgbClr val="1C2833"/>
+                </a:solidFill>
+                <a:latin typeface="Arial" pitchFamily="34" charset="0"/>
+                <a:ea typeface="Arial" pitchFamily="34" charset="-122"/>
+                <a:cs typeface="Arial" pitchFamily="34" charset="-120"/>
+              </a:rPr>
+              <a:t>Middle ·  · IKS Curriculum</a:t>
+            </a:r>
+            <a:endParaRPr lang="en-US" sz="1200" dirty="0"/>
+          </a:p>
+        </p:txBody>
+      </p:sp>
+    </p:spTree>
+  </p:cSld>
+  <p:clrMapOvr>
+    <a:masterClrMapping/>
+  </p:clrMapOvr>
+</p:sld>
+</file>
+
+<file path=ppt/slides/slide21.xml><?xml version="1.0" encoding="utf-8"?>
+<p:sld xmlns:a="http://schemas.openxmlformats.org/drawingml/2006/main" xmlns:r="http://schemas.openxmlformats.org/officeDocument/2006/relationships" xmlns:p="http://schemas.openxmlformats.org/presentationml/2006/main">
+  <p:cSld name="Slide 21">
+    <p:bg>
+      <p:bgPr>
+        <a:solidFill>
+          <a:srgbClr val="FFFFFF"/>
+        </a:solidFill>
+      </p:bgPr>
+    </p:bg>
+    <p:spTree>
+      <p:nvGrpSpPr>
+        <p:cNvPr id="1" name=""/>
+        <p:cNvGrpSpPr/>
+        <p:nvPr/>
+      </p:nvGrpSpPr>
+      <p:grpSpPr>
+        <a:xfrm>
+          <a:off x="0" y="0"/>
+          <a:ext cx="0" cy="0"/>
+          <a:chOff x="0" y="0"/>
+          <a:chExt cx="0" cy="0"/>
+        </a:xfrm>
+      </p:grpSpPr>
+      <p:sp>
+        <p:nvSpPr>
+          <p:cNvPr id="2" name="Text 0"/>
+          <p:cNvSpPr/>
+          <p:nvPr/>
+        </p:nvSpPr>
+        <p:spPr>
+          <a:xfrm>
+            <a:off x="0" y="0"/>
+            <a:ext cx="9144000" cy="101501"/>
+          </a:xfrm>
+          <a:prstGeom prst="rect">
+            <a:avLst/>
+          </a:prstGeom>
+          <a:solidFill>
+            <a:srgbClr val="277884"/>
+          </a:solidFill>
+          <a:ln/>
+        </p:spPr>
+        <p:txBody>
+          <a:bodyPr wrap="square" rtlCol="0" anchor="ctr"/>
+          <a:lstStyle/>
+          <a:p>
+            <a:pPr indent="0" marL="0">
+              <a:buNone/>
+            </a:pPr>
+            <a:endParaRPr lang="en-US" dirty="0"/>
+          </a:p>
+        </p:txBody>
+      </p:sp>
+      <p:sp>
+        <p:nvSpPr>
+          <p:cNvPr id="3" name="Text 1"/>
+          <p:cNvSpPr/>
+          <p:nvPr/>
+        </p:nvSpPr>
+        <p:spPr>
+          <a:xfrm>
+            <a:off x="406301" y="457051"/>
+            <a:ext cx="8498026" cy="274290"/>
+          </a:xfrm>
+          <a:prstGeom prst="rect">
+            <a:avLst/>
+          </a:prstGeom>
+          <a:noFill/>
+          <a:ln/>
+        </p:spPr>
+        <p:txBody>
+          <a:bodyPr wrap="square" lIns="0" tIns="0" rIns="0" bIns="0" rtlCol="0" anchor="t"/>
+          <a:lstStyle/>
+          <a:p>
+            <a:pPr algn="l" indent="0" marL="0">
+              <a:lnSpc>
+                <a:spcPts val="2160"/>
+              </a:lnSpc>
+              <a:spcBef>
+                <a:spcPts val="600"/>
+              </a:spcBef>
+              <a:spcAft>
+                <a:spcPts val="800"/>
+              </a:spcAft>
+              <a:buNone/>
+            </a:pPr>
+            <a:r>
+              <a:rPr lang="en-US" sz="1800" b="1" dirty="0">
+                <a:solidFill>
+                  <a:srgbClr val="FE4447"/>
+                </a:solidFill>
+                <a:latin typeface="Georgia" pitchFamily="34" charset="0"/>
+                <a:ea typeface="Georgia" pitchFamily="34" charset="-122"/>
+                <a:cs typeface="Georgia" pitchFamily="34" charset="-120"/>
+              </a:rPr>
+              <a:t>Teacher notes</a:t>
+            </a:r>
+            <a:endParaRPr lang="en-US" sz="1800" dirty="0"/>
+          </a:p>
+        </p:txBody>
+      </p:sp>
+      <p:sp>
+        <p:nvSpPr>
+          <p:cNvPr id="4" name="Text 2"/>
+          <p:cNvSpPr/>
+          <p:nvPr/>
+        </p:nvSpPr>
+        <p:spPr>
+          <a:xfrm>
+            <a:off x="634901" y="883593"/>
+            <a:ext cx="8102798" cy="1386483"/>
+          </a:xfrm>
+          <a:prstGeom prst="rect">
+            <a:avLst/>
+          </a:prstGeom>
+          <a:noFill/>
+          <a:ln/>
+        </p:spPr>
+        <p:txBody>
+          <a:bodyPr wrap="square" lIns="0" tIns="0" rIns="0" bIns="0" rtlCol="0" anchor="t"/>
+          <a:lstStyle/>
+          <a:p>
+            <a:pPr algn="l" marL="342900" indent="-342900">
+              <a:lnSpc>
+                <a:spcPts val="1620"/>
+              </a:lnSpc>
+              <a:spcAft>
+                <a:spcPts val="300"/>
+              </a:spcAft>
+              <a:buSzPct val="100000"/>
+              <a:buChar char="•"/>
+            </a:pPr>
+            <a:r>
+              <a:rPr lang="en-US" sz="1200" dirty="0">
+                <a:solidFill>
+                  <a:srgbClr val="1C2833"/>
+                </a:solidFill>
+                <a:latin typeface="Arial" pitchFamily="34" charset="0"/>
+                <a:ea typeface="Arial" pitchFamily="34" charset="-122"/>
+                <a:cs typeface="Arial" pitchFamily="34" charset="-120"/>
+              </a:rPr>
+              <a:t>The </a:t>
+            </a:r>
+            <a:pPr algn="l" indent="0" marL="0">
+              <a:lnSpc>
+                <a:spcPts val="1620"/>
+              </a:lnSpc>
+              <a:spcAft>
+                <a:spcPts val="300"/>
+              </a:spcAft>
+              <a:buNone/>
+            </a:pPr>
+            <a:r>
+              <a:rPr lang="en-US" sz="1200" i="1" dirty="0">
+                <a:solidFill>
+                  <a:srgbClr val="1C2833"/>
+                </a:solidFill>
+                <a:latin typeface="Arial" pitchFamily="34" charset="0"/>
+                <a:ea typeface="Arial" pitchFamily="34" charset="-122"/>
+                <a:cs typeface="Arial" pitchFamily="34" charset="-120"/>
+              </a:rPr>
+              <a:t>amānta</a:t>
+            </a:r>
+            <a:pPr algn="l" indent="0" marL="0">
+              <a:lnSpc>
+                <a:spcPts val="1620"/>
+              </a:lnSpc>
+              <a:spcAft>
+                <a:spcPts val="300"/>
+              </a:spcAft>
+              <a:buNone/>
+            </a:pPr>
+            <a:r>
+              <a:rPr lang="en-US" sz="1200" dirty="0">
+                <a:solidFill>
+                  <a:srgbClr val="1C2833"/>
+                </a:solidFill>
+                <a:latin typeface="Arial" pitchFamily="34" charset="0"/>
+                <a:ea typeface="Arial" pitchFamily="34" charset="-122"/>
+                <a:cs typeface="Arial" pitchFamily="34" charset="-120"/>
+              </a:rPr>
+              <a:t> / </a:t>
+            </a:r>
+            <a:pPr algn="l" indent="0" marL="0">
+              <a:lnSpc>
+                <a:spcPts val="1620"/>
+              </a:lnSpc>
+              <a:spcAft>
+                <a:spcPts val="300"/>
+              </a:spcAft>
+              <a:buNone/>
+            </a:pPr>
+            <a:r>
+              <a:rPr lang="en-US" sz="1200" i="1" dirty="0">
+                <a:solidFill>
+                  <a:srgbClr val="1C2833"/>
+                </a:solidFill>
+                <a:latin typeface="Arial" pitchFamily="34" charset="0"/>
+                <a:ea typeface="Arial" pitchFamily="34" charset="-122"/>
+                <a:cs typeface="Arial" pitchFamily="34" charset="-120"/>
+              </a:rPr>
+              <a:t>pūrṇimānta</a:t>
+            </a:r>
+            <a:pPr algn="l" indent="0" marL="0">
+              <a:lnSpc>
+                <a:spcPts val="1620"/>
+              </a:lnSpc>
+              <a:spcAft>
+                <a:spcPts val="300"/>
+              </a:spcAft>
+              <a:buNone/>
+            </a:pPr>
+            <a:r>
+              <a:rPr lang="en-US" sz="1200" dirty="0">
+                <a:solidFill>
+                  <a:srgbClr val="1C2833"/>
+                </a:solidFill>
+                <a:latin typeface="Arial" pitchFamily="34" charset="0"/>
+                <a:ea typeface="Arial" pitchFamily="34" charset="-122"/>
+                <a:cs typeface="Arial" pitchFamily="34" charset="-120"/>
+              </a:rPr>
+              <a:t> distinction confuses everyone the first time. It's OK to leave students slightly fuzzy on it — the key insight is that conventions vary regionally, and "the calendar" isn't one fixed thing.</a:t>
+            </a:r>
+            <a:endParaRPr lang="en-US" sz="1200" dirty="0"/>
+          </a:p>
+          <a:p>
+            <a:pPr algn="l" marL="342900" indent="-342900">
+              <a:lnSpc>
+                <a:spcPts val="1620"/>
+              </a:lnSpc>
+              <a:spcAft>
+                <a:spcPts val="300"/>
+              </a:spcAft>
+              <a:buSzPct val="100000"/>
+              <a:buChar char="•"/>
+            </a:pPr>
+            <a:r>
+              <a:rPr lang="en-US" sz="1200" dirty="0">
+                <a:solidFill>
+                  <a:srgbClr val="1C2833"/>
+                </a:solidFill>
+                <a:latin typeface="Arial" pitchFamily="34" charset="0"/>
+                <a:ea typeface="Arial" pitchFamily="34" charset="-122"/>
+                <a:cs typeface="Arial" pitchFamily="34" charset="-120"/>
+              </a:rPr>
+              <a:t>Some students will know a festival under a regional name (e.g. </a:t>
+            </a:r>
+            <a:pPr algn="l" indent="0" marL="0">
+              <a:lnSpc>
+                <a:spcPts val="1620"/>
+              </a:lnSpc>
+              <a:spcAft>
+                <a:spcPts val="300"/>
+              </a:spcAft>
+              <a:buNone/>
+            </a:pPr>
+            <a:r>
+              <a:rPr lang="en-US" sz="1200" i="1" dirty="0">
+                <a:solidFill>
+                  <a:srgbClr val="1C2833"/>
+                </a:solidFill>
+                <a:latin typeface="Arial" pitchFamily="34" charset="0"/>
+                <a:ea typeface="Arial" pitchFamily="34" charset="-122"/>
+                <a:cs typeface="Arial" pitchFamily="34" charset="-120"/>
+              </a:rPr>
+              <a:t>Gudi Pādvā</a:t>
+            </a:r>
+            <a:pPr algn="l" indent="0" marL="0">
+              <a:lnSpc>
+                <a:spcPts val="1620"/>
+              </a:lnSpc>
+              <a:spcAft>
+                <a:spcPts val="300"/>
+              </a:spcAft>
+              <a:buNone/>
+            </a:pPr>
+            <a:r>
+              <a:rPr lang="en-US" sz="1200" dirty="0">
+                <a:solidFill>
+                  <a:srgbClr val="1C2833"/>
+                </a:solidFill>
+                <a:latin typeface="Arial" pitchFamily="34" charset="0"/>
+                <a:ea typeface="Arial" pitchFamily="34" charset="-122"/>
+                <a:cs typeface="Arial" pitchFamily="34" charset="-120"/>
+              </a:rPr>
+              <a:t> vs. </a:t>
+            </a:r>
+            <a:pPr algn="l" indent="0" marL="0">
+              <a:lnSpc>
+                <a:spcPts val="1620"/>
+              </a:lnSpc>
+              <a:spcAft>
+                <a:spcPts val="300"/>
+              </a:spcAft>
+              <a:buNone/>
+            </a:pPr>
+            <a:r>
+              <a:rPr lang="en-US" sz="1200" i="1" dirty="0">
+                <a:solidFill>
+                  <a:srgbClr val="1C2833"/>
+                </a:solidFill>
+                <a:latin typeface="Arial" pitchFamily="34" charset="0"/>
+                <a:ea typeface="Arial" pitchFamily="34" charset="-122"/>
+                <a:cs typeface="Arial" pitchFamily="34" charset="-120"/>
+              </a:rPr>
+              <a:t>Ugādi</a:t>
+            </a:r>
+            <a:pPr algn="l" indent="0" marL="0">
+              <a:lnSpc>
+                <a:spcPts val="1620"/>
+              </a:lnSpc>
+              <a:spcAft>
+                <a:spcPts val="300"/>
+              </a:spcAft>
+              <a:buNone/>
+            </a:pPr>
+            <a:r>
+              <a:rPr lang="en-US" sz="1200" dirty="0">
+                <a:solidFill>
+                  <a:srgbClr val="1C2833"/>
+                </a:solidFill>
+                <a:latin typeface="Arial" pitchFamily="34" charset="0"/>
+                <a:ea typeface="Arial" pitchFamily="34" charset="-122"/>
+                <a:cs typeface="Arial" pitchFamily="34" charset="-120"/>
+              </a:rPr>
+              <a:t> — both </a:t>
+            </a:r>
+            <a:pPr algn="l" indent="0" marL="0">
+              <a:lnSpc>
+                <a:spcPts val="1620"/>
+              </a:lnSpc>
+              <a:spcAft>
+                <a:spcPts val="300"/>
+              </a:spcAft>
+              <a:buNone/>
+            </a:pPr>
+            <a:r>
+              <a:rPr lang="en-US" sz="1200" i="1" dirty="0">
+                <a:solidFill>
+                  <a:srgbClr val="1C2833"/>
+                </a:solidFill>
+                <a:latin typeface="Arial" pitchFamily="34" charset="0"/>
+                <a:ea typeface="Arial" pitchFamily="34" charset="-122"/>
+                <a:cs typeface="Arial" pitchFamily="34" charset="-120"/>
+              </a:rPr>
+              <a:t>Caitra</a:t>
+            </a:r>
+            <a:pPr algn="l" indent="0" marL="0">
+              <a:lnSpc>
+                <a:spcPts val="1620"/>
+              </a:lnSpc>
+              <a:spcAft>
+                <a:spcPts val="300"/>
+              </a:spcAft>
+              <a:buNone/>
+            </a:pPr>
+            <a:r>
+              <a:rPr lang="en-US" sz="1200" dirty="0">
+                <a:solidFill>
+                  <a:srgbClr val="1C2833"/>
+                </a:solidFill>
+                <a:latin typeface="Arial" pitchFamily="34" charset="0"/>
+                <a:ea typeface="Arial" pitchFamily="34" charset="-122"/>
+                <a:cs typeface="Arial" pitchFamily="34" charset="-120"/>
+              </a:rPr>
+              <a:t> śukla pratipadā). Honour both.</a:t>
+            </a:r>
+            <a:endParaRPr lang="en-US" sz="1200" dirty="0"/>
+          </a:p>
+          <a:p>
+            <a:pPr algn="l" marL="342900" indent="-342900">
+              <a:lnSpc>
+                <a:spcPts val="1620"/>
+              </a:lnSpc>
+              <a:spcAft>
+                <a:spcPts val="300"/>
+              </a:spcAft>
+              <a:buSzPct val="100000"/>
+              <a:buChar char="•"/>
+            </a:pPr>
+            <a:r>
+              <a:rPr lang="en-US" sz="1200" dirty="0">
+                <a:solidFill>
+                  <a:srgbClr val="1C2833"/>
+                </a:solidFill>
+                <a:latin typeface="Arial" pitchFamily="34" charset="0"/>
+                <a:ea typeface="Arial" pitchFamily="34" charset="-122"/>
+                <a:cs typeface="Arial" pitchFamily="34" charset="-120"/>
+              </a:rPr>
+              <a:t>The "12 months are named after nakṣatras" point doesn't need full nakṣatra coverage today — that comes in a later module. Today we just say </a:t>
+            </a:r>
+            <a:pPr algn="l" indent="0" marL="0">
+              <a:lnSpc>
+                <a:spcPts val="1620"/>
+              </a:lnSpc>
+              <a:spcAft>
+                <a:spcPts val="300"/>
+              </a:spcAft>
+              <a:buNone/>
+            </a:pPr>
+            <a:r>
+              <a:rPr lang="en-US" sz="1200" i="1" dirty="0">
+                <a:solidFill>
+                  <a:srgbClr val="1C2833"/>
+                </a:solidFill>
+                <a:latin typeface="Arial" pitchFamily="34" charset="0"/>
+                <a:ea typeface="Arial" pitchFamily="34" charset="-122"/>
+                <a:cs typeface="Arial" pitchFamily="34" charset="-120"/>
+              </a:rPr>
+              <a:t>what</a:t>
+            </a:r>
+            <a:pPr algn="l" indent="0" marL="0">
+              <a:lnSpc>
+                <a:spcPts val="1620"/>
+              </a:lnSpc>
+              <a:spcAft>
+                <a:spcPts val="300"/>
+              </a:spcAft>
+              <a:buNone/>
+            </a:pPr>
+            <a:r>
+              <a:rPr lang="en-US" sz="1200" dirty="0">
+                <a:solidFill>
+                  <a:srgbClr val="1C2833"/>
+                </a:solidFill>
+                <a:latin typeface="Arial" pitchFamily="34" charset="0"/>
+                <a:ea typeface="Arial" pitchFamily="34" charset="-122"/>
+                <a:cs typeface="Arial" pitchFamily="34" charset="-120"/>
+              </a:rPr>
+              <a:t> the naming convention is.</a:t>
+            </a:r>
+            <a:endParaRPr lang="en-US" sz="1200" dirty="0"/>
+          </a:p>
+        </p:txBody>
+      </p:sp>
+      <p:sp>
+        <p:nvSpPr>
+          <p:cNvPr id="5" name="Text 3"/>
+          <p:cNvSpPr/>
+          <p:nvPr/>
+        </p:nvSpPr>
+        <p:spPr>
+          <a:xfrm>
+            <a:off x="406301" y="4434929"/>
+            <a:ext cx="8498026" cy="213271"/>
+          </a:xfrm>
+          <a:prstGeom prst="rect">
+            <a:avLst/>
+          </a:prstGeom>
+          <a:noFill/>
+          <a:ln/>
+        </p:spPr>
+        <p:txBody>
+          <a:bodyPr wrap="square" lIns="0" tIns="0" rIns="0" bIns="0" rtlCol="0" anchor="t"/>
+          <a:lstStyle/>
+          <a:p>
+            <a:pPr algn="l" indent="0" marL="0">
+              <a:lnSpc>
+                <a:spcPts val="1680"/>
+              </a:lnSpc>
+              <a:spcBef>
+                <a:spcPts val="300"/>
+              </a:spcBef>
+              <a:spcAft>
+                <a:spcPts val="300"/>
+              </a:spcAft>
+              <a:buNone/>
+            </a:pPr>
+            <a:r>
+              <a:rPr lang="en-US" sz="1200" dirty="0">
+                <a:solidFill>
+                  <a:srgbClr val="1C2833"/>
+                </a:solidFill>
+                <a:latin typeface="Arial" pitchFamily="34" charset="0"/>
+                <a:ea typeface="Arial" pitchFamily="34" charset="-122"/>
+                <a:cs typeface="Arial" pitchFamily="34" charset="-120"/>
+              </a:rPr>
+              <a:t>Middle ·  · IKS Curriculum</a:t>
+            </a:r>
+            <a:endParaRPr lang="en-US" sz="1200" dirty="0"/>
+          </a:p>
+        </p:txBody>
+      </p:sp>
+    </p:spTree>
+  </p:cSld>
+  <p:clrMapOvr>
+    <a:masterClrMapping/>
+  </p:clrMapOvr>
+</p:sld>
+</file>
+
+<file path=ppt/slides/slide22.xml><?xml version="1.0" encoding="utf-8"?>
+<p:sld xmlns:a="http://schemas.openxmlformats.org/drawingml/2006/main" xmlns:r="http://schemas.openxmlformats.org/officeDocument/2006/relationships" xmlns:p="http://schemas.openxmlformats.org/presentationml/2006/main">
+  <p:cSld name="Slide 22">
+    <p:bg>
+      <p:bgPr>
+        <a:solidFill>
+          <a:srgbClr val="FFFFFF"/>
+        </a:solidFill>
+      </p:bgPr>
+    </p:bg>
+    <p:spTree>
+      <p:nvGrpSpPr>
+        <p:cNvPr id="1" name=""/>
+        <p:cNvGrpSpPr/>
+        <p:nvPr/>
+      </p:nvGrpSpPr>
+      <p:grpSpPr>
+        <a:xfrm>
+          <a:off x="0" y="0"/>
+          <a:ext cx="0" cy="0"/>
+          <a:chOff x="0" y="0"/>
+          <a:chExt cx="0" cy="0"/>
+        </a:xfrm>
+      </p:grpSpPr>
+      <p:sp>
+        <p:nvSpPr>
+          <p:cNvPr id="2" name="Text 0"/>
+          <p:cNvSpPr/>
+          <p:nvPr/>
+        </p:nvSpPr>
+        <p:spPr>
+          <a:xfrm>
+            <a:off x="0" y="0"/>
+            <a:ext cx="9144000" cy="101501"/>
+          </a:xfrm>
+          <a:prstGeom prst="rect">
+            <a:avLst/>
+          </a:prstGeom>
+          <a:solidFill>
+            <a:srgbClr val="277884"/>
+          </a:solidFill>
+          <a:ln/>
+        </p:spPr>
+        <p:txBody>
+          <a:bodyPr wrap="square" rtlCol="0" anchor="ctr"/>
+          <a:lstStyle/>
+          <a:p>
+            <a:pPr indent="0" marL="0">
+              <a:buNone/>
+            </a:pPr>
+            <a:endParaRPr lang="en-US" dirty="0"/>
+          </a:p>
+        </p:txBody>
+      </p:sp>
+      <p:sp>
+        <p:nvSpPr>
+          <p:cNvPr id="3" name="Text 1"/>
+          <p:cNvSpPr/>
+          <p:nvPr/>
+        </p:nvSpPr>
+        <p:spPr>
+          <a:xfrm>
+            <a:off x="406301" y="457051"/>
+            <a:ext cx="8498026" cy="274290"/>
+          </a:xfrm>
+          <a:prstGeom prst="rect">
+            <a:avLst/>
+          </a:prstGeom>
+          <a:noFill/>
+          <a:ln/>
+        </p:spPr>
+        <p:txBody>
+          <a:bodyPr wrap="square" lIns="0" tIns="0" rIns="0" bIns="0" rtlCol="0" anchor="t"/>
+          <a:lstStyle/>
+          <a:p>
+            <a:pPr algn="l" indent="0" marL="0">
+              <a:lnSpc>
+                <a:spcPts val="2160"/>
+              </a:lnSpc>
+              <a:spcBef>
+                <a:spcPts val="600"/>
+              </a:spcBef>
+              <a:spcAft>
+                <a:spcPts val="800"/>
+              </a:spcAft>
+              <a:buNone/>
+            </a:pPr>
+            <a:r>
+              <a:rPr lang="en-US" sz="1800" b="1" dirty="0">
+                <a:solidFill>
+                  <a:srgbClr val="FE4447"/>
+                </a:solidFill>
+                <a:latin typeface="Georgia" pitchFamily="34" charset="0"/>
+                <a:ea typeface="Georgia" pitchFamily="34" charset="-122"/>
+                <a:cs typeface="Georgia" pitchFamily="34" charset="-120"/>
+              </a:rPr>
+              <a:t>Citation(s) used in this lesson</a:t>
+            </a:r>
+            <a:endParaRPr lang="en-US" sz="1800" dirty="0"/>
+          </a:p>
+        </p:txBody>
+      </p:sp>
+      <p:sp>
+        <p:nvSpPr>
+          <p:cNvPr id="4" name="Text 2"/>
+          <p:cNvSpPr/>
+          <p:nvPr/>
+        </p:nvSpPr>
+        <p:spPr>
+          <a:xfrm>
+            <a:off x="634901" y="883593"/>
+            <a:ext cx="8102798" cy="487561"/>
+          </a:xfrm>
+          <a:prstGeom prst="rect">
+            <a:avLst/>
+          </a:prstGeom>
+          <a:noFill/>
+          <a:ln/>
+        </p:spPr>
+        <p:txBody>
+          <a:bodyPr wrap="square" lIns="0" tIns="0" rIns="0" bIns="0" rtlCol="0" anchor="t"/>
+          <a:lstStyle/>
+          <a:p>
+            <a:pPr algn="l" marL="342900" indent="-342900">
+              <a:lnSpc>
+                <a:spcPts val="1620"/>
+              </a:lnSpc>
+              <a:spcAft>
+                <a:spcPts val="300"/>
+              </a:spcAft>
+              <a:buSzPct val="100000"/>
+              <a:buChar char="•"/>
+            </a:pPr>
+            <a:r>
+              <a:rPr lang="en-US" sz="1200" dirty="0">
+                <a:solidFill>
+                  <a:srgbClr val="1C2833"/>
+                </a:solidFill>
+                <a:latin typeface="Arial" pitchFamily="34" charset="0"/>
+                <a:ea typeface="Arial" pitchFamily="34" charset="-122"/>
+                <a:cs typeface="Arial" pitchFamily="34" charset="-120"/>
+              </a:rPr>
+              <a:t>General reference: </a:t>
+            </a:r>
+            <a:pPr algn="l" indent="0" marL="0">
+              <a:lnSpc>
+                <a:spcPts val="1620"/>
+              </a:lnSpc>
+              <a:spcAft>
+                <a:spcPts val="300"/>
+              </a:spcAft>
+              <a:buNone/>
+            </a:pPr>
+            <a:r>
+              <a:rPr lang="en-US" sz="1200" i="1" dirty="0">
+                <a:solidFill>
+                  <a:srgbClr val="1C2833"/>
+                </a:solidFill>
+                <a:latin typeface="Arial" pitchFamily="34" charset="0"/>
+                <a:ea typeface="Arial" pitchFamily="34" charset="-122"/>
+                <a:cs typeface="Arial" pitchFamily="34" charset="-120"/>
+              </a:rPr>
+              <a:t>pañcāṅga</a:t>
+            </a:r>
+            <a:pPr algn="l" indent="0" marL="0">
+              <a:lnSpc>
+                <a:spcPts val="1620"/>
+              </a:lnSpc>
+              <a:spcAft>
+                <a:spcPts val="300"/>
+              </a:spcAft>
+              <a:buNone/>
+            </a:pPr>
+            <a:r>
+              <a:rPr lang="en-US" sz="1200" dirty="0">
+                <a:solidFill>
+                  <a:srgbClr val="1C2833"/>
+                </a:solidFill>
+                <a:latin typeface="Arial" pitchFamily="34" charset="0"/>
+                <a:ea typeface="Arial" pitchFamily="34" charset="-122"/>
+                <a:cs typeface="Arial" pitchFamily="34" charset="-120"/>
+              </a:rPr>
+              <a:t> sources (named in class). Paraphrase from </a:t>
+            </a:r>
+            <a:pPr algn="l" indent="0" marL="0">
+              <a:lnSpc>
+                <a:spcPts val="1620"/>
+              </a:lnSpc>
+              <a:spcAft>
+                <a:spcPts val="300"/>
+              </a:spcAft>
+              <a:buNone/>
+            </a:pPr>
+            <a:r>
+              <a:rPr lang="en-US" sz="1200" i="1" dirty="0">
+                <a:solidFill>
+                  <a:srgbClr val="1C2833"/>
+                </a:solidFill>
+                <a:latin typeface="Arial" pitchFamily="34" charset="0"/>
+                <a:ea typeface="Arial" pitchFamily="34" charset="-122"/>
+                <a:cs typeface="Arial" pitchFamily="34" charset="-120"/>
+              </a:rPr>
+              <a:t>Sūrya-siddhānta</a:t>
+            </a:r>
+            <a:pPr algn="l" indent="0" marL="0">
+              <a:lnSpc>
+                <a:spcPts val="1620"/>
+              </a:lnSpc>
+              <a:spcAft>
+                <a:spcPts val="300"/>
+              </a:spcAft>
+              <a:buNone/>
+            </a:pPr>
+            <a:r>
+              <a:rPr lang="en-US" sz="1200" dirty="0">
+                <a:solidFill>
+                  <a:srgbClr val="1C2833"/>
+                </a:solidFill>
+                <a:latin typeface="Arial" pitchFamily="34" charset="0"/>
+                <a:ea typeface="Arial" pitchFamily="34" charset="-122"/>
+                <a:cs typeface="Arial" pitchFamily="34" charset="-120"/>
+              </a:rPr>
+              <a:t>, chapter 14 (computation of </a:t>
+            </a:r>
+            <a:pPr algn="l" indent="0" marL="0">
+              <a:lnSpc>
+                <a:spcPts val="1620"/>
+              </a:lnSpc>
+              <a:spcAft>
+                <a:spcPts val="300"/>
+              </a:spcAft>
+              <a:buNone/>
+            </a:pPr>
+            <a:r>
+              <a:rPr lang="en-US" sz="1200" i="1" dirty="0">
+                <a:solidFill>
+                  <a:srgbClr val="1C2833"/>
+                </a:solidFill>
+                <a:latin typeface="Arial" pitchFamily="34" charset="0"/>
+                <a:ea typeface="Arial" pitchFamily="34" charset="-122"/>
+                <a:cs typeface="Arial" pitchFamily="34" charset="-120"/>
+              </a:rPr>
+              <a:t>adhika māsa</a:t>
+            </a:r>
+            <a:pPr algn="l" indent="0" marL="0">
+              <a:lnSpc>
+                <a:spcPts val="1620"/>
+              </a:lnSpc>
+              <a:spcAft>
+                <a:spcPts val="300"/>
+              </a:spcAft>
+              <a:buNone/>
+            </a:pPr>
+            <a:r>
+              <a:rPr lang="en-US" sz="1200" dirty="0">
+                <a:solidFill>
+                  <a:srgbClr val="1C2833"/>
+                </a:solidFill>
+                <a:latin typeface="Arial" pitchFamily="34" charset="0"/>
+                <a:ea typeface="Arial" pitchFamily="34" charset="-122"/>
+                <a:cs typeface="Arial" pitchFamily="34" charset="-120"/>
+              </a:rPr>
+              <a:t>) — cited by text and chapter name only.</a:t>
             </a:r>
             <a:endParaRPr lang="en-US" sz="1200" dirty="0"/>
           </a:p>
@@ -3852,7 +8922,7 @@
                 <a:ea typeface="Georgia" pitchFamily="34" charset="-122"/>
                 <a:cs typeface="Georgia" pitchFamily="34" charset="-120"/>
               </a:rPr>
-              <a:t>Vocabulary introduced today</a:t>
+              <a:t>Materials</a:t>
             </a:r>
             <a:endParaRPr lang="en-US" sz="1800" dirty="0"/>
           </a:p>
@@ -3867,7 +8937,7 @@
         <p:spPr>
           <a:xfrm>
             <a:off x="634901" y="883593"/>
-            <a:ext cx="8102798" cy="1180802"/>
+            <a:ext cx="8102798" cy="769441"/>
           </a:xfrm>
           <a:prstGeom prst="rect">
             <a:avLst/>
@@ -3890,35 +8960,15 @@
               <a:buChar char="•"/>
             </a:pPr>
             <a:r>
-              <a:rPr lang="en-US" sz="1200" i="1" dirty="0">
-                <a:solidFill>
-                  <a:srgbClr val="1C2833"/>
-                </a:solidFill>
-                <a:latin typeface="Arial" pitchFamily="34" charset="0"/>
-                <a:ea typeface="Arial" pitchFamily="34" charset="-122"/>
-                <a:cs typeface="Arial" pitchFamily="34" charset="-120"/>
-              </a:rPr>
-              <a:t>māsa</a:t>
-            </a:r>
-            <a:pPr algn="l" indent="0" marL="0">
-              <a:lnSpc>
-                <a:spcPts val="1620"/>
-              </a:lnSpc>
-              <a:spcAft>
-                <a:spcPts val="300"/>
-              </a:spcAft>
-              <a:buNone/>
-            </a:pPr>
-            <a:r>
-              <a:rPr lang="en-US" sz="1200" dirty="0">
-                <a:solidFill>
-                  <a:srgbClr val="1C2833"/>
-                </a:solidFill>
-                <a:latin typeface="Arial" pitchFamily="34" charset="0"/>
-                <a:ea typeface="Arial" pitchFamily="34" charset="-122"/>
-                <a:cs typeface="Arial" pitchFamily="34" charset="-120"/>
-              </a:rPr>
-              <a:t> (IAST: māsa; lit. "month") — a lunar month, ~29.53 days.</a:t>
+              <a:rPr lang="en-US" sz="1200" dirty="0">
+                <a:solidFill>
+                  <a:srgbClr val="1C2833"/>
+                </a:solidFill>
+                <a:latin typeface="Arial" pitchFamily="34" charset="0"/>
+                <a:ea typeface="Arial" pitchFamily="34" charset="-122"/>
+                <a:cs typeface="Arial" pitchFamily="34" charset="-120"/>
+              </a:rPr>
+              <a:t>Board with a 12-row table ready</a:t>
             </a:r>
             <a:endParaRPr lang="en-US" sz="1200" dirty="0"/>
           </a:p>
@@ -3934,35 +8984,15 @@
               <a:buChar char="•"/>
             </a:pPr>
             <a:r>
-              <a:rPr lang="en-US" sz="1200" i="1" dirty="0">
-                <a:solidFill>
-                  <a:srgbClr val="1C2833"/>
-                </a:solidFill>
-                <a:latin typeface="Arial" pitchFamily="34" charset="0"/>
-                <a:ea typeface="Arial" pitchFamily="34" charset="-122"/>
-                <a:cs typeface="Arial" pitchFamily="34" charset="-120"/>
-              </a:rPr>
-              <a:t>nakṣatra</a:t>
-            </a:r>
-            <a:pPr algn="l" indent="0" marL="0">
-              <a:lnSpc>
-                <a:spcPts val="1620"/>
-              </a:lnSpc>
-              <a:spcAft>
-                <a:spcPts val="300"/>
-              </a:spcAft>
-              <a:buNone/>
-            </a:pPr>
-            <a:r>
-              <a:rPr lang="en-US" sz="1200" dirty="0">
-                <a:solidFill>
-                  <a:srgbClr val="1C2833"/>
-                </a:solidFill>
-                <a:latin typeface="Arial" pitchFamily="34" charset="0"/>
-                <a:ea typeface="Arial" pitchFamily="34" charset="-122"/>
-                <a:cs typeface="Arial" pitchFamily="34" charset="-120"/>
-              </a:rPr>
-              <a:t> (IAST: nakṣatra; lit. "lunar mansion") — one of 27 segments of the ecliptic, each ~13°20' wide. (Full coverage in a later module — today's mention is just for naming.)</a:t>
+              <a:rPr lang="en-US" sz="1200" dirty="0">
+                <a:solidFill>
+                  <a:srgbClr val="1C2833"/>
+                </a:solidFill>
+                <a:latin typeface="Arial" pitchFamily="34" charset="0"/>
+                <a:ea typeface="Arial" pitchFamily="34" charset="-122"/>
+                <a:cs typeface="Arial" pitchFamily="34" charset="-120"/>
+              </a:rPr>
+              <a:t>A printed list of major festivals across the 12 lunar months (one per pair)</a:t>
             </a:r>
             <a:endParaRPr lang="en-US" sz="1200" dirty="0"/>
           </a:p>
@@ -3978,35 +9008,15 @@
               <a:buChar char="•"/>
             </a:pPr>
             <a:r>
-              <a:rPr lang="en-US" sz="1200" i="1" dirty="0">
-                <a:solidFill>
-                  <a:srgbClr val="1C2833"/>
-                </a:solidFill>
-                <a:latin typeface="Arial" pitchFamily="34" charset="0"/>
-                <a:ea typeface="Arial" pitchFamily="34" charset="-122"/>
-                <a:cs typeface="Arial" pitchFamily="34" charset="-120"/>
-              </a:rPr>
-              <a:t>adhika māsa</a:t>
-            </a:r>
-            <a:pPr algn="l" indent="0" marL="0">
-              <a:lnSpc>
-                <a:spcPts val="1620"/>
-              </a:lnSpc>
-              <a:spcAft>
-                <a:spcPts val="300"/>
-              </a:spcAft>
-              <a:buNone/>
-            </a:pPr>
-            <a:r>
-              <a:rPr lang="en-US" sz="1200" dirty="0">
-                <a:solidFill>
-                  <a:srgbClr val="1C2833"/>
-                </a:solidFill>
-                <a:latin typeface="Arial" pitchFamily="34" charset="0"/>
-                <a:ea typeface="Arial" pitchFamily="34" charset="-122"/>
-                <a:cs typeface="Arial" pitchFamily="34" charset="-120"/>
-              </a:rPr>
-              <a:t> (IAST: adhika-māsa; lit. "extra month") — an intercalary 13th month inserted approximately every 32.5 months.</a:t>
+              <a:rPr lang="en-US" sz="1200" dirty="0">
+                <a:solidFill>
+                  <a:srgbClr val="1C2833"/>
+                </a:solidFill>
+                <a:latin typeface="Arial" pitchFamily="34" charset="0"/>
+                <a:ea typeface="Arial" pitchFamily="34" charset="-122"/>
+                <a:cs typeface="Arial" pitchFamily="34" charset="-120"/>
+              </a:rPr>
+              <a:t>Notebooks</a:t>
             </a:r>
             <a:endParaRPr lang="en-US" sz="1200" dirty="0"/>
           </a:p>
@@ -4164,7 +9174,7 @@
                 <a:ea typeface="Georgia" pitchFamily="34" charset="-122"/>
                 <a:cs typeface="Georgia" pitchFamily="34" charset="-120"/>
               </a:rPr>
-              <a:t>Lesson flow</a:t>
+              <a:t>Vocabulary introduced today</a:t>
             </a:r>
             <a:endParaRPr lang="en-US" sz="1800" dirty="0"/>
           </a:p>
@@ -4173,6 +9183,160 @@
       <p:sp>
         <p:nvSpPr>
           <p:cNvPr id="4" name="Text 2"/>
+          <p:cNvSpPr/>
+          <p:nvPr/>
+        </p:nvSpPr>
+        <p:spPr>
+          <a:xfrm>
+            <a:off x="634901" y="883593"/>
+            <a:ext cx="8102798" cy="1180802"/>
+          </a:xfrm>
+          <a:prstGeom prst="rect">
+            <a:avLst/>
+          </a:prstGeom>
+          <a:noFill/>
+          <a:ln/>
+        </p:spPr>
+        <p:txBody>
+          <a:bodyPr wrap="square" lIns="0" tIns="0" rIns="0" bIns="0" rtlCol="0" anchor="t"/>
+          <a:lstStyle/>
+          <a:p>
+            <a:pPr algn="l" marL="342900" indent="-342900">
+              <a:lnSpc>
+                <a:spcPts val="1620"/>
+              </a:lnSpc>
+              <a:spcAft>
+                <a:spcPts val="300"/>
+              </a:spcAft>
+              <a:buSzPct val="100000"/>
+              <a:buChar char="•"/>
+            </a:pPr>
+            <a:r>
+              <a:rPr lang="en-US" sz="1200" i="1" dirty="0">
+                <a:solidFill>
+                  <a:srgbClr val="1C2833"/>
+                </a:solidFill>
+                <a:latin typeface="Arial" pitchFamily="34" charset="0"/>
+                <a:ea typeface="Arial" pitchFamily="34" charset="-122"/>
+                <a:cs typeface="Arial" pitchFamily="34" charset="-120"/>
+              </a:rPr>
+              <a:t>māsa</a:t>
+            </a:r>
+            <a:pPr algn="l" indent="0" marL="0">
+              <a:lnSpc>
+                <a:spcPts val="1620"/>
+              </a:lnSpc>
+              <a:spcAft>
+                <a:spcPts val="300"/>
+              </a:spcAft>
+              <a:buNone/>
+            </a:pPr>
+            <a:r>
+              <a:rPr lang="en-US" sz="1200" dirty="0">
+                <a:solidFill>
+                  <a:srgbClr val="1C2833"/>
+                </a:solidFill>
+                <a:latin typeface="Arial" pitchFamily="34" charset="0"/>
+                <a:ea typeface="Arial" pitchFamily="34" charset="-122"/>
+                <a:cs typeface="Arial" pitchFamily="34" charset="-120"/>
+              </a:rPr>
+              <a:t> (IAST: māsa; lit. "month") — a lunar month, ~29.53 days.</a:t>
+            </a:r>
+            <a:endParaRPr lang="en-US" sz="1200" dirty="0"/>
+          </a:p>
+          <a:p>
+            <a:pPr algn="l" marL="342900" indent="-342900">
+              <a:lnSpc>
+                <a:spcPts val="1620"/>
+              </a:lnSpc>
+              <a:spcAft>
+                <a:spcPts val="300"/>
+              </a:spcAft>
+              <a:buSzPct val="100000"/>
+              <a:buChar char="•"/>
+            </a:pPr>
+            <a:r>
+              <a:rPr lang="en-US" sz="1200" i="1" dirty="0">
+                <a:solidFill>
+                  <a:srgbClr val="1C2833"/>
+                </a:solidFill>
+                <a:latin typeface="Arial" pitchFamily="34" charset="0"/>
+                <a:ea typeface="Arial" pitchFamily="34" charset="-122"/>
+                <a:cs typeface="Arial" pitchFamily="34" charset="-120"/>
+              </a:rPr>
+              <a:t>nakṣatra</a:t>
+            </a:r>
+            <a:pPr algn="l" indent="0" marL="0">
+              <a:lnSpc>
+                <a:spcPts val="1620"/>
+              </a:lnSpc>
+              <a:spcAft>
+                <a:spcPts val="300"/>
+              </a:spcAft>
+              <a:buNone/>
+            </a:pPr>
+            <a:r>
+              <a:rPr lang="en-US" sz="1200" dirty="0">
+                <a:solidFill>
+                  <a:srgbClr val="1C2833"/>
+                </a:solidFill>
+                <a:latin typeface="Arial" pitchFamily="34" charset="0"/>
+                <a:ea typeface="Arial" pitchFamily="34" charset="-122"/>
+                <a:cs typeface="Arial" pitchFamily="34" charset="-120"/>
+              </a:rPr>
+              <a:t> (IAST: nakṣatra; lit. "lunar mansion") — one of 27 segments of the ecliptic, each ~13°20' wide. (Full coverage in a later module — today's mention is just for naming.)</a:t>
+            </a:r>
+            <a:endParaRPr lang="en-US" sz="1200" dirty="0"/>
+          </a:p>
+          <a:p>
+            <a:pPr algn="l" marL="342900" indent="-342900">
+              <a:lnSpc>
+                <a:spcPts val="1620"/>
+              </a:lnSpc>
+              <a:spcAft>
+                <a:spcPts val="300"/>
+              </a:spcAft>
+              <a:buSzPct val="100000"/>
+              <a:buChar char="•"/>
+            </a:pPr>
+            <a:r>
+              <a:rPr lang="en-US" sz="1200" i="1" dirty="0">
+                <a:solidFill>
+                  <a:srgbClr val="1C2833"/>
+                </a:solidFill>
+                <a:latin typeface="Arial" pitchFamily="34" charset="0"/>
+                <a:ea typeface="Arial" pitchFamily="34" charset="-122"/>
+                <a:cs typeface="Arial" pitchFamily="34" charset="-120"/>
+              </a:rPr>
+              <a:t>adhika māsa</a:t>
+            </a:r>
+            <a:pPr algn="l" indent="0" marL="0">
+              <a:lnSpc>
+                <a:spcPts val="1620"/>
+              </a:lnSpc>
+              <a:spcAft>
+                <a:spcPts val="300"/>
+              </a:spcAft>
+              <a:buNone/>
+            </a:pPr>
+            <a:r>
+              <a:rPr lang="en-US" sz="1200" dirty="0">
+                <a:solidFill>
+                  <a:srgbClr val="1C2833"/>
+                </a:solidFill>
+                <a:latin typeface="Arial" pitchFamily="34" charset="0"/>
+                <a:ea typeface="Arial" pitchFamily="34" charset="-122"/>
+                <a:cs typeface="Arial" pitchFamily="34" charset="-120"/>
+              </a:rPr>
+              <a:t> (IAST: adhika-māsa; lit. "extra month") — an intercalary 13th month inserted approximately every 32.5 months.</a:t>
+            </a:r>
+            <a:endParaRPr lang="en-US" sz="1200" dirty="0"/>
+          </a:p>
+        </p:txBody>
+      </p:sp>
+      <p:sp>
+        <p:nvSpPr>
+          <p:cNvPr id="5" name="Text 3"/>
           <p:cNvSpPr/>
           <p:nvPr/>
         </p:nvSpPr>
@@ -4322,7 +9486,7 @@
                 <a:ea typeface="Georgia" pitchFamily="34" charset="-122"/>
                 <a:cs typeface="Georgia" pitchFamily="34" charset="-120"/>
               </a:rPr>
-              <a:t>Warm-up (5 min)</a:t>
+              <a:t>Lesson flow</a:t>
             </a:r>
             <a:endParaRPr lang="en-US" sz="1800" dirty="0"/>
           </a:p>
@@ -4331,192 +9495,6 @@
       <p:sp>
         <p:nvSpPr>
           <p:cNvPr id="4" name="Text 2"/>
-          <p:cNvSpPr/>
-          <p:nvPr/>
-        </p:nvSpPr>
-        <p:spPr>
-          <a:xfrm>
-            <a:off x="406301" y="870942"/>
-            <a:ext cx="8498026" cy="639812"/>
-          </a:xfrm>
-          <a:prstGeom prst="rect">
-            <a:avLst/>
-          </a:prstGeom>
-          <a:noFill/>
-          <a:ln/>
-        </p:spPr>
-        <p:txBody>
-          <a:bodyPr wrap="square" lIns="0" tIns="0" rIns="0" bIns="0" rtlCol="0" anchor="t"/>
-          <a:lstStyle/>
-          <a:p>
-            <a:pPr algn="l" indent="0" marL="0">
-              <a:lnSpc>
-                <a:spcPts val="1680"/>
-              </a:lnSpc>
-              <a:spcBef>
-                <a:spcPts val="300"/>
-              </a:spcBef>
-              <a:spcAft>
-                <a:spcPts val="300"/>
-              </a:spcAft>
-              <a:buNone/>
-            </a:pPr>
-            <a:r>
-              <a:rPr lang="en-US" sz="1200" dirty="0">
-                <a:solidFill>
-                  <a:srgbClr val="1C2833"/>
-                </a:solidFill>
-                <a:latin typeface="Arial" pitchFamily="34" charset="0"/>
-                <a:ea typeface="Arial" pitchFamily="34" charset="-122"/>
-                <a:cs typeface="Arial" pitchFamily="34" charset="-120"/>
-              </a:rPr>
-              <a:t>– Daily prompt: </a:t>
-            </a:r>
-            <a:pPr algn="l" indent="0" marL="0">
-              <a:lnSpc>
-                <a:spcPts val="1680"/>
-              </a:lnSpc>
-              <a:spcBef>
-                <a:spcPts val="300"/>
-              </a:spcBef>
-              <a:spcAft>
-                <a:spcPts val="300"/>
-              </a:spcAft>
-              <a:buNone/>
-            </a:pPr>
-            <a:r>
-              <a:rPr lang="en-US" sz="1200" i="1" dirty="0">
-                <a:solidFill>
-                  <a:srgbClr val="1C2833"/>
-                </a:solidFill>
-                <a:latin typeface="Arial" pitchFamily="34" charset="0"/>
-                <a:ea typeface="Arial" pitchFamily="34" charset="-122"/>
-                <a:cs typeface="Arial" pitchFamily="34" charset="-120"/>
-              </a:rPr>
-              <a:t>"Did you see the Moon last night? What tithi?"</a:t>
-            </a:r>
-            <a:pPr algn="l" indent="0" marL="0">
-              <a:lnSpc>
-                <a:spcPts val="1680"/>
-              </a:lnSpc>
-              <a:spcBef>
-                <a:spcPts val="300"/>
-              </a:spcBef>
-              <a:spcAft>
-                <a:spcPts val="300"/>
-              </a:spcAft>
-              <a:buNone/>
-            </a:pPr>
-            <a:r>
-              <a:rPr lang="en-US" sz="1200" dirty="0">
-                <a:solidFill>
-                  <a:srgbClr val="1C2833"/>
-                </a:solidFill>
-                <a:latin typeface="Arial" pitchFamily="34" charset="0"/>
-                <a:ea typeface="Arial" pitchFamily="34" charset="-122"/>
-                <a:cs typeface="Arial" pitchFamily="34" charset="-120"/>
-              </a:rPr>
-              <a:t> — 2 students share. – Quick recall using yesterday's tithi calendar: </a:t>
-            </a:r>
-            <a:pPr algn="l" indent="0" marL="0">
-              <a:lnSpc>
-                <a:spcPts val="1680"/>
-              </a:lnSpc>
-              <a:spcBef>
-                <a:spcPts val="300"/>
-              </a:spcBef>
-              <a:spcAft>
-                <a:spcPts val="300"/>
-              </a:spcAft>
-              <a:buNone/>
-            </a:pPr>
-            <a:r>
-              <a:rPr lang="en-US" sz="1200" i="1" dirty="0">
-                <a:solidFill>
-                  <a:srgbClr val="1C2833"/>
-                </a:solidFill>
-                <a:latin typeface="Arial" pitchFamily="34" charset="0"/>
-                <a:ea typeface="Arial" pitchFamily="34" charset="-122"/>
-                <a:cs typeface="Arial" pitchFamily="34" charset="-120"/>
-              </a:rPr>
-              <a:t>"What month did we build the calendar for?"</a:t>
-            </a:r>
-            <a:pPr algn="l" indent="0" marL="0">
-              <a:lnSpc>
-                <a:spcPts val="1680"/>
-              </a:lnSpc>
-              <a:spcBef>
-                <a:spcPts val="300"/>
-              </a:spcBef>
-              <a:spcAft>
-                <a:spcPts val="300"/>
-              </a:spcAft>
-              <a:buNone/>
-            </a:pPr>
-            <a:r>
-              <a:rPr lang="en-US" sz="1200" dirty="0">
-                <a:solidFill>
-                  <a:srgbClr val="1C2833"/>
-                </a:solidFill>
-                <a:latin typeface="Arial" pitchFamily="34" charset="0"/>
-                <a:ea typeface="Arial" pitchFamily="34" charset="-122"/>
-                <a:cs typeface="Arial" pitchFamily="34" charset="-120"/>
-              </a:rPr>
-              <a:t> (May, June, etc.) </a:t>
-            </a:r>
-            <a:pPr algn="l" indent="0" marL="0">
-              <a:lnSpc>
-                <a:spcPts val="1680"/>
-              </a:lnSpc>
-              <a:spcBef>
-                <a:spcPts val="300"/>
-              </a:spcBef>
-              <a:spcAft>
-                <a:spcPts val="300"/>
-              </a:spcAft>
-              <a:buNone/>
-            </a:pPr>
-            <a:r>
-              <a:rPr lang="en-US" sz="1200" i="1" dirty="0">
-                <a:solidFill>
-                  <a:srgbClr val="1C2833"/>
-                </a:solidFill>
-                <a:latin typeface="Arial" pitchFamily="34" charset="0"/>
-                <a:ea typeface="Arial" pitchFamily="34" charset="-122"/>
-                <a:cs typeface="Arial" pitchFamily="34" charset="-120"/>
-              </a:rPr>
-              <a:t>"In the Indian lunar calendar, what month is that?"</a:t>
-            </a:r>
-            <a:pPr algn="l" indent="0" marL="0">
-              <a:lnSpc>
-                <a:spcPts val="1680"/>
-              </a:lnSpc>
-              <a:spcBef>
-                <a:spcPts val="300"/>
-              </a:spcBef>
-              <a:spcAft>
-                <a:spcPts val="300"/>
-              </a:spcAft>
-              <a:buNone/>
-            </a:pPr>
-            <a:r>
-              <a:rPr lang="en-US" sz="1200" dirty="0">
-                <a:solidFill>
-                  <a:srgbClr val="1C2833"/>
-                </a:solidFill>
-                <a:latin typeface="Arial" pitchFamily="34" charset="0"/>
-                <a:ea typeface="Arial" pitchFamily="34" charset="-122"/>
-                <a:cs typeface="Arial" pitchFamily="34" charset="-120"/>
-              </a:rPr>
-              <a:t> (Answer: it depends — let's find out.)</a:t>
-            </a:r>
-            <a:endParaRPr lang="en-US" sz="1200" dirty="0"/>
-          </a:p>
-        </p:txBody>
-      </p:sp>
-      <p:sp>
-        <p:nvSpPr>
-          <p:cNvPr id="5" name="Text 3"/>
           <p:cNvSpPr/>
           <p:nvPr/>
         </p:nvSpPr>
@@ -4666,7 +9644,7 @@
                 <a:ea typeface="Georgia" pitchFamily="34" charset="-122"/>
                 <a:cs typeface="Georgia" pitchFamily="34" charset="-120"/>
               </a:rPr>
-              <a:t>Activity (15 min) — Festival mapping + formative quiz</a:t>
+              <a:t>Warm-up (5 min)</a:t>
             </a:r>
             <a:endParaRPr lang="en-US" sz="1800" dirty="0"/>
           </a:p>
@@ -4680,8 +9658,8 @@
         </p:nvSpPr>
         <p:spPr>
           <a:xfrm>
-            <a:off x="406301" y="870942"/>
-            <a:ext cx="8498026" cy="213271"/>
+            <a:off x="634901" y="883593"/>
+            <a:ext cx="8102798" cy="731341"/>
           </a:xfrm>
           <a:prstGeom prst="rect">
             <a:avLst/>
@@ -4693,77 +9671,6 @@
           <a:bodyPr wrap="square" lIns="0" tIns="0" rIns="0" bIns="0" rtlCol="0" anchor="t"/>
           <a:lstStyle/>
           <a:p>
-            <a:pPr algn="l" indent="0" marL="0">
-              <a:lnSpc>
-                <a:spcPts val="1680"/>
-              </a:lnSpc>
-              <a:spcBef>
-                <a:spcPts val="300"/>
-              </a:spcBef>
-              <a:spcAft>
-                <a:spcPts val="300"/>
-              </a:spcAft>
-              <a:buNone/>
-            </a:pPr>
-            <a:r>
-              <a:rPr lang="en-US" sz="1200" b="1" dirty="0">
-                <a:solidFill>
-                  <a:srgbClr val="1C2833"/>
-                </a:solidFill>
-                <a:latin typeface="Arial" pitchFamily="34" charset="0"/>
-                <a:ea typeface="Arial" pitchFamily="34" charset="-122"/>
-                <a:cs typeface="Arial" pitchFamily="34" charset="-120"/>
-              </a:rPr>
-              <a:t>Part A (8 min) — pair work.</a:t>
-            </a:r>
-            <a:pPr algn="l" indent="0" marL="0">
-              <a:lnSpc>
-                <a:spcPts val="1680"/>
-              </a:lnSpc>
-              <a:spcBef>
-                <a:spcPts val="300"/>
-              </a:spcBef>
-              <a:spcAft>
-                <a:spcPts val="300"/>
-              </a:spcAft>
-              <a:buNone/>
-            </a:pPr>
-            <a:r>
-              <a:rPr lang="en-US" sz="1200" dirty="0">
-                <a:solidFill>
-                  <a:srgbClr val="1C2833"/>
-                </a:solidFill>
-                <a:latin typeface="Arial" pitchFamily="34" charset="0"/>
-                <a:ea typeface="Arial" pitchFamily="34" charset="-122"/>
-                <a:cs typeface="Arial" pitchFamily="34" charset="-120"/>
-              </a:rPr>
-              <a:t> Each pair gets the printed festival list (about 12 festivals). Their job:</a:t>
-            </a:r>
-            <a:endParaRPr lang="en-US" sz="1200" dirty="0"/>
-          </a:p>
-        </p:txBody>
-      </p:sp>
-      <p:sp>
-        <p:nvSpPr>
-          <p:cNvPr id="5" name="Text 3"/>
-          <p:cNvSpPr/>
-          <p:nvPr/>
-        </p:nvSpPr>
-        <p:spPr>
-          <a:xfrm>
-            <a:off x="634901" y="1173063"/>
-            <a:ext cx="8102798" cy="769441"/>
-          </a:xfrm>
-          <a:prstGeom prst="rect">
-            <a:avLst/>
-          </a:prstGeom>
-          <a:noFill/>
-          <a:ln/>
-        </p:spPr>
-        <p:txBody>
-          <a:bodyPr wrap="square" lIns="0" tIns="0" rIns="0" bIns="0" rtlCol="0" anchor="t"/>
-          <a:lstStyle/>
-          <a:p>
             <a:pPr algn="l" marL="342900" indent="-342900">
               <a:lnSpc>
                 <a:spcPts val="1620"/>
@@ -4783,7 +9690,47 @@
                 <a:ea typeface="Arial" pitchFamily="34" charset="-122"/>
                 <a:cs typeface="Arial" pitchFamily="34" charset="-120"/>
               </a:rPr>
-              <a:t>Mark which lunar month each festival falls in.</a:t>
+              <a:t>Daily prompt: </a:t>
+            </a:r>
+            <a:pPr algn="l" indent="0" marL="0">
+              <a:lnSpc>
+                <a:spcPts val="1620"/>
+              </a:lnSpc>
+              <a:spcAft>
+                <a:spcPts val="300"/>
+              </a:spcAft>
+              <a:buNone/>
+            </a:pPr>
+            <a:r>
+              <a:rPr lang="en-US" sz="1200" i="1" dirty="0">
+                <a:solidFill>
+                  <a:srgbClr val="1C2833"/>
+                </a:solidFill>
+                <a:latin typeface="Arial" pitchFamily="34" charset="0"/>
+                <a:ea typeface="Arial" pitchFamily="34" charset="-122"/>
+                <a:cs typeface="Arial" pitchFamily="34" charset="-120"/>
+              </a:rPr>
+              <a:t>"Did you see the Moon last night? What tithi?"</a:t>
+            </a:r>
+            <a:pPr algn="l" indent="0" marL="0">
+              <a:lnSpc>
+                <a:spcPts val="1620"/>
+              </a:lnSpc>
+              <a:spcAft>
+                <a:spcPts val="300"/>
+              </a:spcAft>
+              <a:buNone/>
+            </a:pPr>
+            <a:r>
+              <a:rPr lang="en-US" sz="1200" dirty="0">
+                <a:solidFill>
+                  <a:srgbClr val="1C2833"/>
+                </a:solidFill>
+                <a:latin typeface="Arial" pitchFamily="34" charset="0"/>
+                <a:ea typeface="Arial" pitchFamily="34" charset="-122"/>
+                <a:cs typeface="Arial" pitchFamily="34" charset="-120"/>
+              </a:rPr>
+              <a:t> — 2 students share.</a:t>
             </a:r>
             <a:endParaRPr lang="en-US" sz="1200" dirty="0"/>
           </a:p>
@@ -4807,156 +9754,95 @@
                 <a:ea typeface="Arial" pitchFamily="34" charset="-122"/>
                 <a:cs typeface="Arial" pitchFamily="34" charset="-120"/>
               </a:rPr>
-              <a:t>Identify the tithi and pakṣa.</a:t>
+              <a:t>Quick recall using yesterday's tithi calendar: </a:t>
+            </a:r>
+            <a:pPr algn="l" indent="0" marL="0">
+              <a:lnSpc>
+                <a:spcPts val="1620"/>
+              </a:lnSpc>
+              <a:spcAft>
+                <a:spcPts val="300"/>
+              </a:spcAft>
+              <a:buNone/>
+            </a:pPr>
+            <a:r>
+              <a:rPr lang="en-US" sz="1200" i="1" dirty="0">
+                <a:solidFill>
+                  <a:srgbClr val="1C2833"/>
+                </a:solidFill>
+                <a:latin typeface="Arial" pitchFamily="34" charset="0"/>
+                <a:ea typeface="Arial" pitchFamily="34" charset="-122"/>
+                <a:cs typeface="Arial" pitchFamily="34" charset="-120"/>
+              </a:rPr>
+              <a:t>"What month did we build the calendar for?"</a:t>
+            </a:r>
+            <a:pPr algn="l" indent="0" marL="0">
+              <a:lnSpc>
+                <a:spcPts val="1620"/>
+              </a:lnSpc>
+              <a:spcAft>
+                <a:spcPts val="300"/>
+              </a:spcAft>
+              <a:buNone/>
+            </a:pPr>
+            <a:r>
+              <a:rPr lang="en-US" sz="1200" dirty="0">
+                <a:solidFill>
+                  <a:srgbClr val="1C2833"/>
+                </a:solidFill>
+                <a:latin typeface="Arial" pitchFamily="34" charset="0"/>
+                <a:ea typeface="Arial" pitchFamily="34" charset="-122"/>
+                <a:cs typeface="Arial" pitchFamily="34" charset="-120"/>
+              </a:rPr>
+              <a:t> (May, June, etc.) </a:t>
+            </a:r>
+            <a:pPr algn="l" indent="0" marL="0">
+              <a:lnSpc>
+                <a:spcPts val="1620"/>
+              </a:lnSpc>
+              <a:spcAft>
+                <a:spcPts val="300"/>
+              </a:spcAft>
+              <a:buNone/>
+            </a:pPr>
+            <a:r>
+              <a:rPr lang="en-US" sz="1200" i="1" dirty="0">
+                <a:solidFill>
+                  <a:srgbClr val="1C2833"/>
+                </a:solidFill>
+                <a:latin typeface="Arial" pitchFamily="34" charset="0"/>
+                <a:ea typeface="Arial" pitchFamily="34" charset="-122"/>
+                <a:cs typeface="Arial" pitchFamily="34" charset="-120"/>
+              </a:rPr>
+              <a:t>"In the Indian lunar calendar, what month is that?"</a:t>
+            </a:r>
+            <a:pPr algn="l" indent="0" marL="0">
+              <a:lnSpc>
+                <a:spcPts val="1620"/>
+              </a:lnSpc>
+              <a:spcAft>
+                <a:spcPts val="300"/>
+              </a:spcAft>
+              <a:buNone/>
+            </a:pPr>
+            <a:r>
+              <a:rPr lang="en-US" sz="1200" dirty="0">
+                <a:solidFill>
+                  <a:srgbClr val="1C2833"/>
+                </a:solidFill>
+                <a:latin typeface="Arial" pitchFamily="34" charset="0"/>
+                <a:ea typeface="Arial" pitchFamily="34" charset="-122"/>
+                <a:cs typeface="Arial" pitchFamily="34" charset="-120"/>
+              </a:rPr>
+              <a:t> (Answer: it depends — let's find out.)</a:t>
             </a:r>
             <a:endParaRPr lang="en-US" sz="1200" dirty="0"/>
           </a:p>
-          <a:p>
-            <a:pPr algn="l" marL="342900" indent="-342900">
-              <a:lnSpc>
-                <a:spcPts val="1620"/>
-              </a:lnSpc>
-              <a:spcAft>
-                <a:spcPts val="300"/>
-              </a:spcAft>
-              <a:buSzPct val="100000"/>
-              <a:buChar char="•"/>
-            </a:pPr>
-            <a:r>
-              <a:rPr lang="en-US" sz="1200" dirty="0">
-                <a:solidFill>
-                  <a:srgbClr val="1C2833"/>
-                </a:solidFill>
-                <a:latin typeface="Arial" pitchFamily="34" charset="0"/>
-                <a:ea typeface="Arial" pitchFamily="34" charset="-122"/>
-                <a:cs typeface="Arial" pitchFamily="34" charset="-120"/>
-              </a:rPr>
-              <a:t>Find ONE festival that no one in the pair had heard of before. Write its month + pakṣa + tithi.</a:t>
-            </a:r>
-            <a:endParaRPr lang="en-US" sz="1200" dirty="0"/>
-          </a:p>
-        </p:txBody>
-      </p:sp>
-      <p:sp>
-        <p:nvSpPr>
-          <p:cNvPr id="6" name="Text 4"/>
-          <p:cNvSpPr/>
-          <p:nvPr/>
-        </p:nvSpPr>
-        <p:spPr>
-          <a:xfrm>
-            <a:off x="406301" y="2031355"/>
-            <a:ext cx="8498026" cy="222796"/>
-          </a:xfrm>
-          <a:prstGeom prst="rect">
-            <a:avLst/>
-          </a:prstGeom>
-          <a:noFill/>
-          <a:ln/>
-        </p:spPr>
-        <p:txBody>
-          <a:bodyPr wrap="square" lIns="0" tIns="0" rIns="0" bIns="0" rtlCol="0" anchor="t"/>
-          <a:lstStyle/>
-          <a:p>
-            <a:pPr algn="l" indent="0" marL="0">
-              <a:lnSpc>
-                <a:spcPts val="1680"/>
-              </a:lnSpc>
-              <a:spcBef>
-                <a:spcPts val="300"/>
-              </a:spcBef>
-              <a:spcAft>
-                <a:spcPts val="300"/>
-              </a:spcAft>
-              <a:buNone/>
-            </a:pPr>
-            <a:r>
-              <a:rPr lang="en-US" sz="1200" b="1" dirty="0">
-                <a:solidFill>
-                  <a:srgbClr val="1C2833"/>
-                </a:solidFill>
-                <a:latin typeface="Arial" pitchFamily="34" charset="0"/>
-                <a:ea typeface="Arial" pitchFamily="34" charset="-122"/>
-                <a:cs typeface="Arial" pitchFamily="34" charset="-120"/>
-              </a:rPr>
-              <a:t>Part B (7 min) — formative quiz</a:t>
-            </a:r>
-            <a:pPr algn="l" indent="0" marL="0">
-              <a:lnSpc>
-                <a:spcPts val="1680"/>
-              </a:lnSpc>
-              <a:spcBef>
-                <a:spcPts val="300"/>
-              </a:spcBef>
-              <a:spcAft>
-                <a:spcPts val="300"/>
-              </a:spcAft>
-              <a:buNone/>
-            </a:pPr>
-            <a:r>
-              <a:rPr lang="en-US" sz="1200" dirty="0">
-                <a:solidFill>
-                  <a:srgbClr val="1C2833"/>
-                </a:solidFill>
-                <a:latin typeface="Arial" pitchFamily="34" charset="0"/>
-                <a:ea typeface="Arial" pitchFamily="34" charset="-122"/>
-                <a:cs typeface="Arial" pitchFamily="34" charset="-120"/>
-              </a:rPr>
-              <a:t>, see </a:t>
-            </a:r>
-            <a:pPr algn="l" indent="0" marL="0">
-              <a:lnSpc>
-                <a:spcPts val="1680"/>
-              </a:lnSpc>
-              <a:spcBef>
-                <a:spcPts val="300"/>
-              </a:spcBef>
-              <a:spcAft>
-                <a:spcPts val="300"/>
-              </a:spcAft>
-              <a:buNone/>
-            </a:pPr>
-            <a:r>
-              <a:rPr lang="en-US" sz="1200" dirty="0">
-                <a:solidFill>
-                  <a:srgbClr val="1C2833"/>
-                </a:solidFill>
-                <a:latin typeface="Arial" pitchFamily="34" charset="0"/>
-                <a:ea typeface="Arial" pitchFamily="34" charset="-122"/>
-                <a:cs typeface="Arial" pitchFamily="34" charset="-120"/>
-              </a:rPr>
-              <a:t>quizzes/formative.md</a:t>
-            </a:r>
-            <a:pPr algn="l" indent="0" marL="0">
-              <a:lnSpc>
-                <a:spcPts val="1680"/>
-              </a:lnSpc>
-              <a:spcBef>
-                <a:spcPts val="300"/>
-              </a:spcBef>
-              <a:spcAft>
-                <a:spcPts val="300"/>
-              </a:spcAft>
-              <a:buNone/>
-            </a:pPr>
-            <a:r>
-              <a:rPr lang="en-US" sz="1200" dirty="0">
-                <a:solidFill>
-                  <a:srgbClr val="1C2833"/>
-                </a:solidFill>
-                <a:latin typeface="Arial" pitchFamily="34" charset="0"/>
-                <a:ea typeface="Arial" pitchFamily="34" charset="-122"/>
-                <a:cs typeface="Arial" pitchFamily="34" charset="-120"/>
-              </a:rPr>
-              <a:t> Part B. Collect and mark within 24 hours.</a:t>
-            </a:r>
-            <a:endParaRPr lang="en-US" sz="1200" dirty="0"/>
-          </a:p>
-        </p:txBody>
-      </p:sp>
-      <p:sp>
-        <p:nvSpPr>
-          <p:cNvPr id="7" name="Text 5"/>
+        </p:txBody>
+      </p:sp>
+      <p:sp>
+        <p:nvSpPr>
+          <p:cNvPr id="5" name="Text 3"/>
           <p:cNvSpPr/>
           <p:nvPr/>
         </p:nvSpPr>
@@ -5106,7 +9992,7 @@
                 <a:ea typeface="Georgia" pitchFamily="34" charset="-122"/>
                 <a:cs typeface="Georgia" pitchFamily="34" charset="-120"/>
               </a:rPr>
-              <a:t>Wrap-up (5 min)</a:t>
+              <a:t>Core (20 min)</a:t>
             </a:r>
             <a:endParaRPr lang="en-US" sz="1800" dirty="0"/>
           </a:p>
@@ -5120,7 +10006,73 @@
         </p:nvSpPr>
         <p:spPr>
           <a:xfrm>
-            <a:off x="406301" y="870942"/>
+            <a:off x="634901" y="883593"/>
+            <a:ext cx="8102798" cy="281880"/>
+          </a:xfrm>
+          <a:prstGeom prst="rect">
+            <a:avLst/>
+          </a:prstGeom>
+          <a:noFill/>
+          <a:ln/>
+        </p:spPr>
+        <p:txBody>
+          <a:bodyPr wrap="square" lIns="0" tIns="0" rIns="0" bIns="0" rtlCol="0" anchor="t"/>
+          <a:lstStyle/>
+          <a:p>
+            <a:pPr algn="l" marL="342900" indent="-342900">
+              <a:lnSpc>
+                <a:spcPts val="1620"/>
+              </a:lnSpc>
+              <a:spcAft>
+                <a:spcPts val="300"/>
+              </a:spcAft>
+              <a:buSzPct val="100000"/>
+              <a:buChar char="•"/>
+            </a:pPr>
+            <a:r>
+              <a:rPr lang="en-US" sz="1200" b="1" dirty="0">
+                <a:solidFill>
+                  <a:srgbClr val="1C2833"/>
+                </a:solidFill>
+                <a:latin typeface="Arial" pitchFamily="34" charset="0"/>
+                <a:ea typeface="Arial" pitchFamily="34" charset="-122"/>
+                <a:cs typeface="Arial" pitchFamily="34" charset="-120"/>
+              </a:rPr>
+              <a:t>The 12 lunar months.</a:t>
+            </a:r>
+            <a:pPr algn="l" indent="0" marL="0">
+              <a:lnSpc>
+                <a:spcPts val="1620"/>
+              </a:lnSpc>
+              <a:spcAft>
+                <a:spcPts val="300"/>
+              </a:spcAft>
+              <a:buNone/>
+            </a:pPr>
+            <a:r>
+              <a:rPr lang="en-US" sz="1200" dirty="0">
+                <a:solidFill>
+                  <a:srgbClr val="1C2833"/>
+                </a:solidFill>
+                <a:latin typeface="Arial" pitchFamily="34" charset="0"/>
+                <a:ea typeface="Arial" pitchFamily="34" charset="-122"/>
+                <a:cs typeface="Arial" pitchFamily="34" charset="-120"/>
+              </a:rPr>
+              <a:t> Write the list on the board:</a:t>
+            </a:r>
+            <a:endParaRPr lang="en-US" sz="1200" dirty="0"/>
+          </a:p>
+        </p:txBody>
+      </p:sp>
+      <p:sp>
+        <p:nvSpPr>
+          <p:cNvPr id="5" name="Text 3"/>
+          <p:cNvSpPr/>
+          <p:nvPr/>
+        </p:nvSpPr>
+        <p:spPr>
+          <a:xfrm>
+            <a:off x="406301" y="1254323"/>
             <a:ext cx="8498026" cy="213271"/>
           </a:xfrm>
           <a:prstGeom prst="rect">
@@ -5146,81 +10098,15 @@
               <a:buNone/>
             </a:pPr>
             <a:r>
-              <a:rPr lang="en-US" sz="1200" dirty="0">
-                <a:solidFill>
-                  <a:srgbClr val="1C2833"/>
-                </a:solidFill>
-                <a:latin typeface="Arial" pitchFamily="34" charset="0"/>
-                <a:ea typeface="Arial" pitchFamily="34" charset="-122"/>
-                <a:cs typeface="Arial" pitchFamily="34" charset="-120"/>
-              </a:rPr>
-              <a:t>– One student names a festival their family celebrates; the class names the tithi+pakṣa+month. Two rounds.</a:t>
-            </a:r>
-            <a:endParaRPr lang="en-US" sz="1200" dirty="0"/>
-          </a:p>
-        </p:txBody>
-      </p:sp>
-      <p:sp>
-        <p:nvSpPr>
-          <p:cNvPr id="5" name="Text 3"/>
-          <p:cNvSpPr/>
-          <p:nvPr/>
-        </p:nvSpPr>
-        <p:spPr>
-          <a:xfrm>
-            <a:off x="634901" y="1173063"/>
-            <a:ext cx="8102798" cy="487561"/>
-          </a:xfrm>
-          <a:prstGeom prst="rect">
-            <a:avLst/>
-          </a:prstGeom>
-          <a:noFill/>
-          <a:ln/>
-        </p:spPr>
-        <p:txBody>
-          <a:bodyPr wrap="square" lIns="0" tIns="0" rIns="0" bIns="0" rtlCol="0" anchor="t"/>
-          <a:lstStyle/>
-          <a:p>
-            <a:pPr algn="l" marL="342900" indent="-342900">
-              <a:lnSpc>
-                <a:spcPts val="1620"/>
-              </a:lnSpc>
-              <a:spcAft>
-                <a:spcPts val="300"/>
-              </a:spcAft>
-              <a:buSzPct val="100000"/>
-              <a:buChar char="•"/>
-            </a:pPr>
-            <a:r>
-              <a:rPr lang="en-US" sz="1200" b="1" dirty="0">
-                <a:solidFill>
-                  <a:srgbClr val="1C2833"/>
-                </a:solidFill>
-                <a:latin typeface="Arial" pitchFamily="34" charset="0"/>
-                <a:ea typeface="Arial" pitchFamily="34" charset="-122"/>
-                <a:cs typeface="Arial" pitchFamily="34" charset="-120"/>
-              </a:rPr>
-              <a:t>Project decision deadline:</a:t>
-            </a:r>
-            <a:pPr algn="l" indent="0" marL="0">
-              <a:lnSpc>
-                <a:spcPts val="1620"/>
-              </a:lnSpc>
-              <a:spcAft>
-                <a:spcPts val="300"/>
-              </a:spcAft>
-              <a:buNone/>
-            </a:pPr>
-            <a:r>
-              <a:rPr lang="en-US" sz="1200" dirty="0">
-                <a:solidFill>
-                  <a:srgbClr val="1C2833"/>
-                </a:solidFill>
-                <a:latin typeface="Arial" pitchFamily="34" charset="0"/>
-                <a:ea typeface="Arial" pitchFamily="34" charset="-122"/>
-                <a:cs typeface="Arial" pitchFamily="34" charset="-120"/>
-              </a:rPr>
-              <a:t> by the end of today, every student has a project partner (or has confirmed individual work) and a tentative topic. Sticky note on the board.</a:t>
+              <a:rPr lang="en-US" sz="1200" i="1" dirty="0">
+                <a:solidFill>
+                  <a:srgbClr val="1C2833"/>
+                </a:solidFill>
+                <a:latin typeface="Arial" pitchFamily="34" charset="0"/>
+                <a:ea typeface="Arial" pitchFamily="34" charset="-122"/>
+                <a:cs typeface="Arial" pitchFamily="34" charset="-120"/>
+              </a:rPr>
+              <a:t>Each row: # · Lunar month (IAST) · Roughly corresponds to · Named after.</a:t>
             </a:r>
             <a:endParaRPr lang="en-US" sz="1200" dirty="0"/>
           </a:p>
@@ -5378,7 +10264,7 @@
                 <a:ea typeface="Georgia" pitchFamily="34" charset="-122"/>
                 <a:cs typeface="Georgia" pitchFamily="34" charset="-120"/>
               </a:rPr>
-              <a:t>Student-facing content</a:t>
+              <a:t>Core (20 min) (cont.)</a:t>
             </a:r>
             <a:endParaRPr lang="en-US" sz="1800" dirty="0"/>
           </a:p>
@@ -5392,61 +10278,8 @@
         </p:nvSpPr>
         <p:spPr>
           <a:xfrm>
-            <a:off x="406301" y="883593"/>
-            <a:ext cx="8331398" cy="2112169"/>
-          </a:xfrm>
-          <a:prstGeom prst="rect">
-            <a:avLst/>
-          </a:prstGeom>
-          <a:solidFill>
-            <a:srgbClr val="F4F8F9"/>
-          </a:solidFill>
-          <a:ln/>
-        </p:spPr>
-        <p:txBody>
-          <a:bodyPr wrap="square" rtlCol="0" anchor="ctr"/>
-          <a:lstStyle/>
-          <a:p>
-            <a:pPr indent="0" marL="0">
-              <a:buNone/>
-            </a:pPr>
-            <a:endParaRPr lang="en-US" dirty="0"/>
-          </a:p>
-        </p:txBody>
-      </p:sp>
-      <p:sp>
-        <p:nvSpPr>
-          <p:cNvPr id="5" name="Shape 3"/>
-          <p:cNvSpPr/>
-          <p:nvPr/>
-        </p:nvSpPr>
-        <p:spPr>
-          <a:xfrm>
-            <a:off x="434876" y="883593"/>
-            <a:ext cx="0" cy="2112169"/>
-          </a:xfrm>
-          <a:prstGeom prst="line">
-            <a:avLst/>
-          </a:prstGeom>
-          <a:noFill/>
-          <a:ln w="57150">
-            <a:solidFill>
-              <a:srgbClr val="FE4447"/>
-            </a:solidFill>
-            <a:prstDash val="solid"/>
-          </a:ln>
-        </p:spPr>
-      </p:sp>
-      <p:sp>
-        <p:nvSpPr>
-          <p:cNvPr id="6" name="Text 4"/>
-          <p:cNvSpPr/>
-          <p:nvPr/>
-        </p:nvSpPr>
-        <p:spPr>
-          <a:xfrm>
-            <a:off x="692051" y="1074093"/>
-            <a:ext cx="7973389" cy="230981"/>
+            <a:off x="634901" y="883593"/>
+            <a:ext cx="8102798" cy="2719685"/>
           </a:xfrm>
           <a:prstGeom prst="rect">
             <a:avLst/>
@@ -5458,548 +10291,1234 @@
           <a:bodyPr wrap="square" lIns="0" tIns="0" rIns="0" bIns="0" rtlCol="0" anchor="t"/>
           <a:lstStyle/>
           <a:p>
-            <a:pPr algn="l" indent="0" marL="0">
-              <a:lnSpc>
-                <a:spcPts val="1820"/>
-              </a:lnSpc>
-              <a:spcBef>
-                <a:spcPts val="300"/>
-              </a:spcBef>
-              <a:spcAft>
-                <a:spcPts val="300"/>
-              </a:spcAft>
-              <a:buNone/>
-            </a:pPr>
-            <a:r>
-              <a:rPr lang="en-US" sz="1300" dirty="0">
-                <a:solidFill>
-                  <a:srgbClr val="1C2833"/>
-                </a:solidFill>
-                <a:latin typeface="Georgia" pitchFamily="34" charset="0"/>
-                <a:ea typeface="Georgia" pitchFamily="34" charset="-122"/>
-                <a:cs typeface="Georgia" pitchFamily="34" charset="-120"/>
-              </a:rPr>
-              <a:t>*</a:t>
-            </a:r>
-            <a:pPr algn="l" indent="0" marL="0">
-              <a:lnSpc>
-                <a:spcPts val="1820"/>
-              </a:lnSpc>
-              <a:spcBef>
-                <a:spcPts val="300"/>
-              </a:spcBef>
-              <a:spcAft>
-                <a:spcPts val="300"/>
-              </a:spcAft>
-              <a:buNone/>
-            </a:pPr>
-            <a:r>
-              <a:rPr lang="en-US" sz="1300" i="1" dirty="0">
-                <a:solidFill>
-                  <a:srgbClr val="1C2833"/>
-                </a:solidFill>
-                <a:latin typeface="Georgia" pitchFamily="34" charset="0"/>
-                <a:ea typeface="Georgia" pitchFamily="34" charset="-122"/>
-                <a:cs typeface="Georgia" pitchFamily="34" charset="-120"/>
-              </a:rPr>
-              <a:t>There are 12 lunar months. Each is named after the</a:t>
-            </a:r>
-            <a:pPr algn="l" indent="0" marL="0">
-              <a:lnSpc>
-                <a:spcPts val="1820"/>
-              </a:lnSpc>
-              <a:spcBef>
-                <a:spcPts val="300"/>
-              </a:spcBef>
-              <a:spcAft>
-                <a:spcPts val="300"/>
-              </a:spcAft>
-              <a:buNone/>
-            </a:pPr>
-            <a:r>
-              <a:rPr lang="en-US" sz="1300" dirty="0">
-                <a:solidFill>
-                  <a:srgbClr val="1C2833"/>
-                </a:solidFill>
-                <a:latin typeface="Georgia" pitchFamily="34" charset="0"/>
-                <a:ea typeface="Georgia" pitchFamily="34" charset="-122"/>
-                <a:cs typeface="Georgia" pitchFamily="34" charset="-120"/>
-              </a:rPr>
-              <a:t>nakṣatra</a:t>
-            </a:r>
-            <a:pPr algn="l" indent="0" marL="0">
-              <a:lnSpc>
-                <a:spcPts val="1820"/>
-              </a:lnSpc>
-              <a:spcBef>
-                <a:spcPts val="300"/>
-              </a:spcBef>
-              <a:spcAft>
-                <a:spcPts val="300"/>
-              </a:spcAft>
-              <a:buNone/>
-            </a:pPr>
-            <a:r>
-              <a:rPr lang="en-US" sz="1300" i="1" dirty="0">
-                <a:solidFill>
-                  <a:srgbClr val="1C2833"/>
-                </a:solidFill>
-                <a:latin typeface="Georgia" pitchFamily="34" charset="0"/>
-                <a:ea typeface="Georgia" pitchFamily="34" charset="-122"/>
-                <a:cs typeface="Georgia" pitchFamily="34" charset="-120"/>
-              </a:rPr>
-              <a:t> in which its</a:t>
-            </a:r>
-            <a:pPr algn="l" indent="0" marL="0">
-              <a:lnSpc>
-                <a:spcPts val="1820"/>
-              </a:lnSpc>
-              <a:spcBef>
-                <a:spcPts val="300"/>
-              </a:spcBef>
-              <a:spcAft>
-                <a:spcPts val="300"/>
-              </a:spcAft>
-              <a:buNone/>
-            </a:pPr>
-            <a:r>
-              <a:rPr lang="en-US" sz="1300" dirty="0">
-                <a:solidFill>
-                  <a:srgbClr val="1C2833"/>
-                </a:solidFill>
-                <a:latin typeface="Georgia" pitchFamily="34" charset="0"/>
-                <a:ea typeface="Georgia" pitchFamily="34" charset="-122"/>
-                <a:cs typeface="Georgia" pitchFamily="34" charset="-120"/>
-              </a:rPr>
-              <a:t>pūrṇimā</a:t>
-            </a:r>
-            <a:pPr algn="l" indent="0" marL="0">
-              <a:lnSpc>
-                <a:spcPts val="1820"/>
-              </a:lnSpc>
-              <a:spcBef>
-                <a:spcPts val="300"/>
-              </a:spcBef>
-              <a:spcAft>
-                <a:spcPts val="300"/>
-              </a:spcAft>
-              <a:buNone/>
-            </a:pPr>
-            <a:r>
-              <a:rPr lang="en-US" sz="1300" i="1" dirty="0">
-                <a:solidFill>
-                  <a:srgbClr val="1C2833"/>
-                </a:solidFill>
-                <a:latin typeface="Georgia" pitchFamily="34" charset="0"/>
-                <a:ea typeface="Georgia" pitchFamily="34" charset="-122"/>
-                <a:cs typeface="Georgia" pitchFamily="34" charset="-120"/>
-              </a:rPr>
-              <a:t> falls.</a:t>
-            </a:r>
-            <a:pPr algn="l" indent="0" marL="0">
-              <a:lnSpc>
-                <a:spcPts val="1820"/>
-              </a:lnSpc>
-              <a:spcBef>
-                <a:spcPts val="300"/>
-              </a:spcBef>
-              <a:spcAft>
-                <a:spcPts val="300"/>
-              </a:spcAft>
-              <a:buNone/>
-            </a:pPr>
-            <a:r>
-              <a:rPr lang="en-US" sz="1300" dirty="0">
-                <a:solidFill>
-                  <a:srgbClr val="1C2833"/>
-                </a:solidFill>
-                <a:latin typeface="Georgia" pitchFamily="34" charset="0"/>
-                <a:ea typeface="Georgia" pitchFamily="34" charset="-122"/>
-                <a:cs typeface="Georgia" pitchFamily="34" charset="-120"/>
-              </a:rPr>
-              <a:t>*</a:t>
-            </a:r>
-            <a:endParaRPr lang="en-US" sz="1300" dirty="0"/>
-          </a:p>
-        </p:txBody>
-      </p:sp>
-      <p:sp>
-        <p:nvSpPr>
-          <p:cNvPr id="7" name="Text 5"/>
-          <p:cNvSpPr/>
-          <p:nvPr/>
-        </p:nvSpPr>
-        <p:spPr>
-          <a:xfrm>
-            <a:off x="692051" y="1343174"/>
-            <a:ext cx="7973389" cy="461963"/>
-          </a:xfrm>
-          <a:prstGeom prst="rect">
-            <a:avLst/>
-          </a:prstGeom>
-          <a:noFill/>
-          <a:ln/>
-        </p:spPr>
-        <p:txBody>
-          <a:bodyPr wrap="square" lIns="0" tIns="0" rIns="0" bIns="0" rtlCol="0" anchor="t"/>
-          <a:lstStyle/>
-          <a:p>
-            <a:pPr algn="l" indent="0" marL="0">
-              <a:lnSpc>
-                <a:spcPts val="1820"/>
-              </a:lnSpc>
-              <a:spcBef>
-                <a:spcPts val="300"/>
-              </a:spcBef>
-              <a:spcAft>
-                <a:spcPts val="300"/>
-              </a:spcAft>
-              <a:buNone/>
-            </a:pPr>
-            <a:r>
-              <a:rPr lang="en-US" sz="1300" i="1" dirty="0">
-                <a:solidFill>
-                  <a:srgbClr val="1C2833"/>
-                </a:solidFill>
-                <a:latin typeface="Georgia" pitchFamily="34" charset="0"/>
-                <a:ea typeface="Georgia" pitchFamily="34" charset="-122"/>
-                <a:cs typeface="Georgia" pitchFamily="34" charset="-120"/>
-              </a:rPr>
-              <a:t>Caitra, Vaiśākha, Jyeṣṭha, Āṣāḍha, Śrāvaṇa, Bhādrapada, Āśvina, Kārtika, Mārgaśīrṣa, Pauṣa, Māgha, Phālguna.</a:t>
-            </a:r>
-            <a:endParaRPr lang="en-US" sz="1300" dirty="0"/>
-          </a:p>
-        </p:txBody>
-      </p:sp>
-      <p:sp>
-        <p:nvSpPr>
-          <p:cNvPr id="8" name="Text 6"/>
-          <p:cNvSpPr/>
-          <p:nvPr/>
-        </p:nvSpPr>
-        <p:spPr>
-          <a:xfrm>
-            <a:off x="692051" y="1843236"/>
-            <a:ext cx="7973389" cy="461963"/>
-          </a:xfrm>
-          <a:prstGeom prst="rect">
-            <a:avLst/>
-          </a:prstGeom>
-          <a:noFill/>
-          <a:ln/>
-        </p:spPr>
-        <p:txBody>
-          <a:bodyPr wrap="square" lIns="0" tIns="0" rIns="0" bIns="0" rtlCol="0" anchor="t"/>
-          <a:lstStyle/>
-          <a:p>
-            <a:pPr algn="l" indent="0" marL="0">
-              <a:lnSpc>
-                <a:spcPts val="1820"/>
-              </a:lnSpc>
-              <a:spcBef>
-                <a:spcPts val="300"/>
-              </a:spcBef>
-              <a:spcAft>
-                <a:spcPts val="300"/>
-              </a:spcAft>
-              <a:buNone/>
-            </a:pPr>
-            <a:r>
-              <a:rPr lang="en-US" sz="1300" dirty="0">
-                <a:solidFill>
-                  <a:srgbClr val="1C2833"/>
-                </a:solidFill>
-                <a:latin typeface="Georgia" pitchFamily="34" charset="0"/>
-                <a:ea typeface="Georgia" pitchFamily="34" charset="-122"/>
-                <a:cs typeface="Georgia" pitchFamily="34" charset="-120"/>
-              </a:rPr>
-              <a:t>Two conventions: months end at </a:t>
-            </a:r>
-            <a:pPr algn="l" indent="0" marL="0">
-              <a:lnSpc>
-                <a:spcPts val="1820"/>
-              </a:lnSpc>
-              <a:spcBef>
-                <a:spcPts val="300"/>
-              </a:spcBef>
-              <a:spcAft>
-                <a:spcPts val="300"/>
-              </a:spcAft>
-              <a:buNone/>
-            </a:pPr>
-            <a:r>
-              <a:rPr lang="en-US" sz="1300" i="1" dirty="0">
-                <a:solidFill>
-                  <a:srgbClr val="1C2833"/>
-                </a:solidFill>
-                <a:latin typeface="Georgia" pitchFamily="34" charset="0"/>
-                <a:ea typeface="Georgia" pitchFamily="34" charset="-122"/>
-                <a:cs typeface="Georgia" pitchFamily="34" charset="-120"/>
-              </a:rPr>
-              <a:t>amāvasyā</a:t>
-            </a:r>
-            <a:pPr algn="l" indent="0" marL="0">
-              <a:lnSpc>
-                <a:spcPts val="1820"/>
-              </a:lnSpc>
-              <a:spcBef>
-                <a:spcPts val="300"/>
-              </a:spcBef>
-              <a:spcAft>
-                <a:spcPts val="300"/>
-              </a:spcAft>
-              <a:buNone/>
-            </a:pPr>
-            <a:r>
-              <a:rPr lang="en-US" sz="1300" dirty="0">
-                <a:solidFill>
-                  <a:srgbClr val="1C2833"/>
-                </a:solidFill>
-                <a:latin typeface="Georgia" pitchFamily="34" charset="0"/>
-                <a:ea typeface="Georgia" pitchFamily="34" charset="-122"/>
-                <a:cs typeface="Georgia" pitchFamily="34" charset="-120"/>
-              </a:rPr>
-              <a:t> (</a:t>
-            </a:r>
-            <a:pPr algn="l" indent="0" marL="0">
-              <a:lnSpc>
-                <a:spcPts val="1820"/>
-              </a:lnSpc>
-              <a:spcBef>
-                <a:spcPts val="300"/>
-              </a:spcBef>
-              <a:spcAft>
-                <a:spcPts val="300"/>
-              </a:spcAft>
-              <a:buNone/>
-            </a:pPr>
-            <a:r>
-              <a:rPr lang="en-US" sz="1300" i="1" dirty="0">
-                <a:solidFill>
-                  <a:srgbClr val="1C2833"/>
-                </a:solidFill>
-                <a:latin typeface="Georgia" pitchFamily="34" charset="0"/>
-                <a:ea typeface="Georgia" pitchFamily="34" charset="-122"/>
-                <a:cs typeface="Georgia" pitchFamily="34" charset="-120"/>
-              </a:rPr>
-              <a:t>amānta</a:t>
-            </a:r>
-            <a:pPr algn="l" indent="0" marL="0">
-              <a:lnSpc>
-                <a:spcPts val="1820"/>
-              </a:lnSpc>
-              <a:spcBef>
-                <a:spcPts val="300"/>
-              </a:spcBef>
-              <a:spcAft>
-                <a:spcPts val="300"/>
-              </a:spcAft>
-              <a:buNone/>
-            </a:pPr>
-            <a:r>
-              <a:rPr lang="en-US" sz="1300" dirty="0">
-                <a:solidFill>
-                  <a:srgbClr val="1C2833"/>
-                </a:solidFill>
-                <a:latin typeface="Georgia" pitchFamily="34" charset="0"/>
-                <a:ea typeface="Georgia" pitchFamily="34" charset="-122"/>
-                <a:cs typeface="Georgia" pitchFamily="34" charset="-120"/>
-              </a:rPr>
-              <a:t>) or at </a:t>
-            </a:r>
-            <a:pPr algn="l" indent="0" marL="0">
-              <a:lnSpc>
-                <a:spcPts val="1820"/>
-              </a:lnSpc>
-              <a:spcBef>
-                <a:spcPts val="300"/>
-              </a:spcBef>
-              <a:spcAft>
-                <a:spcPts val="300"/>
-              </a:spcAft>
-              <a:buNone/>
-            </a:pPr>
-            <a:r>
-              <a:rPr lang="en-US" sz="1300" i="1" dirty="0">
-                <a:solidFill>
-                  <a:srgbClr val="1C2833"/>
-                </a:solidFill>
-                <a:latin typeface="Georgia" pitchFamily="34" charset="0"/>
-                <a:ea typeface="Georgia" pitchFamily="34" charset="-122"/>
-                <a:cs typeface="Georgia" pitchFamily="34" charset="-120"/>
-              </a:rPr>
-              <a:t>pūrṇimā</a:t>
-            </a:r>
-            <a:pPr algn="l" indent="0" marL="0">
-              <a:lnSpc>
-                <a:spcPts val="1820"/>
-              </a:lnSpc>
-              <a:spcBef>
-                <a:spcPts val="300"/>
-              </a:spcBef>
-              <a:spcAft>
-                <a:spcPts val="300"/>
-              </a:spcAft>
-              <a:buNone/>
-            </a:pPr>
-            <a:r>
-              <a:rPr lang="en-US" sz="1300" dirty="0">
-                <a:solidFill>
-                  <a:srgbClr val="1C2833"/>
-                </a:solidFill>
-                <a:latin typeface="Georgia" pitchFamily="34" charset="0"/>
-                <a:ea typeface="Georgia" pitchFamily="34" charset="-122"/>
-                <a:cs typeface="Georgia" pitchFamily="34" charset="-120"/>
-              </a:rPr>
-              <a:t> (</a:t>
-            </a:r>
-            <a:pPr algn="l" indent="0" marL="0">
-              <a:lnSpc>
-                <a:spcPts val="1820"/>
-              </a:lnSpc>
-              <a:spcBef>
-                <a:spcPts val="300"/>
-              </a:spcBef>
-              <a:spcAft>
-                <a:spcPts val="300"/>
-              </a:spcAft>
-              <a:buNone/>
-            </a:pPr>
-            <a:r>
-              <a:rPr lang="en-US" sz="1300" i="1" dirty="0">
-                <a:solidFill>
-                  <a:srgbClr val="1C2833"/>
-                </a:solidFill>
-                <a:latin typeface="Georgia" pitchFamily="34" charset="0"/>
-                <a:ea typeface="Georgia" pitchFamily="34" charset="-122"/>
-                <a:cs typeface="Georgia" pitchFamily="34" charset="-120"/>
-              </a:rPr>
-              <a:t>pūrṇimānta</a:t>
-            </a:r>
-            <a:pPr algn="l" indent="0" marL="0">
-              <a:lnSpc>
-                <a:spcPts val="1820"/>
-              </a:lnSpc>
-              <a:spcBef>
-                <a:spcPts val="300"/>
-              </a:spcBef>
-              <a:spcAft>
-                <a:spcPts val="300"/>
-              </a:spcAft>
-              <a:buNone/>
-            </a:pPr>
-            <a:r>
-              <a:rPr lang="en-US" sz="1300" dirty="0">
-                <a:solidFill>
-                  <a:srgbClr val="1C2833"/>
-                </a:solidFill>
-                <a:latin typeface="Georgia" pitchFamily="34" charset="0"/>
-                <a:ea typeface="Georgia" pitchFamily="34" charset="-122"/>
-                <a:cs typeface="Georgia" pitchFamily="34" charset="-120"/>
-              </a:rPr>
-              <a:t>). Different regions, different conventions — same astronomy.</a:t>
-            </a:r>
-            <a:endParaRPr lang="en-US" sz="1300" dirty="0"/>
-          </a:p>
-        </p:txBody>
-      </p:sp>
-      <p:sp>
-        <p:nvSpPr>
-          <p:cNvPr id="9" name="Text 7"/>
-          <p:cNvSpPr/>
-          <p:nvPr/>
-        </p:nvSpPr>
-        <p:spPr>
-          <a:xfrm>
-            <a:off x="692051" y="2343299"/>
-            <a:ext cx="7973389" cy="461963"/>
-          </a:xfrm>
-          <a:prstGeom prst="rect">
-            <a:avLst/>
-          </a:prstGeom>
-          <a:noFill/>
-          <a:ln/>
-        </p:spPr>
-        <p:txBody>
-          <a:bodyPr wrap="square" lIns="0" tIns="0" rIns="0" bIns="0" rtlCol="0" anchor="t"/>
-          <a:lstStyle/>
-          <a:p>
-            <a:pPr algn="l" indent="0" marL="0">
-              <a:lnSpc>
-                <a:spcPts val="1820"/>
-              </a:lnSpc>
-              <a:spcBef>
-                <a:spcPts val="300"/>
-              </a:spcBef>
-              <a:spcAft>
-                <a:spcPts val="300"/>
-              </a:spcAft>
-              <a:buNone/>
-            </a:pPr>
-            <a:r>
-              <a:rPr lang="en-US" sz="1300" dirty="0">
-                <a:solidFill>
-                  <a:srgbClr val="1C2833"/>
-                </a:solidFill>
-                <a:latin typeface="Georgia" pitchFamily="34" charset="0"/>
-                <a:ea typeface="Georgia" pitchFamily="34" charset="-122"/>
-                <a:cs typeface="Georgia" pitchFamily="34" charset="-120"/>
-              </a:rPr>
-              <a:t>Every Indian festival sits at a precise (month + pakṣa + tithi) coordinate. The </a:t>
-            </a:r>
-            <a:pPr algn="l" indent="0" marL="0">
-              <a:lnSpc>
-                <a:spcPts val="1820"/>
-              </a:lnSpc>
-              <a:spcBef>
-                <a:spcPts val="300"/>
-              </a:spcBef>
-              <a:spcAft>
-                <a:spcPts val="300"/>
-              </a:spcAft>
-              <a:buNone/>
-            </a:pPr>
-            <a:r>
-              <a:rPr lang="en-US" sz="1300" i="1" dirty="0">
-                <a:solidFill>
-                  <a:srgbClr val="1C2833"/>
-                </a:solidFill>
-                <a:latin typeface="Georgia" pitchFamily="34" charset="0"/>
-                <a:ea typeface="Georgia" pitchFamily="34" charset="-122"/>
-                <a:cs typeface="Georgia" pitchFamily="34" charset="-120"/>
-              </a:rPr>
-              <a:t>pañcāṅga</a:t>
-            </a:r>
-            <a:pPr algn="l" indent="0" marL="0">
-              <a:lnSpc>
-                <a:spcPts val="1820"/>
-              </a:lnSpc>
-              <a:spcBef>
-                <a:spcPts val="300"/>
-              </a:spcBef>
-              <a:spcAft>
-                <a:spcPts val="300"/>
-              </a:spcAft>
-              <a:buNone/>
-            </a:pPr>
-            <a:r>
-              <a:rPr lang="en-US" sz="1300" dirty="0">
-                <a:solidFill>
-                  <a:srgbClr val="1C2833"/>
-                </a:solidFill>
-                <a:latin typeface="Georgia" pitchFamily="34" charset="0"/>
-                <a:ea typeface="Georgia" pitchFamily="34" charset="-122"/>
-                <a:cs typeface="Georgia" pitchFamily="34" charset="-120"/>
-              </a:rPr>
-              <a:t> tells you exactly when.</a:t>
-            </a:r>
-            <a:endParaRPr lang="en-US" sz="1300" dirty="0"/>
-          </a:p>
-        </p:txBody>
-      </p:sp>
-      <p:sp>
-        <p:nvSpPr>
-          <p:cNvPr id="10" name="Text 8"/>
+            <a:pPr algn="l" marL="342900" indent="-342900">
+              <a:lnSpc>
+                <a:spcPts val="1620"/>
+              </a:lnSpc>
+              <a:spcAft>
+                <a:spcPts val="300"/>
+              </a:spcAft>
+              <a:buSzPct val="100000"/>
+              <a:buChar char="•"/>
+            </a:pPr>
+            <a:r>
+              <a:rPr lang="en-US" sz="1200" b="1" dirty="0">
+                <a:solidFill>
+                  <a:srgbClr val="1C2833"/>
+                </a:solidFill>
+                <a:latin typeface="Arial" pitchFamily="34" charset="0"/>
+                <a:ea typeface="Arial" pitchFamily="34" charset="-122"/>
+                <a:cs typeface="Arial" pitchFamily="34" charset="-120"/>
+              </a:rPr>
+              <a:t>1</a:t>
+            </a:r>
+            <a:pPr algn="l" indent="0" marL="0">
+              <a:lnSpc>
+                <a:spcPts val="1620"/>
+              </a:lnSpc>
+              <a:spcAft>
+                <a:spcPts val="300"/>
+              </a:spcAft>
+              <a:buNone/>
+            </a:pPr>
+            <a:r>
+              <a:rPr lang="en-US" sz="1200" dirty="0">
+                <a:solidFill>
+                  <a:srgbClr val="1C2833"/>
+                </a:solidFill>
+                <a:latin typeface="Arial" pitchFamily="34" charset="0"/>
+                <a:ea typeface="Arial" pitchFamily="34" charset="-122"/>
+                <a:cs typeface="Arial" pitchFamily="34" charset="-120"/>
+              </a:rPr>
+              <a:t> — </a:t>
+            </a:r>
+            <a:pPr algn="l" indent="0" marL="0">
+              <a:lnSpc>
+                <a:spcPts val="1620"/>
+              </a:lnSpc>
+              <a:spcAft>
+                <a:spcPts val="300"/>
+              </a:spcAft>
+              <a:buNone/>
+            </a:pPr>
+            <a:r>
+              <a:rPr lang="en-US" sz="1200" i="1" dirty="0">
+                <a:solidFill>
+                  <a:srgbClr val="1C2833"/>
+                </a:solidFill>
+                <a:latin typeface="Arial" pitchFamily="34" charset="0"/>
+                <a:ea typeface="Arial" pitchFamily="34" charset="-122"/>
+                <a:cs typeface="Arial" pitchFamily="34" charset="-120"/>
+              </a:rPr>
+              <a:t>Caitra</a:t>
+            </a:r>
+            <a:pPr algn="l" indent="0" marL="0">
+              <a:lnSpc>
+                <a:spcPts val="1620"/>
+              </a:lnSpc>
+              <a:spcAft>
+                <a:spcPts val="300"/>
+              </a:spcAft>
+              <a:buNone/>
+            </a:pPr>
+            <a:r>
+              <a:rPr lang="en-US" sz="1200" dirty="0">
+                <a:solidFill>
+                  <a:srgbClr val="1C2833"/>
+                </a:solidFill>
+                <a:latin typeface="Arial" pitchFamily="34" charset="0"/>
+                <a:ea typeface="Arial" pitchFamily="34" charset="-122"/>
+                <a:cs typeface="Arial" pitchFamily="34" charset="-120"/>
+              </a:rPr>
+              <a:t> · March–April · nakṣatra </a:t>
+            </a:r>
+            <a:pPr algn="l" indent="0" marL="0">
+              <a:lnSpc>
+                <a:spcPts val="1620"/>
+              </a:lnSpc>
+              <a:spcAft>
+                <a:spcPts val="300"/>
+              </a:spcAft>
+              <a:buNone/>
+            </a:pPr>
+            <a:r>
+              <a:rPr lang="en-US" sz="1200" i="1" dirty="0">
+                <a:solidFill>
+                  <a:srgbClr val="1C2833"/>
+                </a:solidFill>
+                <a:latin typeface="Arial" pitchFamily="34" charset="0"/>
+                <a:ea typeface="Arial" pitchFamily="34" charset="-122"/>
+                <a:cs typeface="Arial" pitchFamily="34" charset="-120"/>
+              </a:rPr>
+              <a:t>Citrā</a:t>
+            </a:r>
+            <a:endParaRPr lang="en-US" sz="1200" dirty="0"/>
+          </a:p>
+          <a:p>
+            <a:pPr algn="l" marL="342900" indent="-342900">
+              <a:lnSpc>
+                <a:spcPts val="1620"/>
+              </a:lnSpc>
+              <a:spcAft>
+                <a:spcPts val="300"/>
+              </a:spcAft>
+              <a:buSzPct val="100000"/>
+              <a:buChar char="•"/>
+            </a:pPr>
+            <a:r>
+              <a:rPr lang="en-US" sz="1200" b="1" dirty="0">
+                <a:solidFill>
+                  <a:srgbClr val="1C2833"/>
+                </a:solidFill>
+                <a:latin typeface="Arial" pitchFamily="34" charset="0"/>
+                <a:ea typeface="Arial" pitchFamily="34" charset="-122"/>
+                <a:cs typeface="Arial" pitchFamily="34" charset="-120"/>
+              </a:rPr>
+              <a:t>2</a:t>
+            </a:r>
+            <a:pPr algn="l" indent="0" marL="0">
+              <a:lnSpc>
+                <a:spcPts val="1620"/>
+              </a:lnSpc>
+              <a:spcAft>
+                <a:spcPts val="300"/>
+              </a:spcAft>
+              <a:buNone/>
+            </a:pPr>
+            <a:r>
+              <a:rPr lang="en-US" sz="1200" dirty="0">
+                <a:solidFill>
+                  <a:srgbClr val="1C2833"/>
+                </a:solidFill>
+                <a:latin typeface="Arial" pitchFamily="34" charset="0"/>
+                <a:ea typeface="Arial" pitchFamily="34" charset="-122"/>
+                <a:cs typeface="Arial" pitchFamily="34" charset="-120"/>
+              </a:rPr>
+              <a:t> — </a:t>
+            </a:r>
+            <a:pPr algn="l" indent="0" marL="0">
+              <a:lnSpc>
+                <a:spcPts val="1620"/>
+              </a:lnSpc>
+              <a:spcAft>
+                <a:spcPts val="300"/>
+              </a:spcAft>
+              <a:buNone/>
+            </a:pPr>
+            <a:r>
+              <a:rPr lang="en-US" sz="1200" i="1" dirty="0">
+                <a:solidFill>
+                  <a:srgbClr val="1C2833"/>
+                </a:solidFill>
+                <a:latin typeface="Arial" pitchFamily="34" charset="0"/>
+                <a:ea typeface="Arial" pitchFamily="34" charset="-122"/>
+                <a:cs typeface="Arial" pitchFamily="34" charset="-120"/>
+              </a:rPr>
+              <a:t>Vaiśākha</a:t>
+            </a:r>
+            <a:pPr algn="l" indent="0" marL="0">
+              <a:lnSpc>
+                <a:spcPts val="1620"/>
+              </a:lnSpc>
+              <a:spcAft>
+                <a:spcPts val="300"/>
+              </a:spcAft>
+              <a:buNone/>
+            </a:pPr>
+            <a:r>
+              <a:rPr lang="en-US" sz="1200" dirty="0">
+                <a:solidFill>
+                  <a:srgbClr val="1C2833"/>
+                </a:solidFill>
+                <a:latin typeface="Arial" pitchFamily="34" charset="0"/>
+                <a:ea typeface="Arial" pitchFamily="34" charset="-122"/>
+                <a:cs typeface="Arial" pitchFamily="34" charset="-120"/>
+              </a:rPr>
+              <a:t> · April–May · </a:t>
+            </a:r>
+            <a:pPr algn="l" indent="0" marL="0">
+              <a:lnSpc>
+                <a:spcPts val="1620"/>
+              </a:lnSpc>
+              <a:spcAft>
+                <a:spcPts val="300"/>
+              </a:spcAft>
+              <a:buNone/>
+            </a:pPr>
+            <a:r>
+              <a:rPr lang="en-US" sz="1200" i="1" dirty="0">
+                <a:solidFill>
+                  <a:srgbClr val="1C2833"/>
+                </a:solidFill>
+                <a:latin typeface="Arial" pitchFamily="34" charset="0"/>
+                <a:ea typeface="Arial" pitchFamily="34" charset="-122"/>
+                <a:cs typeface="Arial" pitchFamily="34" charset="-120"/>
+              </a:rPr>
+              <a:t>Viśākhā</a:t>
+            </a:r>
+            <a:endParaRPr lang="en-US" sz="1200" dirty="0"/>
+          </a:p>
+          <a:p>
+            <a:pPr algn="l" marL="342900" indent="-342900">
+              <a:lnSpc>
+                <a:spcPts val="1620"/>
+              </a:lnSpc>
+              <a:spcAft>
+                <a:spcPts val="300"/>
+              </a:spcAft>
+              <a:buSzPct val="100000"/>
+              <a:buChar char="•"/>
+            </a:pPr>
+            <a:r>
+              <a:rPr lang="en-US" sz="1200" b="1" dirty="0">
+                <a:solidFill>
+                  <a:srgbClr val="1C2833"/>
+                </a:solidFill>
+                <a:latin typeface="Arial" pitchFamily="34" charset="0"/>
+                <a:ea typeface="Arial" pitchFamily="34" charset="-122"/>
+                <a:cs typeface="Arial" pitchFamily="34" charset="-120"/>
+              </a:rPr>
+              <a:t>3</a:t>
+            </a:r>
+            <a:pPr algn="l" indent="0" marL="0">
+              <a:lnSpc>
+                <a:spcPts val="1620"/>
+              </a:lnSpc>
+              <a:spcAft>
+                <a:spcPts val="300"/>
+              </a:spcAft>
+              <a:buNone/>
+            </a:pPr>
+            <a:r>
+              <a:rPr lang="en-US" sz="1200" dirty="0">
+                <a:solidFill>
+                  <a:srgbClr val="1C2833"/>
+                </a:solidFill>
+                <a:latin typeface="Arial" pitchFamily="34" charset="0"/>
+                <a:ea typeface="Arial" pitchFamily="34" charset="-122"/>
+                <a:cs typeface="Arial" pitchFamily="34" charset="-120"/>
+              </a:rPr>
+              <a:t> — </a:t>
+            </a:r>
+            <a:pPr algn="l" indent="0" marL="0">
+              <a:lnSpc>
+                <a:spcPts val="1620"/>
+              </a:lnSpc>
+              <a:spcAft>
+                <a:spcPts val="300"/>
+              </a:spcAft>
+              <a:buNone/>
+            </a:pPr>
+            <a:r>
+              <a:rPr lang="en-US" sz="1200" i="1" dirty="0">
+                <a:solidFill>
+                  <a:srgbClr val="1C2833"/>
+                </a:solidFill>
+                <a:latin typeface="Arial" pitchFamily="34" charset="0"/>
+                <a:ea typeface="Arial" pitchFamily="34" charset="-122"/>
+                <a:cs typeface="Arial" pitchFamily="34" charset="-120"/>
+              </a:rPr>
+              <a:t>Jyeṣṭha</a:t>
+            </a:r>
+            <a:pPr algn="l" indent="0" marL="0">
+              <a:lnSpc>
+                <a:spcPts val="1620"/>
+              </a:lnSpc>
+              <a:spcAft>
+                <a:spcPts val="300"/>
+              </a:spcAft>
+              <a:buNone/>
+            </a:pPr>
+            <a:r>
+              <a:rPr lang="en-US" sz="1200" dirty="0">
+                <a:solidFill>
+                  <a:srgbClr val="1C2833"/>
+                </a:solidFill>
+                <a:latin typeface="Arial" pitchFamily="34" charset="0"/>
+                <a:ea typeface="Arial" pitchFamily="34" charset="-122"/>
+                <a:cs typeface="Arial" pitchFamily="34" charset="-120"/>
+              </a:rPr>
+              <a:t> · May–June · </a:t>
+            </a:r>
+            <a:pPr algn="l" indent="0" marL="0">
+              <a:lnSpc>
+                <a:spcPts val="1620"/>
+              </a:lnSpc>
+              <a:spcAft>
+                <a:spcPts val="300"/>
+              </a:spcAft>
+              <a:buNone/>
+            </a:pPr>
+            <a:r>
+              <a:rPr lang="en-US" sz="1200" i="1" dirty="0">
+                <a:solidFill>
+                  <a:srgbClr val="1C2833"/>
+                </a:solidFill>
+                <a:latin typeface="Arial" pitchFamily="34" charset="0"/>
+                <a:ea typeface="Arial" pitchFamily="34" charset="-122"/>
+                <a:cs typeface="Arial" pitchFamily="34" charset="-120"/>
+              </a:rPr>
+              <a:t>Jyeṣṭhā</a:t>
+            </a:r>
+            <a:endParaRPr lang="en-US" sz="1200" dirty="0"/>
+          </a:p>
+          <a:p>
+            <a:pPr algn="l" marL="342900" indent="-342900">
+              <a:lnSpc>
+                <a:spcPts val="1620"/>
+              </a:lnSpc>
+              <a:spcAft>
+                <a:spcPts val="300"/>
+              </a:spcAft>
+              <a:buSzPct val="100000"/>
+              <a:buChar char="•"/>
+            </a:pPr>
+            <a:r>
+              <a:rPr lang="en-US" sz="1200" b="1" dirty="0">
+                <a:solidFill>
+                  <a:srgbClr val="1C2833"/>
+                </a:solidFill>
+                <a:latin typeface="Arial" pitchFamily="34" charset="0"/>
+                <a:ea typeface="Arial" pitchFamily="34" charset="-122"/>
+                <a:cs typeface="Arial" pitchFamily="34" charset="-120"/>
+              </a:rPr>
+              <a:t>4</a:t>
+            </a:r>
+            <a:pPr algn="l" indent="0" marL="0">
+              <a:lnSpc>
+                <a:spcPts val="1620"/>
+              </a:lnSpc>
+              <a:spcAft>
+                <a:spcPts val="300"/>
+              </a:spcAft>
+              <a:buNone/>
+            </a:pPr>
+            <a:r>
+              <a:rPr lang="en-US" sz="1200" dirty="0">
+                <a:solidFill>
+                  <a:srgbClr val="1C2833"/>
+                </a:solidFill>
+                <a:latin typeface="Arial" pitchFamily="34" charset="0"/>
+                <a:ea typeface="Arial" pitchFamily="34" charset="-122"/>
+                <a:cs typeface="Arial" pitchFamily="34" charset="-120"/>
+              </a:rPr>
+              <a:t> — </a:t>
+            </a:r>
+            <a:pPr algn="l" indent="0" marL="0">
+              <a:lnSpc>
+                <a:spcPts val="1620"/>
+              </a:lnSpc>
+              <a:spcAft>
+                <a:spcPts val="300"/>
+              </a:spcAft>
+              <a:buNone/>
+            </a:pPr>
+            <a:r>
+              <a:rPr lang="en-US" sz="1200" i="1" dirty="0">
+                <a:solidFill>
+                  <a:srgbClr val="1C2833"/>
+                </a:solidFill>
+                <a:latin typeface="Arial" pitchFamily="34" charset="0"/>
+                <a:ea typeface="Arial" pitchFamily="34" charset="-122"/>
+                <a:cs typeface="Arial" pitchFamily="34" charset="-120"/>
+              </a:rPr>
+              <a:t>Āṣāḍha</a:t>
+            </a:r>
+            <a:pPr algn="l" indent="0" marL="0">
+              <a:lnSpc>
+                <a:spcPts val="1620"/>
+              </a:lnSpc>
+              <a:spcAft>
+                <a:spcPts val="300"/>
+              </a:spcAft>
+              <a:buNone/>
+            </a:pPr>
+            <a:r>
+              <a:rPr lang="en-US" sz="1200" dirty="0">
+                <a:solidFill>
+                  <a:srgbClr val="1C2833"/>
+                </a:solidFill>
+                <a:latin typeface="Arial" pitchFamily="34" charset="0"/>
+                <a:ea typeface="Arial" pitchFamily="34" charset="-122"/>
+                <a:cs typeface="Arial" pitchFamily="34" charset="-120"/>
+              </a:rPr>
+              <a:t> · June–July · </a:t>
+            </a:r>
+            <a:pPr algn="l" indent="0" marL="0">
+              <a:lnSpc>
+                <a:spcPts val="1620"/>
+              </a:lnSpc>
+              <a:spcAft>
+                <a:spcPts val="300"/>
+              </a:spcAft>
+              <a:buNone/>
+            </a:pPr>
+            <a:r>
+              <a:rPr lang="en-US" sz="1200" i="1" dirty="0">
+                <a:solidFill>
+                  <a:srgbClr val="1C2833"/>
+                </a:solidFill>
+                <a:latin typeface="Arial" pitchFamily="34" charset="0"/>
+                <a:ea typeface="Arial" pitchFamily="34" charset="-122"/>
+                <a:cs typeface="Arial" pitchFamily="34" charset="-120"/>
+              </a:rPr>
+              <a:t>Pūrva-</a:t>
+            </a:r>
+            <a:pPr algn="l" indent="0" marL="0">
+              <a:lnSpc>
+                <a:spcPts val="1620"/>
+              </a:lnSpc>
+              <a:spcAft>
+                <a:spcPts val="300"/>
+              </a:spcAft>
+              <a:buNone/>
+            </a:pPr>
+            <a:r>
+              <a:rPr lang="en-US" sz="1200" dirty="0">
+                <a:solidFill>
+                  <a:srgbClr val="1C2833"/>
+                </a:solidFill>
+                <a:latin typeface="Arial" pitchFamily="34" charset="0"/>
+                <a:ea typeface="Arial" pitchFamily="34" charset="-122"/>
+                <a:cs typeface="Arial" pitchFamily="34" charset="-120"/>
+              </a:rPr>
+              <a:t> / </a:t>
+            </a:r>
+            <a:pPr algn="l" indent="0" marL="0">
+              <a:lnSpc>
+                <a:spcPts val="1620"/>
+              </a:lnSpc>
+              <a:spcAft>
+                <a:spcPts val="300"/>
+              </a:spcAft>
+              <a:buNone/>
+            </a:pPr>
+            <a:r>
+              <a:rPr lang="en-US" sz="1200" i="1" dirty="0">
+                <a:solidFill>
+                  <a:srgbClr val="1C2833"/>
+                </a:solidFill>
+                <a:latin typeface="Arial" pitchFamily="34" charset="0"/>
+                <a:ea typeface="Arial" pitchFamily="34" charset="-122"/>
+                <a:cs typeface="Arial" pitchFamily="34" charset="-120"/>
+              </a:rPr>
+              <a:t>Uttara-āṣāḍhā</a:t>
+            </a:r>
+            <a:endParaRPr lang="en-US" sz="1200" dirty="0"/>
+          </a:p>
+          <a:p>
+            <a:pPr algn="l" marL="342900" indent="-342900">
+              <a:lnSpc>
+                <a:spcPts val="1620"/>
+              </a:lnSpc>
+              <a:spcAft>
+                <a:spcPts val="300"/>
+              </a:spcAft>
+              <a:buSzPct val="100000"/>
+              <a:buChar char="•"/>
+            </a:pPr>
+            <a:r>
+              <a:rPr lang="en-US" sz="1200" b="1" dirty="0">
+                <a:solidFill>
+                  <a:srgbClr val="1C2833"/>
+                </a:solidFill>
+                <a:latin typeface="Arial" pitchFamily="34" charset="0"/>
+                <a:ea typeface="Arial" pitchFamily="34" charset="-122"/>
+                <a:cs typeface="Arial" pitchFamily="34" charset="-120"/>
+              </a:rPr>
+              <a:t>5</a:t>
+            </a:r>
+            <a:pPr algn="l" indent="0" marL="0">
+              <a:lnSpc>
+                <a:spcPts val="1620"/>
+              </a:lnSpc>
+              <a:spcAft>
+                <a:spcPts val="300"/>
+              </a:spcAft>
+              <a:buNone/>
+            </a:pPr>
+            <a:r>
+              <a:rPr lang="en-US" sz="1200" dirty="0">
+                <a:solidFill>
+                  <a:srgbClr val="1C2833"/>
+                </a:solidFill>
+                <a:latin typeface="Arial" pitchFamily="34" charset="0"/>
+                <a:ea typeface="Arial" pitchFamily="34" charset="-122"/>
+                <a:cs typeface="Arial" pitchFamily="34" charset="-120"/>
+              </a:rPr>
+              <a:t> — </a:t>
+            </a:r>
+            <a:pPr algn="l" indent="0" marL="0">
+              <a:lnSpc>
+                <a:spcPts val="1620"/>
+              </a:lnSpc>
+              <a:spcAft>
+                <a:spcPts val="300"/>
+              </a:spcAft>
+              <a:buNone/>
+            </a:pPr>
+            <a:r>
+              <a:rPr lang="en-US" sz="1200" i="1" dirty="0">
+                <a:solidFill>
+                  <a:srgbClr val="1C2833"/>
+                </a:solidFill>
+                <a:latin typeface="Arial" pitchFamily="34" charset="0"/>
+                <a:ea typeface="Arial" pitchFamily="34" charset="-122"/>
+                <a:cs typeface="Arial" pitchFamily="34" charset="-120"/>
+              </a:rPr>
+              <a:t>Śrāvaṇa</a:t>
+            </a:r>
+            <a:pPr algn="l" indent="0" marL="0">
+              <a:lnSpc>
+                <a:spcPts val="1620"/>
+              </a:lnSpc>
+              <a:spcAft>
+                <a:spcPts val="300"/>
+              </a:spcAft>
+              <a:buNone/>
+            </a:pPr>
+            <a:r>
+              <a:rPr lang="en-US" sz="1200" dirty="0">
+                <a:solidFill>
+                  <a:srgbClr val="1C2833"/>
+                </a:solidFill>
+                <a:latin typeface="Arial" pitchFamily="34" charset="0"/>
+                <a:ea typeface="Arial" pitchFamily="34" charset="-122"/>
+                <a:cs typeface="Arial" pitchFamily="34" charset="-120"/>
+              </a:rPr>
+              <a:t> · July–August · </a:t>
+            </a:r>
+            <a:pPr algn="l" indent="0" marL="0">
+              <a:lnSpc>
+                <a:spcPts val="1620"/>
+              </a:lnSpc>
+              <a:spcAft>
+                <a:spcPts val="300"/>
+              </a:spcAft>
+              <a:buNone/>
+            </a:pPr>
+            <a:r>
+              <a:rPr lang="en-US" sz="1200" i="1" dirty="0">
+                <a:solidFill>
+                  <a:srgbClr val="1C2833"/>
+                </a:solidFill>
+                <a:latin typeface="Arial" pitchFamily="34" charset="0"/>
+                <a:ea typeface="Arial" pitchFamily="34" charset="-122"/>
+                <a:cs typeface="Arial" pitchFamily="34" charset="-120"/>
+              </a:rPr>
+              <a:t>Śravaṇa</a:t>
+            </a:r>
+            <a:endParaRPr lang="en-US" sz="1200" dirty="0"/>
+          </a:p>
+          <a:p>
+            <a:pPr algn="l" marL="342900" indent="-342900">
+              <a:lnSpc>
+                <a:spcPts val="1620"/>
+              </a:lnSpc>
+              <a:spcAft>
+                <a:spcPts val="300"/>
+              </a:spcAft>
+              <a:buSzPct val="100000"/>
+              <a:buChar char="•"/>
+            </a:pPr>
+            <a:r>
+              <a:rPr lang="en-US" sz="1200" b="1" dirty="0">
+                <a:solidFill>
+                  <a:srgbClr val="1C2833"/>
+                </a:solidFill>
+                <a:latin typeface="Arial" pitchFamily="34" charset="0"/>
+                <a:ea typeface="Arial" pitchFamily="34" charset="-122"/>
+                <a:cs typeface="Arial" pitchFamily="34" charset="-120"/>
+              </a:rPr>
+              <a:t>6</a:t>
+            </a:r>
+            <a:pPr algn="l" indent="0" marL="0">
+              <a:lnSpc>
+                <a:spcPts val="1620"/>
+              </a:lnSpc>
+              <a:spcAft>
+                <a:spcPts val="300"/>
+              </a:spcAft>
+              <a:buNone/>
+            </a:pPr>
+            <a:r>
+              <a:rPr lang="en-US" sz="1200" dirty="0">
+                <a:solidFill>
+                  <a:srgbClr val="1C2833"/>
+                </a:solidFill>
+                <a:latin typeface="Arial" pitchFamily="34" charset="0"/>
+                <a:ea typeface="Arial" pitchFamily="34" charset="-122"/>
+                <a:cs typeface="Arial" pitchFamily="34" charset="-120"/>
+              </a:rPr>
+              <a:t> — </a:t>
+            </a:r>
+            <a:pPr algn="l" indent="0" marL="0">
+              <a:lnSpc>
+                <a:spcPts val="1620"/>
+              </a:lnSpc>
+              <a:spcAft>
+                <a:spcPts val="300"/>
+              </a:spcAft>
+              <a:buNone/>
+            </a:pPr>
+            <a:r>
+              <a:rPr lang="en-US" sz="1200" i="1" dirty="0">
+                <a:solidFill>
+                  <a:srgbClr val="1C2833"/>
+                </a:solidFill>
+                <a:latin typeface="Arial" pitchFamily="34" charset="0"/>
+                <a:ea typeface="Arial" pitchFamily="34" charset="-122"/>
+                <a:cs typeface="Arial" pitchFamily="34" charset="-120"/>
+              </a:rPr>
+              <a:t>Bhādrapada</a:t>
+            </a:r>
+            <a:pPr algn="l" indent="0" marL="0">
+              <a:lnSpc>
+                <a:spcPts val="1620"/>
+              </a:lnSpc>
+              <a:spcAft>
+                <a:spcPts val="300"/>
+              </a:spcAft>
+              <a:buNone/>
+            </a:pPr>
+            <a:r>
+              <a:rPr lang="en-US" sz="1200" dirty="0">
+                <a:solidFill>
+                  <a:srgbClr val="1C2833"/>
+                </a:solidFill>
+                <a:latin typeface="Arial" pitchFamily="34" charset="0"/>
+                <a:ea typeface="Arial" pitchFamily="34" charset="-122"/>
+                <a:cs typeface="Arial" pitchFamily="34" charset="-120"/>
+              </a:rPr>
+              <a:t> · August–September · </a:t>
+            </a:r>
+            <a:pPr algn="l" indent="0" marL="0">
+              <a:lnSpc>
+                <a:spcPts val="1620"/>
+              </a:lnSpc>
+              <a:spcAft>
+                <a:spcPts val="300"/>
+              </a:spcAft>
+              <a:buNone/>
+            </a:pPr>
+            <a:r>
+              <a:rPr lang="en-US" sz="1200" i="1" dirty="0">
+                <a:solidFill>
+                  <a:srgbClr val="1C2833"/>
+                </a:solidFill>
+                <a:latin typeface="Arial" pitchFamily="34" charset="0"/>
+                <a:ea typeface="Arial" pitchFamily="34" charset="-122"/>
+                <a:cs typeface="Arial" pitchFamily="34" charset="-120"/>
+              </a:rPr>
+              <a:t>Pūrva-</a:t>
+            </a:r>
+            <a:pPr algn="l" indent="0" marL="0">
+              <a:lnSpc>
+                <a:spcPts val="1620"/>
+              </a:lnSpc>
+              <a:spcAft>
+                <a:spcPts val="300"/>
+              </a:spcAft>
+              <a:buNone/>
+            </a:pPr>
+            <a:r>
+              <a:rPr lang="en-US" sz="1200" dirty="0">
+                <a:solidFill>
+                  <a:srgbClr val="1C2833"/>
+                </a:solidFill>
+                <a:latin typeface="Arial" pitchFamily="34" charset="0"/>
+                <a:ea typeface="Arial" pitchFamily="34" charset="-122"/>
+                <a:cs typeface="Arial" pitchFamily="34" charset="-120"/>
+              </a:rPr>
+              <a:t> / </a:t>
+            </a:r>
+            <a:pPr algn="l" indent="0" marL="0">
+              <a:lnSpc>
+                <a:spcPts val="1620"/>
+              </a:lnSpc>
+              <a:spcAft>
+                <a:spcPts val="300"/>
+              </a:spcAft>
+              <a:buNone/>
+            </a:pPr>
+            <a:r>
+              <a:rPr lang="en-US" sz="1200" i="1" dirty="0">
+                <a:solidFill>
+                  <a:srgbClr val="1C2833"/>
+                </a:solidFill>
+                <a:latin typeface="Arial" pitchFamily="34" charset="0"/>
+                <a:ea typeface="Arial" pitchFamily="34" charset="-122"/>
+                <a:cs typeface="Arial" pitchFamily="34" charset="-120"/>
+              </a:rPr>
+              <a:t>Uttara-bhādrapadā</a:t>
+            </a:r>
+            <a:endParaRPr lang="en-US" sz="1200" dirty="0"/>
+          </a:p>
+          <a:p>
+            <a:pPr algn="l" marL="342900" indent="-342900">
+              <a:lnSpc>
+                <a:spcPts val="1620"/>
+              </a:lnSpc>
+              <a:spcAft>
+                <a:spcPts val="300"/>
+              </a:spcAft>
+              <a:buSzPct val="100000"/>
+              <a:buChar char="•"/>
+            </a:pPr>
+            <a:r>
+              <a:rPr lang="en-US" sz="1200" b="1" dirty="0">
+                <a:solidFill>
+                  <a:srgbClr val="1C2833"/>
+                </a:solidFill>
+                <a:latin typeface="Arial" pitchFamily="34" charset="0"/>
+                <a:ea typeface="Arial" pitchFamily="34" charset="-122"/>
+                <a:cs typeface="Arial" pitchFamily="34" charset="-120"/>
+              </a:rPr>
+              <a:t>7</a:t>
+            </a:r>
+            <a:pPr algn="l" indent="0" marL="0">
+              <a:lnSpc>
+                <a:spcPts val="1620"/>
+              </a:lnSpc>
+              <a:spcAft>
+                <a:spcPts val="300"/>
+              </a:spcAft>
+              <a:buNone/>
+            </a:pPr>
+            <a:r>
+              <a:rPr lang="en-US" sz="1200" dirty="0">
+                <a:solidFill>
+                  <a:srgbClr val="1C2833"/>
+                </a:solidFill>
+                <a:latin typeface="Arial" pitchFamily="34" charset="0"/>
+                <a:ea typeface="Arial" pitchFamily="34" charset="-122"/>
+                <a:cs typeface="Arial" pitchFamily="34" charset="-120"/>
+              </a:rPr>
+              <a:t> — </a:t>
+            </a:r>
+            <a:pPr algn="l" indent="0" marL="0">
+              <a:lnSpc>
+                <a:spcPts val="1620"/>
+              </a:lnSpc>
+              <a:spcAft>
+                <a:spcPts val="300"/>
+              </a:spcAft>
+              <a:buNone/>
+            </a:pPr>
+            <a:r>
+              <a:rPr lang="en-US" sz="1200" i="1" dirty="0">
+                <a:solidFill>
+                  <a:srgbClr val="1C2833"/>
+                </a:solidFill>
+                <a:latin typeface="Arial" pitchFamily="34" charset="0"/>
+                <a:ea typeface="Arial" pitchFamily="34" charset="-122"/>
+                <a:cs typeface="Arial" pitchFamily="34" charset="-120"/>
+              </a:rPr>
+              <a:t>Āśvina</a:t>
+            </a:r>
+            <a:pPr algn="l" indent="0" marL="0">
+              <a:lnSpc>
+                <a:spcPts val="1620"/>
+              </a:lnSpc>
+              <a:spcAft>
+                <a:spcPts val="300"/>
+              </a:spcAft>
+              <a:buNone/>
+            </a:pPr>
+            <a:r>
+              <a:rPr lang="en-US" sz="1200" dirty="0">
+                <a:solidFill>
+                  <a:srgbClr val="1C2833"/>
+                </a:solidFill>
+                <a:latin typeface="Arial" pitchFamily="34" charset="0"/>
+                <a:ea typeface="Arial" pitchFamily="34" charset="-122"/>
+                <a:cs typeface="Arial" pitchFamily="34" charset="-120"/>
+              </a:rPr>
+              <a:t> · September–October · </a:t>
+            </a:r>
+            <a:pPr algn="l" indent="0" marL="0">
+              <a:lnSpc>
+                <a:spcPts val="1620"/>
+              </a:lnSpc>
+              <a:spcAft>
+                <a:spcPts val="300"/>
+              </a:spcAft>
+              <a:buNone/>
+            </a:pPr>
+            <a:r>
+              <a:rPr lang="en-US" sz="1200" i="1" dirty="0">
+                <a:solidFill>
+                  <a:srgbClr val="1C2833"/>
+                </a:solidFill>
+                <a:latin typeface="Arial" pitchFamily="34" charset="0"/>
+                <a:ea typeface="Arial" pitchFamily="34" charset="-122"/>
+                <a:cs typeface="Arial" pitchFamily="34" charset="-120"/>
+              </a:rPr>
+              <a:t>Aśvinī</a:t>
+            </a:r>
+            <a:endParaRPr lang="en-US" sz="1200" dirty="0"/>
+          </a:p>
+          <a:p>
+            <a:pPr algn="l" marL="342900" indent="-342900">
+              <a:lnSpc>
+                <a:spcPts val="1620"/>
+              </a:lnSpc>
+              <a:spcAft>
+                <a:spcPts val="300"/>
+              </a:spcAft>
+              <a:buSzPct val="100000"/>
+              <a:buChar char="•"/>
+            </a:pPr>
+            <a:r>
+              <a:rPr lang="en-US" sz="1200" b="1" dirty="0">
+                <a:solidFill>
+                  <a:srgbClr val="1C2833"/>
+                </a:solidFill>
+                <a:latin typeface="Arial" pitchFamily="34" charset="0"/>
+                <a:ea typeface="Arial" pitchFamily="34" charset="-122"/>
+                <a:cs typeface="Arial" pitchFamily="34" charset="-120"/>
+              </a:rPr>
+              <a:t>8</a:t>
+            </a:r>
+            <a:pPr algn="l" indent="0" marL="0">
+              <a:lnSpc>
+                <a:spcPts val="1620"/>
+              </a:lnSpc>
+              <a:spcAft>
+                <a:spcPts val="300"/>
+              </a:spcAft>
+              <a:buNone/>
+            </a:pPr>
+            <a:r>
+              <a:rPr lang="en-US" sz="1200" dirty="0">
+                <a:solidFill>
+                  <a:srgbClr val="1C2833"/>
+                </a:solidFill>
+                <a:latin typeface="Arial" pitchFamily="34" charset="0"/>
+                <a:ea typeface="Arial" pitchFamily="34" charset="-122"/>
+                <a:cs typeface="Arial" pitchFamily="34" charset="-120"/>
+              </a:rPr>
+              <a:t> — </a:t>
+            </a:r>
+            <a:pPr algn="l" indent="0" marL="0">
+              <a:lnSpc>
+                <a:spcPts val="1620"/>
+              </a:lnSpc>
+              <a:spcAft>
+                <a:spcPts val="300"/>
+              </a:spcAft>
+              <a:buNone/>
+            </a:pPr>
+            <a:r>
+              <a:rPr lang="en-US" sz="1200" i="1" dirty="0">
+                <a:solidFill>
+                  <a:srgbClr val="1C2833"/>
+                </a:solidFill>
+                <a:latin typeface="Arial" pitchFamily="34" charset="0"/>
+                <a:ea typeface="Arial" pitchFamily="34" charset="-122"/>
+                <a:cs typeface="Arial" pitchFamily="34" charset="-120"/>
+              </a:rPr>
+              <a:t>Kārtika</a:t>
+            </a:r>
+            <a:pPr algn="l" indent="0" marL="0">
+              <a:lnSpc>
+                <a:spcPts val="1620"/>
+              </a:lnSpc>
+              <a:spcAft>
+                <a:spcPts val="300"/>
+              </a:spcAft>
+              <a:buNone/>
+            </a:pPr>
+            <a:r>
+              <a:rPr lang="en-US" sz="1200" dirty="0">
+                <a:solidFill>
+                  <a:srgbClr val="1C2833"/>
+                </a:solidFill>
+                <a:latin typeface="Arial" pitchFamily="34" charset="0"/>
+                <a:ea typeface="Arial" pitchFamily="34" charset="-122"/>
+                <a:cs typeface="Arial" pitchFamily="34" charset="-120"/>
+              </a:rPr>
+              <a:t> · October–November · </a:t>
+            </a:r>
+            <a:pPr algn="l" indent="0" marL="0">
+              <a:lnSpc>
+                <a:spcPts val="1620"/>
+              </a:lnSpc>
+              <a:spcAft>
+                <a:spcPts val="300"/>
+              </a:spcAft>
+              <a:buNone/>
+            </a:pPr>
+            <a:r>
+              <a:rPr lang="en-US" sz="1200" i="1" dirty="0">
+                <a:solidFill>
+                  <a:srgbClr val="1C2833"/>
+                </a:solidFill>
+                <a:latin typeface="Arial" pitchFamily="34" charset="0"/>
+                <a:ea typeface="Arial" pitchFamily="34" charset="-122"/>
+                <a:cs typeface="Arial" pitchFamily="34" charset="-120"/>
+              </a:rPr>
+              <a:t>Kṛttikā</a:t>
+            </a:r>
+            <a:endParaRPr lang="en-US" sz="1200" dirty="0"/>
+          </a:p>
+          <a:p>
+            <a:pPr algn="l" marL="342900" indent="-342900">
+              <a:lnSpc>
+                <a:spcPts val="1620"/>
+              </a:lnSpc>
+              <a:spcAft>
+                <a:spcPts val="300"/>
+              </a:spcAft>
+              <a:buSzPct val="100000"/>
+              <a:buChar char="•"/>
+            </a:pPr>
+            <a:r>
+              <a:rPr lang="en-US" sz="1200" b="1" dirty="0">
+                <a:solidFill>
+                  <a:srgbClr val="1C2833"/>
+                </a:solidFill>
+                <a:latin typeface="Arial" pitchFamily="34" charset="0"/>
+                <a:ea typeface="Arial" pitchFamily="34" charset="-122"/>
+                <a:cs typeface="Arial" pitchFamily="34" charset="-120"/>
+              </a:rPr>
+              <a:t>9</a:t>
+            </a:r>
+            <a:pPr algn="l" indent="0" marL="0">
+              <a:lnSpc>
+                <a:spcPts val="1620"/>
+              </a:lnSpc>
+              <a:spcAft>
+                <a:spcPts val="300"/>
+              </a:spcAft>
+              <a:buNone/>
+            </a:pPr>
+            <a:r>
+              <a:rPr lang="en-US" sz="1200" dirty="0">
+                <a:solidFill>
+                  <a:srgbClr val="1C2833"/>
+                </a:solidFill>
+                <a:latin typeface="Arial" pitchFamily="34" charset="0"/>
+                <a:ea typeface="Arial" pitchFamily="34" charset="-122"/>
+                <a:cs typeface="Arial" pitchFamily="34" charset="-120"/>
+              </a:rPr>
+              <a:t> — </a:t>
+            </a:r>
+            <a:pPr algn="l" indent="0" marL="0">
+              <a:lnSpc>
+                <a:spcPts val="1620"/>
+              </a:lnSpc>
+              <a:spcAft>
+                <a:spcPts val="300"/>
+              </a:spcAft>
+              <a:buNone/>
+            </a:pPr>
+            <a:r>
+              <a:rPr lang="en-US" sz="1200" i="1" dirty="0">
+                <a:solidFill>
+                  <a:srgbClr val="1C2833"/>
+                </a:solidFill>
+                <a:latin typeface="Arial" pitchFamily="34" charset="0"/>
+                <a:ea typeface="Arial" pitchFamily="34" charset="-122"/>
+                <a:cs typeface="Arial" pitchFamily="34" charset="-120"/>
+              </a:rPr>
+              <a:t>Mārgaśīrṣa</a:t>
+            </a:r>
+            <a:pPr algn="l" indent="0" marL="0">
+              <a:lnSpc>
+                <a:spcPts val="1620"/>
+              </a:lnSpc>
+              <a:spcAft>
+                <a:spcPts val="300"/>
+              </a:spcAft>
+              <a:buNone/>
+            </a:pPr>
+            <a:r>
+              <a:rPr lang="en-US" sz="1200" dirty="0">
+                <a:solidFill>
+                  <a:srgbClr val="1C2833"/>
+                </a:solidFill>
+                <a:latin typeface="Arial" pitchFamily="34" charset="0"/>
+                <a:ea typeface="Arial" pitchFamily="34" charset="-122"/>
+                <a:cs typeface="Arial" pitchFamily="34" charset="-120"/>
+              </a:rPr>
+              <a:t> · November–December · </a:t>
+            </a:r>
+            <a:pPr algn="l" indent="0" marL="0">
+              <a:lnSpc>
+                <a:spcPts val="1620"/>
+              </a:lnSpc>
+              <a:spcAft>
+                <a:spcPts val="300"/>
+              </a:spcAft>
+              <a:buNone/>
+            </a:pPr>
+            <a:r>
+              <a:rPr lang="en-US" sz="1200" i="1" dirty="0">
+                <a:solidFill>
+                  <a:srgbClr val="1C2833"/>
+                </a:solidFill>
+                <a:latin typeface="Arial" pitchFamily="34" charset="0"/>
+                <a:ea typeface="Arial" pitchFamily="34" charset="-122"/>
+                <a:cs typeface="Arial" pitchFamily="34" charset="-120"/>
+              </a:rPr>
+              <a:t>Mṛgaśīrṣa</a:t>
+            </a:r>
+            <a:endParaRPr lang="en-US" sz="1200" dirty="0"/>
+          </a:p>
+          <a:p>
+            <a:pPr algn="l" marL="342900" indent="-342900">
+              <a:lnSpc>
+                <a:spcPts val="1620"/>
+              </a:lnSpc>
+              <a:spcAft>
+                <a:spcPts val="300"/>
+              </a:spcAft>
+              <a:buSzPct val="100000"/>
+              <a:buChar char="•"/>
+            </a:pPr>
+            <a:r>
+              <a:rPr lang="en-US" sz="1200" b="1" dirty="0">
+                <a:solidFill>
+                  <a:srgbClr val="1C2833"/>
+                </a:solidFill>
+                <a:latin typeface="Arial" pitchFamily="34" charset="0"/>
+                <a:ea typeface="Arial" pitchFamily="34" charset="-122"/>
+                <a:cs typeface="Arial" pitchFamily="34" charset="-120"/>
+              </a:rPr>
+              <a:t>10</a:t>
+            </a:r>
+            <a:pPr algn="l" indent="0" marL="0">
+              <a:lnSpc>
+                <a:spcPts val="1620"/>
+              </a:lnSpc>
+              <a:spcAft>
+                <a:spcPts val="300"/>
+              </a:spcAft>
+              <a:buNone/>
+            </a:pPr>
+            <a:r>
+              <a:rPr lang="en-US" sz="1200" dirty="0">
+                <a:solidFill>
+                  <a:srgbClr val="1C2833"/>
+                </a:solidFill>
+                <a:latin typeface="Arial" pitchFamily="34" charset="0"/>
+                <a:ea typeface="Arial" pitchFamily="34" charset="-122"/>
+                <a:cs typeface="Arial" pitchFamily="34" charset="-120"/>
+              </a:rPr>
+              <a:t> — </a:t>
+            </a:r>
+            <a:pPr algn="l" indent="0" marL="0">
+              <a:lnSpc>
+                <a:spcPts val="1620"/>
+              </a:lnSpc>
+              <a:spcAft>
+                <a:spcPts val="300"/>
+              </a:spcAft>
+              <a:buNone/>
+            </a:pPr>
+            <a:r>
+              <a:rPr lang="en-US" sz="1200" i="1" dirty="0">
+                <a:solidFill>
+                  <a:srgbClr val="1C2833"/>
+                </a:solidFill>
+                <a:latin typeface="Arial" pitchFamily="34" charset="0"/>
+                <a:ea typeface="Arial" pitchFamily="34" charset="-122"/>
+                <a:cs typeface="Arial" pitchFamily="34" charset="-120"/>
+              </a:rPr>
+              <a:t>Pauṣa</a:t>
+            </a:r>
+            <a:pPr algn="l" indent="0" marL="0">
+              <a:lnSpc>
+                <a:spcPts val="1620"/>
+              </a:lnSpc>
+              <a:spcAft>
+                <a:spcPts val="300"/>
+              </a:spcAft>
+              <a:buNone/>
+            </a:pPr>
+            <a:r>
+              <a:rPr lang="en-US" sz="1200" dirty="0">
+                <a:solidFill>
+                  <a:srgbClr val="1C2833"/>
+                </a:solidFill>
+                <a:latin typeface="Arial" pitchFamily="34" charset="0"/>
+                <a:ea typeface="Arial" pitchFamily="34" charset="-122"/>
+                <a:cs typeface="Arial" pitchFamily="34" charset="-120"/>
+              </a:rPr>
+              <a:t> · December–January · </a:t>
+            </a:r>
+            <a:pPr algn="l" indent="0" marL="0">
+              <a:lnSpc>
+                <a:spcPts val="1620"/>
+              </a:lnSpc>
+              <a:spcAft>
+                <a:spcPts val="300"/>
+              </a:spcAft>
+              <a:buNone/>
+            </a:pPr>
+            <a:r>
+              <a:rPr lang="en-US" sz="1200" i="1" dirty="0">
+                <a:solidFill>
+                  <a:srgbClr val="1C2833"/>
+                </a:solidFill>
+                <a:latin typeface="Arial" pitchFamily="34" charset="0"/>
+                <a:ea typeface="Arial" pitchFamily="34" charset="-122"/>
+                <a:cs typeface="Arial" pitchFamily="34" charset="-120"/>
+              </a:rPr>
+              <a:t>Puṣya</a:t>
+            </a:r>
+            <a:endParaRPr lang="en-US" sz="1200" dirty="0"/>
+          </a:p>
+          <a:p>
+            <a:pPr algn="l" marL="342900" indent="-342900">
+              <a:lnSpc>
+                <a:spcPts val="1620"/>
+              </a:lnSpc>
+              <a:spcAft>
+                <a:spcPts val="300"/>
+              </a:spcAft>
+              <a:buSzPct val="100000"/>
+              <a:buChar char="•"/>
+            </a:pPr>
+            <a:r>
+              <a:rPr lang="en-US" sz="1200" b="1" dirty="0">
+                <a:solidFill>
+                  <a:srgbClr val="1C2833"/>
+                </a:solidFill>
+                <a:latin typeface="Arial" pitchFamily="34" charset="0"/>
+                <a:ea typeface="Arial" pitchFamily="34" charset="-122"/>
+                <a:cs typeface="Arial" pitchFamily="34" charset="-120"/>
+              </a:rPr>
+              <a:t>11</a:t>
+            </a:r>
+            <a:pPr algn="l" indent="0" marL="0">
+              <a:lnSpc>
+                <a:spcPts val="1620"/>
+              </a:lnSpc>
+              <a:spcAft>
+                <a:spcPts val="300"/>
+              </a:spcAft>
+              <a:buNone/>
+            </a:pPr>
+            <a:r>
+              <a:rPr lang="en-US" sz="1200" dirty="0">
+                <a:solidFill>
+                  <a:srgbClr val="1C2833"/>
+                </a:solidFill>
+                <a:latin typeface="Arial" pitchFamily="34" charset="0"/>
+                <a:ea typeface="Arial" pitchFamily="34" charset="-122"/>
+                <a:cs typeface="Arial" pitchFamily="34" charset="-120"/>
+              </a:rPr>
+              <a:t> — </a:t>
+            </a:r>
+            <a:pPr algn="l" indent="0" marL="0">
+              <a:lnSpc>
+                <a:spcPts val="1620"/>
+              </a:lnSpc>
+              <a:spcAft>
+                <a:spcPts val="300"/>
+              </a:spcAft>
+              <a:buNone/>
+            </a:pPr>
+            <a:r>
+              <a:rPr lang="en-US" sz="1200" i="1" dirty="0">
+                <a:solidFill>
+                  <a:srgbClr val="1C2833"/>
+                </a:solidFill>
+                <a:latin typeface="Arial" pitchFamily="34" charset="0"/>
+                <a:ea typeface="Arial" pitchFamily="34" charset="-122"/>
+                <a:cs typeface="Arial" pitchFamily="34" charset="-120"/>
+              </a:rPr>
+              <a:t>Māgha</a:t>
+            </a:r>
+            <a:pPr algn="l" indent="0" marL="0">
+              <a:lnSpc>
+                <a:spcPts val="1620"/>
+              </a:lnSpc>
+              <a:spcAft>
+                <a:spcPts val="300"/>
+              </a:spcAft>
+              <a:buNone/>
+            </a:pPr>
+            <a:r>
+              <a:rPr lang="en-US" sz="1200" dirty="0">
+                <a:solidFill>
+                  <a:srgbClr val="1C2833"/>
+                </a:solidFill>
+                <a:latin typeface="Arial" pitchFamily="34" charset="0"/>
+                <a:ea typeface="Arial" pitchFamily="34" charset="-122"/>
+                <a:cs typeface="Arial" pitchFamily="34" charset="-120"/>
+              </a:rPr>
+              <a:t> · January–February · </a:t>
+            </a:r>
+            <a:pPr algn="l" indent="0" marL="0">
+              <a:lnSpc>
+                <a:spcPts val="1620"/>
+              </a:lnSpc>
+              <a:spcAft>
+                <a:spcPts val="300"/>
+              </a:spcAft>
+              <a:buNone/>
+            </a:pPr>
+            <a:r>
+              <a:rPr lang="en-US" sz="1200" i="1" dirty="0">
+                <a:solidFill>
+                  <a:srgbClr val="1C2833"/>
+                </a:solidFill>
+                <a:latin typeface="Arial" pitchFamily="34" charset="0"/>
+                <a:ea typeface="Arial" pitchFamily="34" charset="-122"/>
+                <a:cs typeface="Arial" pitchFamily="34" charset="-120"/>
+              </a:rPr>
+              <a:t>Maghā</a:t>
+            </a:r>
+            <a:endParaRPr lang="en-US" sz="1200" dirty="0"/>
+          </a:p>
+        </p:txBody>
+      </p:sp>
+      <p:sp>
+        <p:nvSpPr>
+          <p:cNvPr id="5" name="Text 3"/>
           <p:cNvSpPr/>
           <p:nvPr/>
         </p:nvSpPr>
@@ -6149,7 +11668,7 @@
                 <a:ea typeface="Georgia" pitchFamily="34" charset="-122"/>
                 <a:cs typeface="Georgia" pitchFamily="34" charset="-120"/>
               </a:rPr>
-              <a:t>Homework</a:t>
+              <a:t>Core (20 min) (cont.)</a:t>
             </a:r>
             <a:endParaRPr lang="en-US" sz="1800" dirty="0"/>
           </a:p>
@@ -6163,8 +11682,8 @@
         </p:nvSpPr>
         <p:spPr>
           <a:xfrm>
-            <a:off x="406301" y="870942"/>
-            <a:ext cx="8498026" cy="639812"/>
+            <a:off x="634901" y="883593"/>
+            <a:ext cx="8102798" cy="281880"/>
           </a:xfrm>
           <a:prstGeom prst="rect">
             <a:avLst/>
@@ -6176,40 +11695,15 @@
           <a:bodyPr wrap="square" lIns="0" tIns="0" rIns="0" bIns="0" rtlCol="0" anchor="t"/>
           <a:lstStyle/>
           <a:p>
-            <a:pPr algn="l" indent="0" marL="0">
-              <a:lnSpc>
-                <a:spcPts val="1680"/>
-              </a:lnSpc>
-              <a:spcBef>
-                <a:spcPts val="300"/>
-              </a:spcBef>
-              <a:spcAft>
-                <a:spcPts val="300"/>
-              </a:spcAft>
-              <a:buNone/>
-            </a:pPr>
-            <a:r>
-              <a:rPr lang="en-US" sz="1200" dirty="0">
-                <a:solidFill>
-                  <a:srgbClr val="1C2833"/>
-                </a:solidFill>
-                <a:latin typeface="Arial" pitchFamily="34" charset="0"/>
-                <a:ea typeface="Arial" pitchFamily="34" charset="-122"/>
-                <a:cs typeface="Arial" pitchFamily="34" charset="-120"/>
-              </a:rPr>
-              <a:t>– Continue the Moon diary. – Submit your </a:t>
-            </a:r>
-            <a:pPr algn="l" indent="0" marL="0">
-              <a:lnSpc>
-                <a:spcPts val="1680"/>
-              </a:lnSpc>
-              <a:spcBef>
-                <a:spcPts val="300"/>
-              </a:spcBef>
-              <a:spcAft>
-                <a:spcPts val="300"/>
-              </a:spcAft>
-              <a:buNone/>
+            <a:pPr algn="l" marL="342900" indent="-342900">
+              <a:lnSpc>
+                <a:spcPts val="1620"/>
+              </a:lnSpc>
+              <a:spcAft>
+                <a:spcPts val="300"/>
+              </a:spcAft>
+              <a:buSzPct val="100000"/>
+              <a:buChar char="•"/>
             </a:pPr>
             <a:r>
               <a:rPr lang="en-US" sz="1200" b="1" dirty="0">
@@ -6220,30 +11714,107 @@
                 <a:ea typeface="Arial" pitchFamily="34" charset="-122"/>
                 <a:cs typeface="Arial" pitchFamily="34" charset="-120"/>
               </a:rPr>
-              <a:t>project plan paragraph</a:t>
-            </a:r>
-            <a:pPr algn="l" indent="0" marL="0">
-              <a:lnSpc>
-                <a:spcPts val="1680"/>
-              </a:lnSpc>
-              <a:spcBef>
-                <a:spcPts val="300"/>
-              </a:spcBef>
-              <a:spcAft>
-                <a:spcPts val="300"/>
-              </a:spcAft>
-              <a:buNone/>
-            </a:pPr>
-            <a:r>
-              <a:rPr lang="en-US" sz="1200" dirty="0">
-                <a:solidFill>
-                  <a:srgbClr val="1C2833"/>
-                </a:solidFill>
-                <a:latin typeface="Arial" pitchFamily="34" charset="0"/>
-                <a:ea typeface="Arial" pitchFamily="34" charset="-122"/>
-                <a:cs typeface="Arial" pitchFamily="34" charset="-120"/>
-              </a:rPr>
-              <a:t> — 5–8 sentences stating which lunar phenomenon you'll cover (phases / eclipses / intercalary month / something else), in what format, and what your audience walks away with.</a:t>
+              <a:t>12</a:t>
+            </a:r>
+            <a:pPr algn="l" indent="0" marL="0">
+              <a:lnSpc>
+                <a:spcPts val="1620"/>
+              </a:lnSpc>
+              <a:spcAft>
+                <a:spcPts val="300"/>
+              </a:spcAft>
+              <a:buNone/>
+            </a:pPr>
+            <a:r>
+              <a:rPr lang="en-US" sz="1200" dirty="0">
+                <a:solidFill>
+                  <a:srgbClr val="1C2833"/>
+                </a:solidFill>
+                <a:latin typeface="Arial" pitchFamily="34" charset="0"/>
+                <a:ea typeface="Arial" pitchFamily="34" charset="-122"/>
+                <a:cs typeface="Arial" pitchFamily="34" charset="-120"/>
+              </a:rPr>
+              <a:t> — </a:t>
+            </a:r>
+            <a:pPr algn="l" indent="0" marL="0">
+              <a:lnSpc>
+                <a:spcPts val="1620"/>
+              </a:lnSpc>
+              <a:spcAft>
+                <a:spcPts val="300"/>
+              </a:spcAft>
+              <a:buNone/>
+            </a:pPr>
+            <a:r>
+              <a:rPr lang="en-US" sz="1200" i="1" dirty="0">
+                <a:solidFill>
+                  <a:srgbClr val="1C2833"/>
+                </a:solidFill>
+                <a:latin typeface="Arial" pitchFamily="34" charset="0"/>
+                <a:ea typeface="Arial" pitchFamily="34" charset="-122"/>
+                <a:cs typeface="Arial" pitchFamily="34" charset="-120"/>
+              </a:rPr>
+              <a:t>Phālguna</a:t>
+            </a:r>
+            <a:pPr algn="l" indent="0" marL="0">
+              <a:lnSpc>
+                <a:spcPts val="1620"/>
+              </a:lnSpc>
+              <a:spcAft>
+                <a:spcPts val="300"/>
+              </a:spcAft>
+              <a:buNone/>
+            </a:pPr>
+            <a:r>
+              <a:rPr lang="en-US" sz="1200" dirty="0">
+                <a:solidFill>
+                  <a:srgbClr val="1C2833"/>
+                </a:solidFill>
+                <a:latin typeface="Arial" pitchFamily="34" charset="0"/>
+                <a:ea typeface="Arial" pitchFamily="34" charset="-122"/>
+                <a:cs typeface="Arial" pitchFamily="34" charset="-120"/>
+              </a:rPr>
+              <a:t> · February–March · </a:t>
+            </a:r>
+            <a:pPr algn="l" indent="0" marL="0">
+              <a:lnSpc>
+                <a:spcPts val="1620"/>
+              </a:lnSpc>
+              <a:spcAft>
+                <a:spcPts val="300"/>
+              </a:spcAft>
+              <a:buNone/>
+            </a:pPr>
+            <a:r>
+              <a:rPr lang="en-US" sz="1200" i="1" dirty="0">
+                <a:solidFill>
+                  <a:srgbClr val="1C2833"/>
+                </a:solidFill>
+                <a:latin typeface="Arial" pitchFamily="34" charset="0"/>
+                <a:ea typeface="Arial" pitchFamily="34" charset="-122"/>
+                <a:cs typeface="Arial" pitchFamily="34" charset="-120"/>
+              </a:rPr>
+              <a:t>Phālgunī</a:t>
+            </a:r>
+            <a:pPr algn="l" indent="0" marL="0">
+              <a:lnSpc>
+                <a:spcPts val="1620"/>
+              </a:lnSpc>
+              <a:spcAft>
+                <a:spcPts val="300"/>
+              </a:spcAft>
+              <a:buNone/>
+            </a:pPr>
+            <a:r>
+              <a:rPr lang="en-US" sz="1200" dirty="0">
+                <a:solidFill>
+                  <a:srgbClr val="1C2833"/>
+                </a:solidFill>
+                <a:latin typeface="Arial" pitchFamily="34" charset="0"/>
+                <a:ea typeface="Arial" pitchFamily="34" charset="-122"/>
+                <a:cs typeface="Arial" pitchFamily="34" charset="-120"/>
+              </a:rPr>
+              <a:t> (Pūrva / Uttara)</a:t>
             </a:r>
             <a:endParaRPr lang="en-US" sz="1200" dirty="0"/>
           </a:p>
@@ -6252,6 +11823,152 @@
       <p:sp>
         <p:nvSpPr>
           <p:cNvPr id="5" name="Text 3"/>
+          <p:cNvSpPr/>
+          <p:nvPr/>
+        </p:nvSpPr>
+        <p:spPr>
+          <a:xfrm>
+            <a:off x="634901" y="1266974"/>
+            <a:ext cx="8102798" cy="693241"/>
+          </a:xfrm>
+          <a:prstGeom prst="rect">
+            <a:avLst/>
+          </a:prstGeom>
+          <a:noFill/>
+          <a:ln/>
+        </p:spPr>
+        <p:txBody>
+          <a:bodyPr wrap="square" lIns="0" tIns="0" rIns="0" bIns="0" rtlCol="0" anchor="t"/>
+          <a:lstStyle/>
+          <a:p>
+            <a:pPr algn="l" marL="342900" indent="-342900">
+              <a:lnSpc>
+                <a:spcPts val="1620"/>
+              </a:lnSpc>
+              <a:spcAft>
+                <a:spcPts val="300"/>
+              </a:spcAft>
+              <a:buSzPct val="100000"/>
+              <a:buChar char="•"/>
+            </a:pPr>
+            <a:r>
+              <a:rPr lang="en-US" sz="1200" b="1" dirty="0">
+                <a:solidFill>
+                  <a:srgbClr val="1C2833"/>
+                </a:solidFill>
+                <a:latin typeface="Arial" pitchFamily="34" charset="0"/>
+                <a:ea typeface="Arial" pitchFamily="34" charset="-122"/>
+                <a:cs typeface="Arial" pitchFamily="34" charset="-120"/>
+              </a:rPr>
+              <a:t>Why these names? The naming convention.</a:t>
+            </a:r>
+            <a:pPr algn="l" indent="0" marL="0">
+              <a:lnSpc>
+                <a:spcPts val="1620"/>
+              </a:lnSpc>
+              <a:spcAft>
+                <a:spcPts val="300"/>
+              </a:spcAft>
+              <a:buNone/>
+            </a:pPr>
+            <a:r>
+              <a:rPr lang="en-US" sz="1200" dirty="0">
+                <a:solidFill>
+                  <a:srgbClr val="1C2833"/>
+                </a:solidFill>
+                <a:latin typeface="Arial" pitchFamily="34" charset="0"/>
+                <a:ea typeface="Arial" pitchFamily="34" charset="-122"/>
+                <a:cs typeface="Arial" pitchFamily="34" charset="-120"/>
+              </a:rPr>
+              <a:t> A lunar month is named after the </a:t>
+            </a:r>
+            <a:pPr algn="l" indent="0" marL="0">
+              <a:lnSpc>
+                <a:spcPts val="1620"/>
+              </a:lnSpc>
+              <a:spcAft>
+                <a:spcPts val="300"/>
+              </a:spcAft>
+              <a:buNone/>
+            </a:pPr>
+            <a:r>
+              <a:rPr lang="en-US" sz="1200" i="1" dirty="0">
+                <a:solidFill>
+                  <a:srgbClr val="1C2833"/>
+                </a:solidFill>
+                <a:latin typeface="Arial" pitchFamily="34" charset="0"/>
+                <a:ea typeface="Arial" pitchFamily="34" charset="-122"/>
+                <a:cs typeface="Arial" pitchFamily="34" charset="-120"/>
+              </a:rPr>
+              <a:t>nakṣatra</a:t>
+            </a:r>
+            <a:pPr algn="l" indent="0" marL="0">
+              <a:lnSpc>
+                <a:spcPts val="1620"/>
+              </a:lnSpc>
+              <a:spcAft>
+                <a:spcPts val="300"/>
+              </a:spcAft>
+              <a:buNone/>
+            </a:pPr>
+            <a:r>
+              <a:rPr lang="en-US" sz="1200" dirty="0">
+                <a:solidFill>
+                  <a:srgbClr val="1C2833"/>
+                </a:solidFill>
+                <a:latin typeface="Arial" pitchFamily="34" charset="0"/>
+                <a:ea typeface="Arial" pitchFamily="34" charset="-122"/>
+                <a:cs typeface="Arial" pitchFamily="34" charset="-120"/>
+              </a:rPr>
+              <a:t> in which the </a:t>
+            </a:r>
+            <a:pPr algn="l" indent="0" marL="0">
+              <a:lnSpc>
+                <a:spcPts val="1620"/>
+              </a:lnSpc>
+              <a:spcAft>
+                <a:spcPts val="300"/>
+              </a:spcAft>
+              <a:buNone/>
+            </a:pPr>
+            <a:r>
+              <a:rPr lang="en-US" sz="1200" i="1" dirty="0">
+                <a:solidFill>
+                  <a:srgbClr val="1C2833"/>
+                </a:solidFill>
+                <a:latin typeface="Arial" pitchFamily="34" charset="0"/>
+                <a:ea typeface="Arial" pitchFamily="34" charset="-122"/>
+                <a:cs typeface="Arial" pitchFamily="34" charset="-120"/>
+              </a:rPr>
+              <a:t>pūrṇimā</a:t>
+            </a:r>
+            <a:pPr algn="l" indent="0" marL="0">
+              <a:lnSpc>
+                <a:spcPts val="1620"/>
+              </a:lnSpc>
+              <a:spcAft>
+                <a:spcPts val="300"/>
+              </a:spcAft>
+              <a:buNone/>
+            </a:pPr>
+            <a:r>
+              <a:rPr lang="en-US" sz="1200" dirty="0">
+                <a:solidFill>
+                  <a:srgbClr val="1C2833"/>
+                </a:solidFill>
+                <a:latin typeface="Arial" pitchFamily="34" charset="0"/>
+                <a:ea typeface="Arial" pitchFamily="34" charset="-122"/>
+                <a:cs typeface="Arial" pitchFamily="34" charset="-120"/>
+              </a:rPr>
+              <a:t> (full moon) of that month falls. The Moon at full moon is opposite the Sun, so it sits in a specific star background — the nakṣatra. The lunar month inherits its name from that nakṣatra.</a:t>
+            </a:r>
+            <a:endParaRPr lang="en-US" sz="1200" dirty="0"/>
+          </a:p>
+        </p:txBody>
+      </p:sp>
+      <p:sp>
+        <p:nvSpPr>
+          <p:cNvPr id="6" name="Text 4"/>
           <p:cNvSpPr/>
           <p:nvPr/>
         </p:nvSpPr>
